--- a/downloads/templates/Template_Journey_Presentation_v1.pptx
+++ b/downloads/templates/Template_Journey_Presentation_v1.pptx
@@ -1951,7 +1951,7 @@
         </p:nvSpPr>
         <p:spPr>
           <a:xfrm>
-            <a:off x="457200" y="1234440"/>
+            <a:off x="685800" y="1325880"/>
             <a:ext cx="2286000" cy="365760"/>
           </a:xfrm>
           <a:prstGeom prst="roundRect">
@@ -1978,7 +1978,7 @@
         </p:nvSpPr>
         <p:spPr>
           <a:xfrm>
-            <a:off x="457200" y="1234440"/>
+            <a:off x="685800" y="1325880"/>
             <a:ext cx="2286000" cy="365760"/>
           </a:xfrm>
           <a:prstGeom prst="rect">
@@ -2017,8 +2017,8 @@
         </p:nvSpPr>
         <p:spPr>
           <a:xfrm>
-            <a:off x="457200" y="1783080"/>
-            <a:ext cx="10972800" cy="1463040"/>
+            <a:off x="685800" y="1874520"/>
+            <a:ext cx="10820095" cy="1371600"/>
           </a:xfrm>
           <a:prstGeom prst="rect">
             <a:avLst/>
@@ -2056,8 +2056,8 @@
         </p:nvSpPr>
         <p:spPr>
           <a:xfrm>
-            <a:off x="457200" y="3383280"/>
-            <a:ext cx="7863840" cy="914400"/>
+            <a:off x="685800" y="3429000"/>
+            <a:ext cx="7498080" cy="822960"/>
           </a:xfrm>
           <a:prstGeom prst="rect">
             <a:avLst/>
@@ -2081,7 +2081,7 @@
                 <a:ea typeface="Hanken Grotesk" pitchFamily="34" charset="-122"/>
                 <a:cs typeface="Hanken Grotesk" pitchFamily="34" charset="-120"/>
               </a:rPr>
-              <a:t>Labore et dolore magna aliqua ut enim ad minim veniam quis nostrud exercitation ullamco laboris nisi ut aliquip.</a:t>
+              <a:t>Labore et dolore magna aliqua ut enim ad minim veniam quis nostrud exercitation ullamco.</a:t>
             </a:r>
             <a:endParaRPr lang="en-US" sz="1800" dirty="0"/>
           </a:p>
@@ -2095,7 +2095,7 @@
         </p:nvSpPr>
         <p:spPr>
           <a:xfrm>
-            <a:off x="457200" y="4572000"/>
+            <a:off x="685800" y="4572000"/>
             <a:ext cx="7315200" cy="320040"/>
           </a:xfrm>
           <a:prstGeom prst="rect">
@@ -2134,7 +2134,7 @@
         </p:nvSpPr>
         <p:spPr>
           <a:xfrm>
-            <a:off x="457200" y="5989320"/>
+            <a:off x="685800" y="5943600"/>
             <a:ext cx="7315200" cy="320040"/>
           </a:xfrm>
           <a:prstGeom prst="rect">
@@ -2205,8 +2205,8 @@
         </p:nvSpPr>
         <p:spPr>
           <a:xfrm>
-            <a:off x="457200" y="384048"/>
-            <a:ext cx="8961120" cy="274320"/>
+            <a:off x="685800" y="502920"/>
+            <a:ext cx="8595360" cy="274320"/>
           </a:xfrm>
           <a:prstGeom prst="rect">
             <a:avLst/>
@@ -2244,8 +2244,8 @@
         </p:nvSpPr>
         <p:spPr>
           <a:xfrm>
-            <a:off x="457200" y="676656"/>
-            <a:ext cx="11274552" cy="868680"/>
+            <a:off x="685800" y="804672"/>
+            <a:ext cx="10820095" cy="566928"/>
           </a:xfrm>
           <a:prstGeom prst="rect">
             <a:avLst/>
@@ -2264,7 +2264,7 @@
               <a:buNone/>
             </a:pPr>
             <a:r>
-              <a:rPr lang="en-US" sz="3000" b="1" dirty="0">
+              <a:rPr lang="en-US" sz="2800" b="1" dirty="0">
                 <a:solidFill>
                   <a:srgbClr val="222731"/>
                 </a:solidFill>
@@ -2272,9 +2272,9 @@
                 <a:ea typeface="Bricolage Grotesque" pitchFamily="34" charset="-122"/>
                 <a:cs typeface="Bricolage Grotesque" pitchFamily="34" charset="-120"/>
               </a:rPr>
-              <a:t>Sint occaecat cupidatat non proident sunt in culpa qui officia</a:t>
-            </a:r>
-            <a:endParaRPr lang="en-US" sz="3000" dirty="0"/>
+              <a:t>Sint occaecat cupidatat non proident sunt in</a:t>
+            </a:r>
+            <a:endParaRPr lang="en-US" sz="2800" dirty="0"/>
           </a:p>
         </p:txBody>
       </p:sp>
@@ -2286,7 +2286,7 @@
         </p:nvSpPr>
         <p:spPr>
           <a:xfrm>
-            <a:off x="457200" y="6400800"/>
+            <a:off x="685800" y="6400800"/>
             <a:ext cx="4389120" cy="256032"/>
           </a:xfrm>
           <a:prstGeom prst="rect">
@@ -2326,7 +2326,7 @@
         <p:spPr>
           <a:xfrm>
             <a:off x="4937760" y="6400800"/>
-            <a:ext cx="5943600" cy="256032"/>
+            <a:ext cx="5790895" cy="256032"/>
           </a:xfrm>
           <a:prstGeom prst="rect">
             <a:avLst/>
@@ -2364,7 +2364,7 @@
         </p:nvSpPr>
         <p:spPr>
           <a:xfrm>
-            <a:off x="11091672" y="6400800"/>
+            <a:off x="10865815" y="6400800"/>
             <a:ext cx="640080" cy="256032"/>
           </a:xfrm>
           <a:prstGeom prst="rect">
@@ -2403,12 +2403,12 @@
         </p:nvSpPr>
         <p:spPr>
           <a:xfrm>
-            <a:off x="1965960" y="1645920"/>
-            <a:ext cx="1865925" cy="548640"/>
+            <a:off x="2148840" y="1691640"/>
+            <a:ext cx="1725107" cy="640080"/>
           </a:xfrm>
           <a:prstGeom prst="roundRect">
             <a:avLst>
-              <a:gd name="adj" fmla="val 13333"/>
+              <a:gd name="adj" fmla="val 11429"/>
             </a:avLst>
           </a:prstGeom>
           <a:solidFill>
@@ -2430,8 +2430,8 @@
         </p:nvSpPr>
         <p:spPr>
           <a:xfrm>
-            <a:off x="2093976" y="1645920"/>
-            <a:ext cx="1683045" cy="548640"/>
+            <a:off x="2295144" y="1691640"/>
+            <a:ext cx="1505651" cy="640080"/>
           </a:xfrm>
           <a:prstGeom prst="rect">
             <a:avLst/>
@@ -2455,7 +2455,7 @@
                 <a:ea typeface="Hanken Grotesk" pitchFamily="34" charset="-122"/>
                 <a:cs typeface="Hanken Grotesk" pitchFamily="34" charset="-120"/>
               </a:rPr>
-              <a:t>Stage 1 · Ad minim</a:t>
+              <a:t>Stage 1 · Ad</a:t>
             </a:r>
             <a:endParaRPr lang="en-US" sz="1150" dirty="0"/>
           </a:p>
@@ -2486,12 +2486,12 @@
         </p:nvSpPr>
         <p:spPr>
           <a:xfrm>
-            <a:off x="3941613" y="1645920"/>
-            <a:ext cx="1865925" cy="548640"/>
+            <a:off x="4056827" y="1691640"/>
+            <a:ext cx="1725107" cy="640080"/>
           </a:xfrm>
           <a:prstGeom prst="roundRect">
             <a:avLst>
-              <a:gd name="adj" fmla="val 13333"/>
+              <a:gd name="adj" fmla="val 11429"/>
             </a:avLst>
           </a:prstGeom>
           <a:solidFill>
@@ -2513,8 +2513,8 @@
         </p:nvSpPr>
         <p:spPr>
           <a:xfrm>
-            <a:off x="4069629" y="1645920"/>
-            <a:ext cx="1683045" cy="548640"/>
+            <a:off x="4203131" y="1691640"/>
+            <a:ext cx="1505651" cy="640080"/>
           </a:xfrm>
           <a:prstGeom prst="rect">
             <a:avLst/>
@@ -2538,7 +2538,7 @@
                 <a:ea typeface="Hanken Grotesk" pitchFamily="34" charset="-122"/>
                 <a:cs typeface="Hanken Grotesk" pitchFamily="34" charset="-120"/>
               </a:rPr>
-              <a:t>Stage 2 · Laboris nisi</a:t>
+              <a:t>Stage 2 · Laboris</a:t>
             </a:r>
             <a:endParaRPr lang="en-US" sz="1150" dirty="0"/>
           </a:p>
@@ -2569,12 +2569,12 @@
         </p:nvSpPr>
         <p:spPr>
           <a:xfrm>
-            <a:off x="5917265" y="1645920"/>
-            <a:ext cx="1865925" cy="548640"/>
+            <a:off x="5964814" y="1691640"/>
+            <a:ext cx="1725107" cy="640080"/>
           </a:xfrm>
           <a:prstGeom prst="roundRect">
             <a:avLst>
-              <a:gd name="adj" fmla="val 13333"/>
+              <a:gd name="adj" fmla="val 11429"/>
             </a:avLst>
           </a:prstGeom>
           <a:solidFill>
@@ -2596,8 +2596,8 @@
         </p:nvSpPr>
         <p:spPr>
           <a:xfrm>
-            <a:off x="6045281" y="1645920"/>
-            <a:ext cx="1683045" cy="548640"/>
+            <a:off x="6111118" y="1691640"/>
+            <a:ext cx="1505651" cy="640080"/>
           </a:xfrm>
           <a:prstGeom prst="rect">
             <a:avLst/>
@@ -2621,7 +2621,7 @@
                 <a:ea typeface="Hanken Grotesk" pitchFamily="34" charset="-122"/>
                 <a:cs typeface="Hanken Grotesk" pitchFamily="34" charset="-120"/>
               </a:rPr>
-              <a:t>Stage 3 · Consequat duis</a:t>
+              <a:t>Stage 3 · Consequat</a:t>
             </a:r>
             <a:endParaRPr lang="en-US" sz="1150" dirty="0"/>
           </a:p>
@@ -2652,12 +2652,12 @@
         </p:nvSpPr>
         <p:spPr>
           <a:xfrm>
-            <a:off x="7892918" y="1645920"/>
-            <a:ext cx="1865925" cy="548640"/>
+            <a:off x="7872801" y="1691640"/>
+            <a:ext cx="1725107" cy="640080"/>
           </a:xfrm>
           <a:prstGeom prst="roundRect">
             <a:avLst>
-              <a:gd name="adj" fmla="val 13333"/>
+              <a:gd name="adj" fmla="val 11429"/>
             </a:avLst>
           </a:prstGeom>
           <a:solidFill>
@@ -2679,8 +2679,8 @@
         </p:nvSpPr>
         <p:spPr>
           <a:xfrm>
-            <a:off x="8020934" y="1645920"/>
-            <a:ext cx="1683045" cy="548640"/>
+            <a:off x="8019105" y="1691640"/>
+            <a:ext cx="1505651" cy="640080"/>
           </a:xfrm>
           <a:prstGeom prst="rect">
             <a:avLst/>
@@ -2704,7 +2704,7 @@
                 <a:ea typeface="Hanken Grotesk" pitchFamily="34" charset="-122"/>
                 <a:cs typeface="Hanken Grotesk" pitchFamily="34" charset="-120"/>
               </a:rPr>
-              <a:t>Stage 4 · In voluptate</a:t>
+              <a:t>Stage 4 · In</a:t>
             </a:r>
             <a:endParaRPr lang="en-US" sz="1150" dirty="0"/>
           </a:p>
@@ -2735,12 +2735,12 @@
         </p:nvSpPr>
         <p:spPr>
           <a:xfrm>
-            <a:off x="9868571" y="1645920"/>
-            <a:ext cx="1865925" cy="548640"/>
+            <a:off x="9780788" y="1691640"/>
+            <a:ext cx="1725107" cy="640080"/>
           </a:xfrm>
           <a:prstGeom prst="roundRect">
             <a:avLst>
-              <a:gd name="adj" fmla="val 13333"/>
+              <a:gd name="adj" fmla="val 11429"/>
             </a:avLst>
           </a:prstGeom>
           <a:solidFill>
@@ -2762,8 +2762,8 @@
         </p:nvSpPr>
         <p:spPr>
           <a:xfrm>
-            <a:off x="9996587" y="1645920"/>
-            <a:ext cx="1683045" cy="548640"/>
+            <a:off x="9927092" y="1691640"/>
+            <a:ext cx="1505651" cy="640080"/>
           </a:xfrm>
           <a:prstGeom prst="rect">
             <a:avLst/>
@@ -2787,7 +2787,7 @@
                 <a:ea typeface="Hanken Grotesk" pitchFamily="34" charset="-122"/>
                 <a:cs typeface="Hanken Grotesk" pitchFamily="34" charset="-120"/>
               </a:rPr>
-              <a:t>Stage 5 · Fugiat nulla</a:t>
+              <a:t>Stage 5 · Fugiat</a:t>
             </a:r>
             <a:endParaRPr lang="en-US" sz="1150" dirty="0"/>
           </a:p>
@@ -2818,8 +2818,8 @@
         </p:nvSpPr>
         <p:spPr>
           <a:xfrm>
-            <a:off x="457200" y="2331720"/>
-            <a:ext cx="1371600" cy="457200"/>
+            <a:off x="685800" y="2514600"/>
+            <a:ext cx="1280160" cy="411480"/>
           </a:xfrm>
           <a:prstGeom prst="rect">
             <a:avLst/>
@@ -2857,12 +2857,12 @@
         </p:nvSpPr>
         <p:spPr>
           <a:xfrm>
-            <a:off x="1965960" y="2331720"/>
-            <a:ext cx="1865925" cy="457200"/>
+            <a:off x="2148840" y="2514600"/>
+            <a:ext cx="1725107" cy="411480"/>
           </a:xfrm>
           <a:prstGeom prst="roundRect">
             <a:avLst>
-              <a:gd name="adj" fmla="val 16000"/>
+              <a:gd name="adj" fmla="val 17778"/>
             </a:avLst>
           </a:prstGeom>
           <a:solidFill>
@@ -2884,7 +2884,7 @@
         </p:nvSpPr>
         <p:spPr>
           <a:xfrm>
-            <a:off x="2093976" y="2487168"/>
+            <a:off x="2295144" y="2647188"/>
             <a:ext cx="146304" cy="146304"/>
           </a:xfrm>
           <a:prstGeom prst="ellipse">
@@ -2909,8 +2909,8 @@
         </p:nvSpPr>
         <p:spPr>
           <a:xfrm>
-            <a:off x="2313432" y="2331720"/>
-            <a:ext cx="1454445" cy="457200"/>
+            <a:off x="2532888" y="2514600"/>
+            <a:ext cx="1267907" cy="411480"/>
           </a:xfrm>
           <a:prstGeom prst="rect">
             <a:avLst/>
@@ -2962,12 +2962,12 @@
         </p:nvSpPr>
         <p:spPr>
           <a:xfrm>
-            <a:off x="3941613" y="2331720"/>
-            <a:ext cx="1865925" cy="457200"/>
+            <a:off x="4056827" y="2514600"/>
+            <a:ext cx="1725107" cy="411480"/>
           </a:xfrm>
           <a:prstGeom prst="roundRect">
             <a:avLst>
-              <a:gd name="adj" fmla="val 16000"/>
+              <a:gd name="adj" fmla="val 17778"/>
             </a:avLst>
           </a:prstGeom>
           <a:solidFill>
@@ -2989,7 +2989,7 @@
         </p:nvSpPr>
         <p:spPr>
           <a:xfrm>
-            <a:off x="4069629" y="2487168"/>
+            <a:off x="4203131" y="2647188"/>
             <a:ext cx="146304" cy="146304"/>
           </a:xfrm>
           <a:prstGeom prst="ellipse">
@@ -3014,8 +3014,8 @@
         </p:nvSpPr>
         <p:spPr>
           <a:xfrm>
-            <a:off x="4289085" y="2331720"/>
-            <a:ext cx="1454445" cy="457200"/>
+            <a:off x="4440875" y="2514600"/>
+            <a:ext cx="1267907" cy="411480"/>
           </a:xfrm>
           <a:prstGeom prst="rect">
             <a:avLst/>
@@ -3067,12 +3067,12 @@
         </p:nvSpPr>
         <p:spPr>
           <a:xfrm>
-            <a:off x="5917265" y="2331720"/>
-            <a:ext cx="1865925" cy="457200"/>
+            <a:off x="5964814" y="2514600"/>
+            <a:ext cx="1725107" cy="411480"/>
           </a:xfrm>
           <a:prstGeom prst="roundRect">
             <a:avLst>
-              <a:gd name="adj" fmla="val 16000"/>
+              <a:gd name="adj" fmla="val 17778"/>
             </a:avLst>
           </a:prstGeom>
           <a:solidFill>
@@ -3094,7 +3094,7 @@
         </p:nvSpPr>
         <p:spPr>
           <a:xfrm>
-            <a:off x="6045281" y="2487168"/>
+            <a:off x="6111118" y="2647188"/>
             <a:ext cx="146304" cy="146304"/>
           </a:xfrm>
           <a:prstGeom prst="ellipse">
@@ -3119,8 +3119,8 @@
         </p:nvSpPr>
         <p:spPr>
           <a:xfrm>
-            <a:off x="6264737" y="2331720"/>
-            <a:ext cx="1454445" cy="457200"/>
+            <a:off x="6348862" y="2514600"/>
+            <a:ext cx="1267907" cy="411480"/>
           </a:xfrm>
           <a:prstGeom prst="rect">
             <a:avLst/>
@@ -3172,12 +3172,12 @@
         </p:nvSpPr>
         <p:spPr>
           <a:xfrm>
-            <a:off x="7892918" y="2331720"/>
-            <a:ext cx="1865925" cy="457200"/>
+            <a:off x="7872801" y="2514600"/>
+            <a:ext cx="1725107" cy="411480"/>
           </a:xfrm>
           <a:prstGeom prst="roundRect">
             <a:avLst>
-              <a:gd name="adj" fmla="val 16000"/>
+              <a:gd name="adj" fmla="val 17778"/>
             </a:avLst>
           </a:prstGeom>
           <a:solidFill>
@@ -3199,7 +3199,7 @@
         </p:nvSpPr>
         <p:spPr>
           <a:xfrm>
-            <a:off x="8020934" y="2487168"/>
+            <a:off x="8019105" y="2647188"/>
             <a:ext cx="146304" cy="146304"/>
           </a:xfrm>
           <a:prstGeom prst="ellipse">
@@ -3224,8 +3224,8 @@
         </p:nvSpPr>
         <p:spPr>
           <a:xfrm>
-            <a:off x="8240390" y="2331720"/>
-            <a:ext cx="1454445" cy="457200"/>
+            <a:off x="8256849" y="2514600"/>
+            <a:ext cx="1267907" cy="411480"/>
           </a:xfrm>
           <a:prstGeom prst="rect">
             <a:avLst/>
@@ -3277,12 +3277,12 @@
         </p:nvSpPr>
         <p:spPr>
           <a:xfrm>
-            <a:off x="9868571" y="2331720"/>
-            <a:ext cx="1865925" cy="457200"/>
+            <a:off x="9780788" y="2514600"/>
+            <a:ext cx="1725107" cy="411480"/>
           </a:xfrm>
           <a:prstGeom prst="roundRect">
             <a:avLst>
-              <a:gd name="adj" fmla="val 16000"/>
+              <a:gd name="adj" fmla="val 17778"/>
             </a:avLst>
           </a:prstGeom>
           <a:solidFill>
@@ -3304,7 +3304,7 @@
         </p:nvSpPr>
         <p:spPr>
           <a:xfrm>
-            <a:off x="9996587" y="2487168"/>
+            <a:off x="9927092" y="2647188"/>
             <a:ext cx="146304" cy="146304"/>
           </a:xfrm>
           <a:prstGeom prst="ellipse">
@@ -3329,8 +3329,8 @@
         </p:nvSpPr>
         <p:spPr>
           <a:xfrm>
-            <a:off x="10216043" y="2331720"/>
-            <a:ext cx="1454445" cy="457200"/>
+            <a:off x="10164836" y="2514600"/>
+            <a:ext cx="1267907" cy="411480"/>
           </a:xfrm>
           <a:prstGeom prst="rect">
             <a:avLst/>
@@ -3382,8 +3382,8 @@
         </p:nvSpPr>
         <p:spPr>
           <a:xfrm>
-            <a:off x="457200" y="2880360"/>
-            <a:ext cx="1371600" cy="914400"/>
+            <a:off x="685800" y="3108960"/>
+            <a:ext cx="1280160" cy="777240"/>
           </a:xfrm>
           <a:prstGeom prst="rect">
             <a:avLst/>
@@ -3421,12 +3421,12 @@
         </p:nvSpPr>
         <p:spPr>
           <a:xfrm>
-            <a:off x="1965960" y="2880360"/>
-            <a:ext cx="1865925" cy="914400"/>
+            <a:off x="2148840" y="3108960"/>
+            <a:ext cx="1725107" cy="777240"/>
           </a:xfrm>
           <a:prstGeom prst="roundRect">
             <a:avLst>
-              <a:gd name="adj" fmla="val 8000"/>
+              <a:gd name="adj" fmla="val 9412"/>
             </a:avLst>
           </a:prstGeom>
           <a:solidFill>
@@ -3448,8 +3448,8 @@
         </p:nvSpPr>
         <p:spPr>
           <a:xfrm>
-            <a:off x="2093976" y="2990088"/>
-            <a:ext cx="1609893" cy="731520"/>
+            <a:off x="2295144" y="3236976"/>
+            <a:ext cx="1432499" cy="576072"/>
           </a:xfrm>
           <a:prstGeom prst="rect">
             <a:avLst/>
@@ -3473,7 +3473,7 @@
                 <a:ea typeface="Hanken Grotesk" pitchFamily="34" charset="-122"/>
                 <a:cs typeface="Hanken Grotesk" pitchFamily="34" charset="-120"/>
               </a:rPr>
-              <a:t>In voluptate velit esse cillum dolore eu.</a:t>
+              <a:t>In voluptate velit esse cillum.</a:t>
             </a:r>
             <a:endParaRPr lang="en-US" sz="1150" dirty="0"/>
           </a:p>
@@ -3487,12 +3487,12 @@
         </p:nvSpPr>
         <p:spPr>
           <a:xfrm>
-            <a:off x="3941613" y="2880360"/>
-            <a:ext cx="1865925" cy="914400"/>
+            <a:off x="4056827" y="3108960"/>
+            <a:ext cx="1725107" cy="777240"/>
           </a:xfrm>
           <a:prstGeom prst="roundRect">
             <a:avLst>
-              <a:gd name="adj" fmla="val 8000"/>
+              <a:gd name="adj" fmla="val 9412"/>
             </a:avLst>
           </a:prstGeom>
           <a:solidFill>
@@ -3514,8 +3514,8 @@
         </p:nvSpPr>
         <p:spPr>
           <a:xfrm>
-            <a:off x="4069629" y="2990088"/>
-            <a:ext cx="1609893" cy="731520"/>
+            <a:off x="4203131" y="3236976"/>
+            <a:ext cx="1432499" cy="576072"/>
           </a:xfrm>
           <a:prstGeom prst="rect">
             <a:avLst/>
@@ -3539,7 +3539,7 @@
                 <a:ea typeface="Hanken Grotesk" pitchFamily="34" charset="-122"/>
                 <a:cs typeface="Hanken Grotesk" pitchFamily="34" charset="-120"/>
               </a:rPr>
-              <a:t>Fugiat nulla pariatur excepteur sint occaecat cupidatat.</a:t>
+              <a:t>Fugiat nulla pariatur excepteur sint.</a:t>
             </a:r>
             <a:endParaRPr lang="en-US" sz="1150" dirty="0"/>
           </a:p>
@@ -3553,12 +3553,12 @@
         </p:nvSpPr>
         <p:spPr>
           <a:xfrm>
-            <a:off x="5917265" y="2880360"/>
-            <a:ext cx="1865925" cy="914400"/>
+            <a:off x="5964814" y="3108960"/>
+            <a:ext cx="1725107" cy="777240"/>
           </a:xfrm>
           <a:prstGeom prst="roundRect">
             <a:avLst>
-              <a:gd name="adj" fmla="val 8000"/>
+              <a:gd name="adj" fmla="val 9412"/>
             </a:avLst>
           </a:prstGeom>
           <a:solidFill>
@@ -3580,8 +3580,8 @@
         </p:nvSpPr>
         <p:spPr>
           <a:xfrm>
-            <a:off x="6045281" y="2990088"/>
-            <a:ext cx="1609893" cy="731520"/>
+            <a:off x="6111118" y="3236976"/>
+            <a:ext cx="1432499" cy="576072"/>
           </a:xfrm>
           <a:prstGeom prst="rect">
             <a:avLst/>
@@ -3605,7 +3605,7 @@
                 <a:ea typeface="Hanken Grotesk" pitchFamily="34" charset="-122"/>
                 <a:cs typeface="Hanken Grotesk" pitchFamily="34" charset="-120"/>
               </a:rPr>
-              <a:t>Non proident sunt in culpa qui officia.</a:t>
+              <a:t>Non proident sunt in culpa.</a:t>
             </a:r>
             <a:endParaRPr lang="en-US" sz="1150" dirty="0"/>
           </a:p>
@@ -3619,12 +3619,12 @@
         </p:nvSpPr>
         <p:spPr>
           <a:xfrm>
-            <a:off x="7892918" y="2880360"/>
-            <a:ext cx="1865925" cy="914400"/>
+            <a:off x="7872801" y="3108960"/>
+            <a:ext cx="1725107" cy="777240"/>
           </a:xfrm>
           <a:prstGeom prst="roundRect">
             <a:avLst>
-              <a:gd name="adj" fmla="val 8000"/>
+              <a:gd name="adj" fmla="val 9412"/>
             </a:avLst>
           </a:prstGeom>
           <a:solidFill>
@@ -3646,8 +3646,8 @@
         </p:nvSpPr>
         <p:spPr>
           <a:xfrm>
-            <a:off x="8020934" y="2990088"/>
-            <a:ext cx="1609893" cy="731520"/>
+            <a:off x="8019105" y="3236976"/>
+            <a:ext cx="1432499" cy="576072"/>
           </a:xfrm>
           <a:prstGeom prst="rect">
             <a:avLst/>
@@ -3671,7 +3671,7 @@
                 <a:ea typeface="Hanken Grotesk" pitchFamily="34" charset="-122"/>
                 <a:cs typeface="Hanken Grotesk" pitchFamily="34" charset="-120"/>
               </a:rPr>
-              <a:t>Deserunt mollit anim id est laborum curabitur.</a:t>
+              <a:t>Deserunt mollit anim id est.</a:t>
             </a:r>
             <a:endParaRPr lang="en-US" sz="1150" dirty="0"/>
           </a:p>
@@ -3685,12 +3685,12 @@
         </p:nvSpPr>
         <p:spPr>
           <a:xfrm>
-            <a:off x="9868571" y="2880360"/>
-            <a:ext cx="1865925" cy="914400"/>
+            <a:off x="9780788" y="3108960"/>
+            <a:ext cx="1725107" cy="777240"/>
           </a:xfrm>
           <a:prstGeom prst="roundRect">
             <a:avLst>
-              <a:gd name="adj" fmla="val 8000"/>
+              <a:gd name="adj" fmla="val 9412"/>
             </a:avLst>
           </a:prstGeom>
           <a:solidFill>
@@ -3712,8 +3712,8 @@
         </p:nvSpPr>
         <p:spPr>
           <a:xfrm>
-            <a:off x="9996587" y="2990088"/>
-            <a:ext cx="1609893" cy="731520"/>
+            <a:off x="9927092" y="3236976"/>
+            <a:ext cx="1432499" cy="576072"/>
           </a:xfrm>
           <a:prstGeom prst="rect">
             <a:avLst/>
@@ -3737,7 +3737,7 @@
                 <a:ea typeface="Hanken Grotesk" pitchFamily="34" charset="-122"/>
                 <a:cs typeface="Hanken Grotesk" pitchFamily="34" charset="-120"/>
               </a:rPr>
-              <a:t>Pretium tincidunt lacus nulla gravida orci a.</a:t>
+              <a:t>Pretium tincidunt lacus nulla gravida.</a:t>
             </a:r>
             <a:endParaRPr lang="en-US" sz="1150" dirty="0"/>
           </a:p>
@@ -3751,8 +3751,8 @@
         </p:nvSpPr>
         <p:spPr>
           <a:xfrm>
-            <a:off x="457200" y="3886200"/>
-            <a:ext cx="1371600" cy="1097280"/>
+            <a:off x="685800" y="4069080"/>
+            <a:ext cx="1280160" cy="914400"/>
           </a:xfrm>
           <a:prstGeom prst="rect">
             <a:avLst/>
@@ -3790,12 +3790,12 @@
         </p:nvSpPr>
         <p:spPr>
           <a:xfrm>
-            <a:off x="1965960" y="3886200"/>
-            <a:ext cx="9768535" cy="1097280"/>
+            <a:off x="2148840" y="4069080"/>
+            <a:ext cx="9357055" cy="914400"/>
           </a:xfrm>
           <a:prstGeom prst="roundRect">
             <a:avLst>
-              <a:gd name="adj" fmla="val 8333"/>
+              <a:gd name="adj" fmla="val 10000"/>
             </a:avLst>
           </a:prstGeom>
           <a:solidFill>
@@ -3817,8 +3817,8 @@
         </p:nvSpPr>
         <p:spPr>
           <a:xfrm flipV="1">
-            <a:off x="2898922" y="4210263"/>
-            <a:ext cx="1975653" cy="52669"/>
+            <a:off x="3011394" y="4355104"/>
+            <a:ext cx="1907987" cy="28529"/>
           </a:xfrm>
           <a:prstGeom prst="line">
             <a:avLst/>
@@ -3840,8 +3840,8 @@
         </p:nvSpPr>
         <p:spPr>
           <a:xfrm flipV="1">
-            <a:off x="4874575" y="4153205"/>
-            <a:ext cx="1975653" cy="57059"/>
+            <a:off x="4919381" y="4324198"/>
+            <a:ext cx="1907987" cy="30907"/>
           </a:xfrm>
           <a:prstGeom prst="line">
             <a:avLst/>
@@ -3863,8 +3863,8 @@
         </p:nvSpPr>
         <p:spPr>
           <a:xfrm>
-            <a:off x="6850228" y="4153205"/>
-            <a:ext cx="1975653" cy="65837"/>
+            <a:off x="6827368" y="4324198"/>
+            <a:ext cx="1907987" cy="35662"/>
           </a:xfrm>
           <a:prstGeom prst="line">
             <a:avLst/>
@@ -3886,8 +3886,8 @@
         </p:nvSpPr>
         <p:spPr>
           <a:xfrm flipV="1">
-            <a:off x="8825880" y="4131259"/>
-            <a:ext cx="1975653" cy="87782"/>
+            <a:off x="8735355" y="4312310"/>
+            <a:ext cx="1907987" cy="47549"/>
           </a:xfrm>
           <a:prstGeom prst="line">
             <a:avLst/>
@@ -3909,7 +3909,7 @@
         </p:nvSpPr>
         <p:spPr>
           <a:xfrm>
-            <a:off x="2816626" y="4180637"/>
+            <a:off x="2929098" y="4301338"/>
             <a:ext cx="164592" cy="164592"/>
           </a:xfrm>
           <a:prstGeom prst="ellipse">
@@ -3934,8 +3934,8 @@
         </p:nvSpPr>
         <p:spPr>
           <a:xfrm>
-            <a:off x="1965960" y="4381805"/>
-            <a:ext cx="1865925" cy="237744"/>
+            <a:off x="2148840" y="4502506"/>
+            <a:ext cx="1725107" cy="237744"/>
           </a:xfrm>
           <a:prstGeom prst="rect">
             <a:avLst/>
@@ -3973,7 +3973,7 @@
         </p:nvSpPr>
         <p:spPr>
           <a:xfrm>
-            <a:off x="4792279" y="4127967"/>
+            <a:off x="4837085" y="4272808"/>
             <a:ext cx="164592" cy="164592"/>
           </a:xfrm>
           <a:prstGeom prst="ellipse">
@@ -3998,8 +3998,8 @@
         </p:nvSpPr>
         <p:spPr>
           <a:xfrm>
-            <a:off x="3941613" y="4329135"/>
-            <a:ext cx="1865925" cy="237744"/>
+            <a:off x="4056827" y="4473976"/>
+            <a:ext cx="1725107" cy="237744"/>
           </a:xfrm>
           <a:prstGeom prst="rect">
             <a:avLst/>
@@ -4037,7 +4037,7 @@
         </p:nvSpPr>
         <p:spPr>
           <a:xfrm>
-            <a:off x="6767932" y="4070909"/>
+            <a:off x="6745072" y="4241902"/>
             <a:ext cx="164592" cy="164592"/>
           </a:xfrm>
           <a:prstGeom prst="ellipse">
@@ -4062,8 +4062,8 @@
         </p:nvSpPr>
         <p:spPr>
           <a:xfrm>
-            <a:off x="5917265" y="4272077"/>
-            <a:ext cx="1865925" cy="237744"/>
+            <a:off x="5964814" y="4443070"/>
+            <a:ext cx="1725107" cy="237744"/>
           </a:xfrm>
           <a:prstGeom prst="rect">
             <a:avLst/>
@@ -4101,7 +4101,7 @@
         </p:nvSpPr>
         <p:spPr>
           <a:xfrm>
-            <a:off x="8743584" y="4136746"/>
+            <a:off x="8653059" y="4277563"/>
             <a:ext cx="164592" cy="164592"/>
           </a:xfrm>
           <a:prstGeom prst="ellipse">
@@ -4126,8 +4126,8 @@
         </p:nvSpPr>
         <p:spPr>
           <a:xfrm>
-            <a:off x="7892918" y="4337914"/>
-            <a:ext cx="1865925" cy="237744"/>
+            <a:off x="7872801" y="4478731"/>
+            <a:ext cx="1725107" cy="237744"/>
           </a:xfrm>
           <a:prstGeom prst="rect">
             <a:avLst/>
@@ -4165,7 +4165,7 @@
         </p:nvSpPr>
         <p:spPr>
           <a:xfrm>
-            <a:off x="10719237" y="4048963"/>
+            <a:off x="10561046" y="4230014"/>
             <a:ext cx="164592" cy="164592"/>
           </a:xfrm>
           <a:prstGeom prst="ellipse">
@@ -4190,8 +4190,8 @@
         </p:nvSpPr>
         <p:spPr>
           <a:xfrm>
-            <a:off x="9868571" y="4250131"/>
-            <a:ext cx="1865925" cy="237744"/>
+            <a:off x="9780788" y="4431182"/>
+            <a:ext cx="1725107" cy="237744"/>
           </a:xfrm>
           <a:prstGeom prst="rect">
             <a:avLst/>
@@ -4229,8 +4229,8 @@
         </p:nvSpPr>
         <p:spPr>
           <a:xfrm>
-            <a:off x="457200" y="5074920"/>
-            <a:ext cx="1371600" cy="1097280"/>
+            <a:off x="685800" y="5166360"/>
+            <a:ext cx="1280160" cy="594360"/>
           </a:xfrm>
           <a:prstGeom prst="rect">
             <a:avLst/>
@@ -4268,12 +4268,12 @@
         </p:nvSpPr>
         <p:spPr>
           <a:xfrm>
-            <a:off x="1965960" y="5074920"/>
-            <a:ext cx="1865925" cy="1097280"/>
+            <a:off x="2148840" y="5166360"/>
+            <a:ext cx="1725107" cy="594360"/>
           </a:xfrm>
           <a:prstGeom prst="roundRect">
             <a:avLst>
-              <a:gd name="adj" fmla="val 6667"/>
+              <a:gd name="adj" fmla="val 12308"/>
             </a:avLst>
           </a:prstGeom>
           <a:solidFill>
@@ -4295,8 +4295,8 @@
         </p:nvSpPr>
         <p:spPr>
           <a:xfrm>
-            <a:off x="2093976" y="5184648"/>
-            <a:ext cx="1609893" cy="914400"/>
+            <a:off x="2295144" y="5294376"/>
+            <a:ext cx="1432499" cy="393192"/>
           </a:xfrm>
           <a:prstGeom prst="rect">
             <a:avLst/>
@@ -4320,7 +4320,7 @@
                 <a:ea typeface="Hanken Grotesk" pitchFamily="34" charset="-122"/>
                 <a:cs typeface="Hanken Grotesk" pitchFamily="34" charset="-120"/>
               </a:rPr>
-              <a:t>Nibh euismod gravida lorem ipsum dolor.</a:t>
+              <a:t>Nibh euismod gravida lorem.</a:t>
             </a:r>
             <a:endParaRPr lang="en-US" sz="1150" dirty="0"/>
           </a:p>
@@ -4334,12 +4334,12 @@
         </p:nvSpPr>
         <p:spPr>
           <a:xfrm>
-            <a:off x="3941613" y="5074920"/>
-            <a:ext cx="1865925" cy="1097280"/>
+            <a:off x="4056827" y="5166360"/>
+            <a:ext cx="1725107" cy="594360"/>
           </a:xfrm>
           <a:prstGeom prst="roundRect">
             <a:avLst>
-              <a:gd name="adj" fmla="val 6667"/>
+              <a:gd name="adj" fmla="val 12308"/>
             </a:avLst>
           </a:prstGeom>
           <a:solidFill>
@@ -4361,8 +4361,8 @@
         </p:nvSpPr>
         <p:spPr>
           <a:xfrm>
-            <a:off x="4069629" y="5184648"/>
-            <a:ext cx="1609893" cy="914400"/>
+            <a:off x="4203131" y="5294376"/>
+            <a:ext cx="1432499" cy="393192"/>
           </a:xfrm>
           <a:prstGeom prst="rect">
             <a:avLst/>
@@ -4386,7 +4386,7 @@
                 <a:ea typeface="Hanken Grotesk" pitchFamily="34" charset="-122"/>
                 <a:cs typeface="Hanken Grotesk" pitchFamily="34" charset="-120"/>
               </a:rPr>
-              <a:t>Amet consectetur adipiscing elit sed do.</a:t>
+              <a:t>Amet consectetur adipiscing elit.</a:t>
             </a:r>
             <a:endParaRPr lang="en-US" sz="1150" dirty="0"/>
           </a:p>
@@ -4400,12 +4400,12 @@
         </p:nvSpPr>
         <p:spPr>
           <a:xfrm>
-            <a:off x="5917265" y="5074920"/>
-            <a:ext cx="1865925" cy="1097280"/>
+            <a:off x="5964814" y="5166360"/>
+            <a:ext cx="1725107" cy="594360"/>
           </a:xfrm>
           <a:prstGeom prst="roundRect">
             <a:avLst>
-              <a:gd name="adj" fmla="val 6667"/>
+              <a:gd name="adj" fmla="val 12308"/>
             </a:avLst>
           </a:prstGeom>
           <a:solidFill>
@@ -4427,8 +4427,8 @@
         </p:nvSpPr>
         <p:spPr>
           <a:xfrm>
-            <a:off x="6045281" y="5184648"/>
-            <a:ext cx="1609893" cy="914400"/>
+            <a:off x="6111118" y="5294376"/>
+            <a:ext cx="1432499" cy="393192"/>
           </a:xfrm>
           <a:prstGeom prst="rect">
             <a:avLst/>
@@ -4452,7 +4452,7 @@
                 <a:ea typeface="Hanken Grotesk" pitchFamily="34" charset="-122"/>
                 <a:cs typeface="Hanken Grotesk" pitchFamily="34" charset="-120"/>
               </a:rPr>
-              <a:t>Tempor incididunt ut labore et dolore.</a:t>
+              <a:t>Tempor incididunt ut labore.</a:t>
             </a:r>
             <a:endParaRPr lang="en-US" sz="1150" dirty="0"/>
           </a:p>
@@ -4466,12 +4466,12 @@
         </p:nvSpPr>
         <p:spPr>
           <a:xfrm>
-            <a:off x="7892918" y="5074920"/>
-            <a:ext cx="1865925" cy="1097280"/>
+            <a:off x="7872801" y="5166360"/>
+            <a:ext cx="1725107" cy="594360"/>
           </a:xfrm>
           <a:prstGeom prst="roundRect">
             <a:avLst>
-              <a:gd name="adj" fmla="val 6667"/>
+              <a:gd name="adj" fmla="val 12308"/>
             </a:avLst>
           </a:prstGeom>
           <a:solidFill>
@@ -4493,8 +4493,8 @@
         </p:nvSpPr>
         <p:spPr>
           <a:xfrm>
-            <a:off x="8020934" y="5184648"/>
-            <a:ext cx="1609893" cy="914400"/>
+            <a:off x="8019105" y="5294376"/>
+            <a:ext cx="1432499" cy="393192"/>
           </a:xfrm>
           <a:prstGeom prst="rect">
             <a:avLst/>
@@ -4518,7 +4518,7 @@
                 <a:ea typeface="Hanken Grotesk" pitchFamily="34" charset="-122"/>
                 <a:cs typeface="Hanken Grotesk" pitchFamily="34" charset="-120"/>
               </a:rPr>
-              <a:t>Aliqua ut enim ad minim veniam.</a:t>
+              <a:t>Aliqua ut enim ad.</a:t>
             </a:r>
             <a:endParaRPr lang="en-US" sz="1150" dirty="0"/>
           </a:p>
@@ -4532,12 +4532,12 @@
         </p:nvSpPr>
         <p:spPr>
           <a:xfrm>
-            <a:off x="9868571" y="5074920"/>
-            <a:ext cx="1865925" cy="1097280"/>
+            <a:off x="9780788" y="5166360"/>
+            <a:ext cx="1725107" cy="594360"/>
           </a:xfrm>
           <a:prstGeom prst="roundRect">
             <a:avLst>
-              <a:gd name="adj" fmla="val 6667"/>
+              <a:gd name="adj" fmla="val 12308"/>
             </a:avLst>
           </a:prstGeom>
           <a:solidFill>
@@ -4559,8 +4559,8 @@
         </p:nvSpPr>
         <p:spPr>
           <a:xfrm>
-            <a:off x="9996587" y="5184648"/>
-            <a:ext cx="1609893" cy="914400"/>
+            <a:off x="9927092" y="5294376"/>
+            <a:ext cx="1432499" cy="393192"/>
           </a:xfrm>
           <a:prstGeom prst="rect">
             <a:avLst/>
@@ -4584,7 +4584,7 @@
                 <a:ea typeface="Hanken Grotesk" pitchFamily="34" charset="-122"/>
                 <a:cs typeface="Hanken Grotesk" pitchFamily="34" charset="-120"/>
               </a:rPr>
-              <a:t>Nostrud exercitation ullamco laboris nisi ut.</a:t>
+              <a:t>Nostrud exercitation ullamco laboris.</a:t>
             </a:r>
             <a:endParaRPr lang="en-US" sz="1150" dirty="0"/>
           </a:p>
@@ -4630,8 +4630,8 @@
         </p:nvSpPr>
         <p:spPr>
           <a:xfrm>
-            <a:off x="457200" y="384048"/>
-            <a:ext cx="8961120" cy="274320"/>
+            <a:off x="685800" y="502920"/>
+            <a:ext cx="8595360" cy="274320"/>
           </a:xfrm>
           <a:prstGeom prst="rect">
             <a:avLst/>
@@ -4669,8 +4669,8 @@
         </p:nvSpPr>
         <p:spPr>
           <a:xfrm>
-            <a:off x="457200" y="676656"/>
-            <a:ext cx="11274552" cy="868680"/>
+            <a:off x="685800" y="804672"/>
+            <a:ext cx="10820095" cy="566928"/>
           </a:xfrm>
           <a:prstGeom prst="rect">
             <a:avLst/>
@@ -4689,7 +4689,7 @@
               <a:buNone/>
             </a:pPr>
             <a:r>
-              <a:rPr lang="en-US" sz="3000" b="1" dirty="0">
+              <a:rPr lang="en-US" sz="2800" b="1" dirty="0">
                 <a:solidFill>
                   <a:srgbClr val="222731"/>
                 </a:solidFill>
@@ -4697,9 +4697,9 @@
                 <a:ea typeface="Bricolage Grotesque" pitchFamily="34" charset="-122"/>
                 <a:cs typeface="Bricolage Grotesque" pitchFamily="34" charset="-120"/>
               </a:rPr>
-              <a:t>Gravida orci a odio nullam varius turpis et commodo pharetra est</a:t>
-            </a:r>
-            <a:endParaRPr lang="en-US" sz="3000" dirty="0"/>
+              <a:t>Gravida orci a odio nullam varius</a:t>
+            </a:r>
+            <a:endParaRPr lang="en-US" sz="2800" dirty="0"/>
           </a:p>
         </p:txBody>
       </p:sp>
@@ -4711,7 +4711,7 @@
         </p:nvSpPr>
         <p:spPr>
           <a:xfrm>
-            <a:off x="457200" y="6400800"/>
+            <a:off x="685800" y="6400800"/>
             <a:ext cx="4389120" cy="256032"/>
           </a:xfrm>
           <a:prstGeom prst="rect">
@@ -4751,7 +4751,7 @@
         <p:spPr>
           <a:xfrm>
             <a:off x="4937760" y="6400800"/>
-            <a:ext cx="5943600" cy="256032"/>
+            <a:ext cx="5790895" cy="256032"/>
           </a:xfrm>
           <a:prstGeom prst="rect">
             <a:avLst/>
@@ -4789,7 +4789,7 @@
         </p:nvSpPr>
         <p:spPr>
           <a:xfrm>
-            <a:off x="11091672" y="6400800"/>
+            <a:off x="10865815" y="6400800"/>
             <a:ext cx="640080" cy="256032"/>
           </a:xfrm>
           <a:prstGeom prst="rect">
@@ -4828,12 +4828,12 @@
         </p:nvSpPr>
         <p:spPr>
           <a:xfrm>
-            <a:off x="457200" y="1783080"/>
-            <a:ext cx="3576218" cy="4343400"/>
+            <a:off x="685800" y="1691640"/>
+            <a:ext cx="3423818" cy="4069080"/>
           </a:xfrm>
           <a:prstGeom prst="roundRect">
             <a:avLst>
-              <a:gd name="adj" fmla="val 3068"/>
+              <a:gd name="adj" fmla="val 3205"/>
             </a:avLst>
           </a:prstGeom>
           <a:solidFill>
@@ -4855,8 +4855,8 @@
         </p:nvSpPr>
         <p:spPr>
           <a:xfrm>
-            <a:off x="777240" y="2103120"/>
-            <a:ext cx="658368" cy="658368"/>
+            <a:off x="1051560" y="2057400"/>
+            <a:ext cx="585216" cy="585216"/>
           </a:xfrm>
           <a:prstGeom prst="roundRect">
             <a:avLst>
@@ -4890,8 +4890,8 @@
         </p:blipFill>
         <p:spPr>
           <a:xfrm>
-            <a:off x="908914" y="2234794"/>
-            <a:ext cx="395021" cy="395021"/>
+            <a:off x="1168603" y="2174443"/>
+            <a:ext cx="351130" cy="351130"/>
           </a:xfrm>
           <a:prstGeom prst="rect">
             <a:avLst/>
@@ -4906,8 +4906,8 @@
         </p:nvSpPr>
         <p:spPr>
           <a:xfrm>
-            <a:off x="777240" y="2953512"/>
-            <a:ext cx="2936138" cy="274320"/>
+            <a:off x="1051560" y="2880360"/>
+            <a:ext cx="2692298" cy="274320"/>
           </a:xfrm>
           <a:prstGeom prst="rect">
             <a:avLst/>
@@ -4945,8 +4945,8 @@
         </p:nvSpPr>
         <p:spPr>
           <a:xfrm>
-            <a:off x="777240" y="3246120"/>
-            <a:ext cx="2936138" cy="731520"/>
+            <a:off x="1051560" y="3200400"/>
+            <a:ext cx="2692298" cy="731520"/>
           </a:xfrm>
           <a:prstGeom prst="rect">
             <a:avLst/>
@@ -4962,7 +4962,7 @@
               <a:buNone/>
             </a:pPr>
             <a:r>
-              <a:rPr lang="en-US" sz="2000" b="1" dirty="0">
+              <a:rPr lang="en-US" sz="1900" b="1" dirty="0">
                 <a:solidFill>
                   <a:srgbClr val="222731"/>
                 </a:solidFill>
@@ -4972,7 +4972,7 @@
               </a:rPr>
               <a:t>Aliquip ex ea commodo</a:t>
             </a:r>
-            <a:endParaRPr lang="en-US" sz="2000" dirty="0"/>
+            <a:endParaRPr lang="en-US" sz="1900" dirty="0"/>
           </a:p>
         </p:txBody>
       </p:sp>
@@ -4984,8 +4984,8 @@
         </p:nvSpPr>
         <p:spPr>
           <a:xfrm>
-            <a:off x="777240" y="4069080"/>
-            <a:ext cx="2936138" cy="1828800"/>
+            <a:off x="1051560" y="4023360"/>
+            <a:ext cx="2692298" cy="1371600"/>
           </a:xfrm>
           <a:prstGeom prst="rect">
             <a:avLst/>
@@ -5009,7 +5009,7 @@
                 <a:ea typeface="Hanken Grotesk" pitchFamily="34" charset="-122"/>
                 <a:cs typeface="Hanken Grotesk" pitchFamily="34" charset="-120"/>
               </a:rPr>
-              <a:t>Deserunt mollit anim id est laborum curabitur pretium tincidunt lacus nulla gravida orci a odio nullam varius turpis et commodo pharetra est eros bibendum elit nec luctus magna felis sollicitudin.</a:t>
+              <a:t>Deserunt mollit anim id est laborum curabitur pretium tincidunt lacus nulla gravida orci a odio nullam varius turpis et commodo.</a:t>
             </a:r>
             <a:endParaRPr lang="en-US" sz="1350" dirty="0"/>
           </a:p>
@@ -5023,12 +5023,12 @@
         </p:nvSpPr>
         <p:spPr>
           <a:xfrm>
-            <a:off x="4307738" y="1783080"/>
-            <a:ext cx="3576218" cy="4343400"/>
+            <a:off x="4383938" y="1691640"/>
+            <a:ext cx="3423818" cy="4069080"/>
           </a:xfrm>
           <a:prstGeom prst="roundRect">
             <a:avLst>
-              <a:gd name="adj" fmla="val 3068"/>
+              <a:gd name="adj" fmla="val 3205"/>
             </a:avLst>
           </a:prstGeom>
           <a:solidFill>
@@ -5050,8 +5050,8 @@
         </p:nvSpPr>
         <p:spPr>
           <a:xfrm>
-            <a:off x="4627778" y="2103120"/>
-            <a:ext cx="658368" cy="658368"/>
+            <a:off x="4749698" y="2057400"/>
+            <a:ext cx="585216" cy="585216"/>
           </a:xfrm>
           <a:prstGeom prst="roundRect">
             <a:avLst>
@@ -5085,8 +5085,8 @@
         </p:blipFill>
         <p:spPr>
           <a:xfrm>
-            <a:off x="4759452" y="2234794"/>
-            <a:ext cx="395021" cy="395021"/>
+            <a:off x="4866742" y="2174443"/>
+            <a:ext cx="351130" cy="351130"/>
           </a:xfrm>
           <a:prstGeom prst="rect">
             <a:avLst/>
@@ -5101,8 +5101,8 @@
         </p:nvSpPr>
         <p:spPr>
           <a:xfrm>
-            <a:off x="4627778" y="2953512"/>
-            <a:ext cx="2936138" cy="274320"/>
+            <a:off x="4749698" y="2880360"/>
+            <a:ext cx="2692298" cy="274320"/>
           </a:xfrm>
           <a:prstGeom prst="rect">
             <a:avLst/>
@@ -5140,8 +5140,8 @@
         </p:nvSpPr>
         <p:spPr>
           <a:xfrm>
-            <a:off x="4627778" y="3246120"/>
-            <a:ext cx="2936138" cy="731520"/>
+            <a:off x="4749698" y="3200400"/>
+            <a:ext cx="2692298" cy="731520"/>
           </a:xfrm>
           <a:prstGeom prst="rect">
             <a:avLst/>
@@ -5157,7 +5157,7 @@
               <a:buNone/>
             </a:pPr>
             <a:r>
-              <a:rPr lang="en-US" sz="2000" b="1" dirty="0">
+              <a:rPr lang="en-US" sz="1900" b="1" dirty="0">
                 <a:solidFill>
                   <a:srgbClr val="222731"/>
                 </a:solidFill>
@@ -5167,7 +5167,7 @@
               </a:rPr>
               <a:t>Id est laborum curabitur</a:t>
             </a:r>
-            <a:endParaRPr lang="en-US" sz="2000" dirty="0"/>
+            <a:endParaRPr lang="en-US" sz="1900" dirty="0"/>
           </a:p>
         </p:txBody>
       </p:sp>
@@ -5179,8 +5179,8 @@
         </p:nvSpPr>
         <p:spPr>
           <a:xfrm>
-            <a:off x="4627778" y="4069080"/>
-            <a:ext cx="2936138" cy="1828800"/>
+            <a:off x="4749698" y="4023360"/>
+            <a:ext cx="2692298" cy="1371600"/>
           </a:xfrm>
           <a:prstGeom prst="rect">
             <a:avLst/>
@@ -5204,7 +5204,7 @@
                 <a:ea typeface="Hanken Grotesk" pitchFamily="34" charset="-122"/>
                 <a:cs typeface="Hanken Grotesk" pitchFamily="34" charset="-120"/>
               </a:rPr>
-              <a:t>Felis sollicitudin mauris integer in mauris eu nibh euismod gravida lorem ipsum dolor sit amet consectetur adipiscing elit sed do eiusmod tempor incididunt ut labore et dolore magna aliqua ut.</a:t>
+              <a:t>Felis sollicitudin mauris integer in mauris eu nibh euismod gravida lorem ipsum dolor sit amet consectetur adipiscing elit sed do.</a:t>
             </a:r>
             <a:endParaRPr lang="en-US" sz="1350" dirty="0"/>
           </a:p>
@@ -5218,12 +5218,12 @@
         </p:nvSpPr>
         <p:spPr>
           <a:xfrm>
-            <a:off x="8158277" y="1783080"/>
-            <a:ext cx="3576218" cy="4343400"/>
+            <a:off x="8082077" y="1691640"/>
+            <a:ext cx="3423818" cy="4069080"/>
           </a:xfrm>
           <a:prstGeom prst="roundRect">
             <a:avLst>
-              <a:gd name="adj" fmla="val 3068"/>
+              <a:gd name="adj" fmla="val 3205"/>
             </a:avLst>
           </a:prstGeom>
           <a:solidFill>
@@ -5245,8 +5245,8 @@
         </p:nvSpPr>
         <p:spPr>
           <a:xfrm>
-            <a:off x="8478317" y="2103120"/>
-            <a:ext cx="658368" cy="658368"/>
+            <a:off x="8447837" y="2057400"/>
+            <a:ext cx="585216" cy="585216"/>
           </a:xfrm>
           <a:prstGeom prst="roundRect">
             <a:avLst>
@@ -5280,8 +5280,8 @@
         </p:blipFill>
         <p:spPr>
           <a:xfrm>
-            <a:off x="8609990" y="2234794"/>
-            <a:ext cx="395021" cy="395021"/>
+            <a:off x="8564880" y="2174443"/>
+            <a:ext cx="351130" cy="351130"/>
           </a:xfrm>
           <a:prstGeom prst="rect">
             <a:avLst/>
@@ -5296,8 +5296,8 @@
         </p:nvSpPr>
         <p:spPr>
           <a:xfrm>
-            <a:off x="8478317" y="2953512"/>
-            <a:ext cx="2936138" cy="274320"/>
+            <a:off x="8447837" y="2880360"/>
+            <a:ext cx="2692298" cy="274320"/>
           </a:xfrm>
           <a:prstGeom prst="rect">
             <a:avLst/>
@@ -5335,8 +5335,8 @@
         </p:nvSpPr>
         <p:spPr>
           <a:xfrm>
-            <a:off x="8478317" y="3246120"/>
-            <a:ext cx="2936138" cy="731520"/>
+            <a:off x="8447837" y="3200400"/>
+            <a:ext cx="2692298" cy="731520"/>
           </a:xfrm>
           <a:prstGeom prst="rect">
             <a:avLst/>
@@ -5352,7 +5352,7 @@
               <a:buNone/>
             </a:pPr>
             <a:r>
-              <a:rPr lang="en-US" sz="2000" b="1" dirty="0">
+              <a:rPr lang="en-US" sz="1900" b="1" dirty="0">
                 <a:solidFill>
                   <a:srgbClr val="222731"/>
                 </a:solidFill>
@@ -5362,7 +5362,7 @@
               </a:rPr>
               <a:t>Lorem ipsum dolor sit</a:t>
             </a:r>
-            <a:endParaRPr lang="en-US" sz="2000" dirty="0"/>
+            <a:endParaRPr lang="en-US" sz="1900" dirty="0"/>
           </a:p>
         </p:txBody>
       </p:sp>
@@ -5374,8 +5374,8 @@
         </p:nvSpPr>
         <p:spPr>
           <a:xfrm>
-            <a:off x="8478317" y="4069080"/>
-            <a:ext cx="2936138" cy="1828800"/>
+            <a:off x="8447837" y="4023360"/>
+            <a:ext cx="2692298" cy="1371600"/>
           </a:xfrm>
           <a:prstGeom prst="rect">
             <a:avLst/>
@@ -5399,7 +5399,7 @@
                 <a:ea typeface="Hanken Grotesk" pitchFamily="34" charset="-122"/>
                 <a:cs typeface="Hanken Grotesk" pitchFamily="34" charset="-120"/>
               </a:rPr>
-              <a:t>Aliqua ut enim ad minim veniam quis nostrud exercitation ullamco laboris nisi ut aliquip ex ea commodo consequat duis aute irure dolor in reprehenderit in voluptate velit esse cillum dolore.</a:t>
+              <a:t>Aliqua ut enim ad minim veniam quis nostrud exercitation ullamco laboris nisi ut aliquip ex ea commodo consequat duis aute.</a:t>
             </a:r>
             <a:endParaRPr lang="en-US" sz="1350" dirty="0"/>
           </a:p>
@@ -5445,8 +5445,8 @@
         </p:nvSpPr>
         <p:spPr>
           <a:xfrm>
-            <a:off x="457200" y="384048"/>
-            <a:ext cx="8961120" cy="274320"/>
+            <a:off x="685800" y="502920"/>
+            <a:ext cx="8595360" cy="274320"/>
           </a:xfrm>
           <a:prstGeom prst="rect">
             <a:avLst/>
@@ -5484,8 +5484,8 @@
         </p:nvSpPr>
         <p:spPr>
           <a:xfrm>
-            <a:off x="457200" y="676656"/>
-            <a:ext cx="11274552" cy="868680"/>
+            <a:off x="685800" y="804672"/>
+            <a:ext cx="10820095" cy="566928"/>
           </a:xfrm>
           <a:prstGeom prst="rect">
             <a:avLst/>
@@ -5504,7 +5504,7 @@
               <a:buNone/>
             </a:pPr>
             <a:r>
-              <a:rPr lang="en-US" sz="3000" b="1" dirty="0">
+              <a:rPr lang="en-US" sz="2800" b="1" dirty="0">
                 <a:solidFill>
                   <a:srgbClr val="222731"/>
                 </a:solidFill>
@@ -5512,9 +5512,9 @@
                 <a:ea typeface="Bricolage Grotesque" pitchFamily="34" charset="-122"/>
                 <a:cs typeface="Bricolage Grotesque" pitchFamily="34" charset="-120"/>
               </a:rPr>
-              <a:t>In mauris eu nibh euismod gravida lorem ipsum dolor</a:t>
-            </a:r>
-            <a:endParaRPr lang="en-US" sz="3000" dirty="0"/>
+              <a:t>In mauris eu nibh euismod gravida lorem</a:t>
+            </a:r>
+            <a:endParaRPr lang="en-US" sz="2800" dirty="0"/>
           </a:p>
         </p:txBody>
       </p:sp>
@@ -5526,7 +5526,7 @@
         </p:nvSpPr>
         <p:spPr>
           <a:xfrm>
-            <a:off x="457200" y="6400800"/>
+            <a:off x="685800" y="6400800"/>
             <a:ext cx="4389120" cy="256032"/>
           </a:xfrm>
           <a:prstGeom prst="rect">
@@ -5566,7 +5566,7 @@
         <p:spPr>
           <a:xfrm>
             <a:off x="4937760" y="6400800"/>
-            <a:ext cx="5943600" cy="256032"/>
+            <a:ext cx="5790895" cy="256032"/>
           </a:xfrm>
           <a:prstGeom prst="rect">
             <a:avLst/>
@@ -5604,7 +5604,7 @@
         </p:nvSpPr>
         <p:spPr>
           <a:xfrm>
-            <a:off x="11091672" y="6400800"/>
+            <a:off x="10865815" y="6400800"/>
             <a:ext cx="640080" cy="256032"/>
           </a:xfrm>
           <a:prstGeom prst="rect">
@@ -5643,12 +5643,12 @@
         </p:nvSpPr>
         <p:spPr>
           <a:xfrm>
-            <a:off x="1005840" y="1783080"/>
-            <a:ext cx="6583680" cy="4160520"/>
+            <a:off x="1143000" y="1691640"/>
+            <a:ext cx="6035040" cy="3703320"/>
           </a:xfrm>
           <a:prstGeom prst="roundRect">
             <a:avLst>
-              <a:gd name="adj" fmla="val 2637"/>
+              <a:gd name="adj" fmla="val 2963"/>
             </a:avLst>
           </a:prstGeom>
           <a:solidFill>
@@ -5670,12 +5670,12 @@
         </p:nvSpPr>
         <p:spPr>
           <a:xfrm>
-            <a:off x="1024128" y="1801368"/>
-            <a:ext cx="3273552" cy="2061972"/>
+            <a:off x="1161288" y="1709928"/>
+            <a:ext cx="2999232" cy="1833372"/>
           </a:xfrm>
           <a:prstGeom prst="roundRect">
             <a:avLst>
-              <a:gd name="adj" fmla="val 4435"/>
+              <a:gd name="adj" fmla="val 4988"/>
             </a:avLst>
           </a:prstGeom>
           <a:solidFill>
@@ -5697,8 +5697,8 @@
         </p:nvSpPr>
         <p:spPr>
           <a:xfrm>
-            <a:off x="4297680" y="1783080"/>
-            <a:ext cx="0" cy="4160520"/>
+            <a:off x="4160520" y="1691640"/>
+            <a:ext cx="0" cy="3703320"/>
           </a:xfrm>
           <a:prstGeom prst="line">
             <a:avLst/>
@@ -5720,8 +5720,8 @@
         </p:nvSpPr>
         <p:spPr>
           <a:xfrm>
-            <a:off x="1005840" y="3863340"/>
-            <a:ext cx="6583680" cy="0"/>
+            <a:off x="1143000" y="3543300"/>
+            <a:ext cx="6035040" cy="0"/>
           </a:xfrm>
           <a:prstGeom prst="line">
             <a:avLst/>
@@ -5743,7 +5743,7 @@
         </p:nvSpPr>
         <p:spPr>
           <a:xfrm>
-            <a:off x="1188720" y="1920240"/>
+            <a:off x="1371600" y="1874520"/>
             <a:ext cx="2286000" cy="274320"/>
           </a:xfrm>
           <a:prstGeom prst="rect">
@@ -5782,7 +5782,7 @@
         </p:nvSpPr>
         <p:spPr>
           <a:xfrm>
-            <a:off x="4480560" y="1920240"/>
+            <a:off x="4389120" y="1874520"/>
             <a:ext cx="2286000" cy="274320"/>
           </a:xfrm>
           <a:prstGeom prst="rect">
@@ -5821,7 +5821,7 @@
         </p:nvSpPr>
         <p:spPr>
           <a:xfrm>
-            <a:off x="1188720" y="4000500"/>
+            <a:off x="1371600" y="3726180"/>
             <a:ext cx="2286000" cy="274320"/>
           </a:xfrm>
           <a:prstGeom prst="rect">
@@ -5860,7 +5860,7 @@
         </p:nvSpPr>
         <p:spPr>
           <a:xfrm>
-            <a:off x="4480560" y="4000500"/>
+            <a:off x="4389120" y="3726180"/>
             <a:ext cx="2286000" cy="274320"/>
           </a:xfrm>
           <a:prstGeom prst="rect">
@@ -5899,7 +5899,7 @@
         </p:nvSpPr>
         <p:spPr>
           <a:xfrm rot="16200000">
-            <a:off x="411480" y="3726180"/>
+            <a:off x="548640" y="3406140"/>
             <a:ext cx="640080" cy="274320"/>
           </a:xfrm>
           <a:prstGeom prst="rect">
@@ -5938,7 +5938,7 @@
         </p:nvSpPr>
         <p:spPr>
           <a:xfrm>
-            <a:off x="3749040" y="6035040"/>
+            <a:off x="3611880" y="5486400"/>
             <a:ext cx="1097280" cy="274320"/>
           </a:xfrm>
           <a:prstGeom prst="rect">
@@ -5977,7 +5977,7 @@
         </p:nvSpPr>
         <p:spPr>
           <a:xfrm>
-            <a:off x="2008022" y="2432304"/>
+            <a:off x="2167128" y="2323490"/>
             <a:ext cx="365760" cy="365760"/>
           </a:xfrm>
           <a:prstGeom prst="ellipse">
@@ -6002,7 +6002,7 @@
         </p:nvSpPr>
         <p:spPr>
           <a:xfrm>
-            <a:off x="2008022" y="2432304"/>
+            <a:off x="2167128" y="2323490"/>
             <a:ext cx="365760" cy="365760"/>
           </a:xfrm>
           <a:prstGeom prst="rect">
@@ -6041,7 +6041,7 @@
         </p:nvSpPr>
         <p:spPr>
           <a:xfrm>
-            <a:off x="3127248" y="2973172"/>
+            <a:off x="3132734" y="2841955"/>
             <a:ext cx="365760" cy="365760"/>
           </a:xfrm>
           <a:prstGeom prst="ellipse">
@@ -6066,7 +6066,7 @@
         </p:nvSpPr>
         <p:spPr>
           <a:xfrm>
-            <a:off x="3127248" y="2973172"/>
+            <a:off x="3132734" y="2841955"/>
             <a:ext cx="365760" cy="365760"/>
           </a:xfrm>
           <a:prstGeom prst="rect">
@@ -6105,7 +6105,7 @@
         </p:nvSpPr>
         <p:spPr>
           <a:xfrm>
-            <a:off x="5431536" y="2349094"/>
+            <a:off x="5184648" y="2249424"/>
             <a:ext cx="365760" cy="365760"/>
           </a:xfrm>
           <a:prstGeom prst="ellipse">
@@ -6130,7 +6130,7 @@
         </p:nvSpPr>
         <p:spPr>
           <a:xfrm>
-            <a:off x="5431536" y="2349094"/>
+            <a:off x="5184648" y="2249424"/>
             <a:ext cx="365760" cy="365760"/>
           </a:xfrm>
           <a:prstGeom prst="rect">
@@ -6169,7 +6169,7 @@
         </p:nvSpPr>
         <p:spPr>
           <a:xfrm>
-            <a:off x="2666390" y="4512564"/>
+            <a:off x="2649931" y="4175150"/>
             <a:ext cx="365760" cy="365760"/>
           </a:xfrm>
           <a:prstGeom prst="ellipse">
@@ -6194,7 +6194,7 @@
         </p:nvSpPr>
         <p:spPr>
           <a:xfrm>
-            <a:off x="2666390" y="4512564"/>
+            <a:off x="2649931" y="4175150"/>
             <a:ext cx="365760" cy="365760"/>
           </a:xfrm>
           <a:prstGeom prst="rect">
@@ -6233,7 +6233,7 @@
         </p:nvSpPr>
         <p:spPr>
           <a:xfrm>
-            <a:off x="5168189" y="4262933"/>
+            <a:off x="4943246" y="3878885"/>
             <a:ext cx="365760" cy="365760"/>
           </a:xfrm>
           <a:prstGeom prst="ellipse">
@@ -6258,7 +6258,7 @@
         </p:nvSpPr>
         <p:spPr>
           <a:xfrm>
-            <a:off x="5168189" y="4262933"/>
+            <a:off x="4943246" y="3878885"/>
             <a:ext cx="365760" cy="365760"/>
           </a:xfrm>
           <a:prstGeom prst="rect">
@@ -6297,7 +6297,7 @@
         </p:nvSpPr>
         <p:spPr>
           <a:xfrm>
-            <a:off x="6221578" y="5011826"/>
+            <a:off x="5908853" y="4545482"/>
             <a:ext cx="365760" cy="365760"/>
           </a:xfrm>
           <a:prstGeom prst="ellipse">
@@ -6322,7 +6322,7 @@
         </p:nvSpPr>
         <p:spPr>
           <a:xfrm>
-            <a:off x="6221578" y="5011826"/>
+            <a:off x="5908853" y="4545482"/>
             <a:ext cx="365760" cy="365760"/>
           </a:xfrm>
           <a:prstGeom prst="rect">
@@ -6361,8 +6361,8 @@
         </p:nvSpPr>
         <p:spPr>
           <a:xfrm>
-            <a:off x="8046720" y="1783080"/>
-            <a:ext cx="3657600" cy="274320"/>
+            <a:off x="7818120" y="1691640"/>
+            <a:ext cx="3687775" cy="274320"/>
           </a:xfrm>
           <a:prstGeom prst="rect">
             <a:avLst/>
@@ -6400,7 +6400,7 @@
         </p:nvSpPr>
         <p:spPr>
           <a:xfrm>
-            <a:off x="8046720" y="2194560"/>
+            <a:off x="7818120" y="2130552"/>
             <a:ext cx="329184" cy="329184"/>
           </a:xfrm>
           <a:prstGeom prst="ellipse">
@@ -6425,7 +6425,7 @@
         </p:nvSpPr>
         <p:spPr>
           <a:xfrm>
-            <a:off x="8046720" y="2194560"/>
+            <a:off x="7818120" y="2130552"/>
             <a:ext cx="329184" cy="329184"/>
           </a:xfrm>
           <a:prstGeom prst="rect">
@@ -6464,8 +6464,8 @@
         </p:nvSpPr>
         <p:spPr>
           <a:xfrm>
-            <a:off x="8503920" y="2157984"/>
-            <a:ext cx="3200400" cy="566928"/>
+            <a:off x="8330184" y="2103120"/>
+            <a:ext cx="3175711" cy="536448"/>
           </a:xfrm>
           <a:prstGeom prst="rect">
             <a:avLst/>
@@ -6506,7 +6506,7 @@
                 <a:ea typeface="Hanken Grotesk" pitchFamily="34" charset="-122"/>
                 <a:cs typeface="Hanken Grotesk" pitchFamily="34" charset="-120"/>
               </a:rPr>
-              <a:t>Deserunt mollit anim id est laborum</a:t>
+              <a:t>Deserunt mollit anim id est</a:t>
             </a:r>
             <a:endParaRPr lang="en-US" sz="1350" dirty="0"/>
           </a:p>
@@ -6520,7 +6520,7 @@
         </p:nvSpPr>
         <p:spPr>
           <a:xfrm>
-            <a:off x="8046720" y="2834640"/>
+            <a:off x="7818120" y="2740152"/>
             <a:ext cx="329184" cy="329184"/>
           </a:xfrm>
           <a:prstGeom prst="ellipse">
@@ -6545,7 +6545,7 @@
         </p:nvSpPr>
         <p:spPr>
           <a:xfrm>
-            <a:off x="8046720" y="2834640"/>
+            <a:off x="7818120" y="2740152"/>
             <a:ext cx="329184" cy="329184"/>
           </a:xfrm>
           <a:prstGeom prst="rect">
@@ -6584,8 +6584,8 @@
         </p:nvSpPr>
         <p:spPr>
           <a:xfrm>
-            <a:off x="8503920" y="2798064"/>
-            <a:ext cx="3200400" cy="566928"/>
+            <a:off x="8330184" y="2712720"/>
+            <a:ext cx="3175711" cy="536448"/>
           </a:xfrm>
           <a:prstGeom prst="rect">
             <a:avLst/>
@@ -6626,7 +6626,7 @@
                 <a:ea typeface="Hanken Grotesk" pitchFamily="34" charset="-122"/>
                 <a:cs typeface="Hanken Grotesk" pitchFamily="34" charset="-120"/>
               </a:rPr>
-              <a:t>Nibh euismod gravida lorem ipsum dolor</a:t>
+              <a:t>Nibh euismod gravida lorem ipsum</a:t>
             </a:r>
             <a:endParaRPr lang="en-US" sz="1350" dirty="0"/>
           </a:p>
@@ -6640,7 +6640,7 @@
         </p:nvSpPr>
         <p:spPr>
           <a:xfrm>
-            <a:off x="8046720" y="3474720"/>
+            <a:off x="7818120" y="3349752"/>
             <a:ext cx="329184" cy="329184"/>
           </a:xfrm>
           <a:prstGeom prst="ellipse">
@@ -6665,7 +6665,7 @@
         </p:nvSpPr>
         <p:spPr>
           <a:xfrm>
-            <a:off x="8046720" y="3474720"/>
+            <a:off x="7818120" y="3349752"/>
             <a:ext cx="329184" cy="329184"/>
           </a:xfrm>
           <a:prstGeom prst="rect">
@@ -6704,8 +6704,8 @@
         </p:nvSpPr>
         <p:spPr>
           <a:xfrm>
-            <a:off x="8503920" y="3438144"/>
-            <a:ext cx="3200400" cy="566928"/>
+            <a:off x="8330184" y="3322320"/>
+            <a:ext cx="3175711" cy="536448"/>
           </a:xfrm>
           <a:prstGeom prst="rect">
             <a:avLst/>
@@ -6746,7 +6746,7 @@
                 <a:ea typeface="Hanken Grotesk" pitchFamily="34" charset="-122"/>
                 <a:cs typeface="Hanken Grotesk" pitchFamily="34" charset="-120"/>
               </a:rPr>
-              <a:t>Ex ea commodo consequat duis aute</a:t>
+              <a:t>Ex ea commodo consequat duis</a:t>
             </a:r>
             <a:endParaRPr lang="en-US" sz="1350" dirty="0"/>
           </a:p>
@@ -6760,7 +6760,7 @@
         </p:nvSpPr>
         <p:spPr>
           <a:xfrm>
-            <a:off x="8046720" y="4114800"/>
+            <a:off x="7818120" y="3959352"/>
             <a:ext cx="329184" cy="329184"/>
           </a:xfrm>
           <a:prstGeom prst="ellipse">
@@ -6785,7 +6785,7 @@
         </p:nvSpPr>
         <p:spPr>
           <a:xfrm>
-            <a:off x="8046720" y="4114800"/>
+            <a:off x="7818120" y="3959352"/>
             <a:ext cx="329184" cy="329184"/>
           </a:xfrm>
           <a:prstGeom prst="rect">
@@ -6824,8 +6824,8 @@
         </p:nvSpPr>
         <p:spPr>
           <a:xfrm>
-            <a:off x="8503920" y="4078224"/>
-            <a:ext cx="3200400" cy="566928"/>
+            <a:off x="8330184" y="3931920"/>
+            <a:ext cx="3175711" cy="536448"/>
           </a:xfrm>
           <a:prstGeom prst="rect">
             <a:avLst/>
@@ -6866,7 +6866,7 @@
                 <a:ea typeface="Hanken Grotesk" pitchFamily="34" charset="-122"/>
                 <a:cs typeface="Hanken Grotesk" pitchFamily="34" charset="-120"/>
               </a:rPr>
-              <a:t>Est laborum curabitur pretium tincidunt lacus</a:t>
+              <a:t>Est laborum curabitur pretium tincidunt</a:t>
             </a:r>
             <a:endParaRPr lang="en-US" sz="1350" dirty="0"/>
           </a:p>
@@ -6880,7 +6880,7 @@
         </p:nvSpPr>
         <p:spPr>
           <a:xfrm>
-            <a:off x="8046720" y="4754880"/>
+            <a:off x="7818120" y="4568952"/>
             <a:ext cx="329184" cy="329184"/>
           </a:xfrm>
           <a:prstGeom prst="ellipse">
@@ -6905,7 +6905,7 @@
         </p:nvSpPr>
         <p:spPr>
           <a:xfrm>
-            <a:off x="8046720" y="4754880"/>
+            <a:off x="7818120" y="4568952"/>
             <a:ext cx="329184" cy="329184"/>
           </a:xfrm>
           <a:prstGeom prst="rect">
@@ -6944,8 +6944,8 @@
         </p:nvSpPr>
         <p:spPr>
           <a:xfrm>
-            <a:off x="8503920" y="4718304"/>
-            <a:ext cx="3200400" cy="566928"/>
+            <a:off x="8330184" y="4541520"/>
+            <a:ext cx="3175711" cy="536448"/>
           </a:xfrm>
           <a:prstGeom prst="rect">
             <a:avLst/>
@@ -6986,7 +6986,7 @@
                 <a:ea typeface="Hanken Grotesk" pitchFamily="34" charset="-122"/>
                 <a:cs typeface="Hanken Grotesk" pitchFamily="34" charset="-120"/>
               </a:rPr>
-              <a:t>Ipsum dolor sit amet consectetur adipiscing</a:t>
+              <a:t>Ipsum dolor sit amet consectetur</a:t>
             </a:r>
             <a:endParaRPr lang="en-US" sz="1350" dirty="0"/>
           </a:p>
@@ -7000,7 +7000,7 @@
         </p:nvSpPr>
         <p:spPr>
           <a:xfrm>
-            <a:off x="8046720" y="5394960"/>
+            <a:off x="7818120" y="5178552"/>
             <a:ext cx="329184" cy="329184"/>
           </a:xfrm>
           <a:prstGeom prst="ellipse">
@@ -7025,7 +7025,7 @@
         </p:nvSpPr>
         <p:spPr>
           <a:xfrm>
-            <a:off x="8046720" y="5394960"/>
+            <a:off x="7818120" y="5178552"/>
             <a:ext cx="329184" cy="329184"/>
           </a:xfrm>
           <a:prstGeom prst="rect">
@@ -7064,8 +7064,8 @@
         </p:nvSpPr>
         <p:spPr>
           <a:xfrm>
-            <a:off x="8503920" y="5358384"/>
-            <a:ext cx="3200400" cy="566928"/>
+            <a:off x="8330184" y="5151120"/>
+            <a:ext cx="3175711" cy="536448"/>
           </a:xfrm>
           <a:prstGeom prst="rect">
             <a:avLst/>
@@ -7106,7 +7106,7 @@
                 <a:ea typeface="Hanken Grotesk" pitchFamily="34" charset="-122"/>
                 <a:cs typeface="Hanken Grotesk" pitchFamily="34" charset="-120"/>
               </a:rPr>
-              <a:t>Duis aute irure dolor in reprehenderit</a:t>
+              <a:t>Duis aute irure dolor in</a:t>
             </a:r>
             <a:endParaRPr lang="en-US" sz="1350" dirty="0"/>
           </a:p>
@@ -7152,8 +7152,8 @@
         </p:nvSpPr>
         <p:spPr>
           <a:xfrm>
-            <a:off x="457200" y="384048"/>
-            <a:ext cx="8961120" cy="274320"/>
+            <a:off x="685800" y="502920"/>
+            <a:ext cx="8595360" cy="274320"/>
           </a:xfrm>
           <a:prstGeom prst="rect">
             <a:avLst/>
@@ -7191,8 +7191,8 @@
         </p:nvSpPr>
         <p:spPr>
           <a:xfrm>
-            <a:off x="457200" y="676656"/>
-            <a:ext cx="11274552" cy="868680"/>
+            <a:off x="685800" y="804672"/>
+            <a:ext cx="10820095" cy="566928"/>
           </a:xfrm>
           <a:prstGeom prst="rect">
             <a:avLst/>
@@ -7211,7 +7211,7 @@
               <a:buNone/>
             </a:pPr>
             <a:r>
-              <a:rPr lang="en-US" sz="3000" b="1" dirty="0">
+              <a:rPr lang="en-US" sz="2800" b="1" dirty="0">
                 <a:solidFill>
                   <a:srgbClr val="222731"/>
                 </a:solidFill>
@@ -7219,9 +7219,9 @@
                 <a:ea typeface="Bricolage Grotesque" pitchFamily="34" charset="-122"/>
                 <a:cs typeface="Bricolage Grotesque" pitchFamily="34" charset="-120"/>
               </a:rPr>
-              <a:t>Et dolore magna aliqua ut enim ad minim veniam quis</a:t>
-            </a:r>
-            <a:endParaRPr lang="en-US" sz="3000" dirty="0"/>
+              <a:t>Et dolore magna aliqua ut enim</a:t>
+            </a:r>
+            <a:endParaRPr lang="en-US" sz="2800" dirty="0"/>
           </a:p>
         </p:txBody>
       </p:sp>
@@ -7233,7 +7233,7 @@
         </p:nvSpPr>
         <p:spPr>
           <a:xfrm>
-            <a:off x="457200" y="6400800"/>
+            <a:off x="685800" y="6400800"/>
             <a:ext cx="4389120" cy="256032"/>
           </a:xfrm>
           <a:prstGeom prst="rect">
@@ -7273,7 +7273,7 @@
         <p:spPr>
           <a:xfrm>
             <a:off x="4937760" y="6400800"/>
-            <a:ext cx="5943600" cy="256032"/>
+            <a:ext cx="5790895" cy="256032"/>
           </a:xfrm>
           <a:prstGeom prst="rect">
             <a:avLst/>
@@ -7311,7 +7311,7 @@
         </p:nvSpPr>
         <p:spPr>
           <a:xfrm>
-            <a:off x="11091672" y="6400800"/>
+            <a:off x="10865815" y="6400800"/>
             <a:ext cx="640080" cy="256032"/>
           </a:xfrm>
           <a:prstGeom prst="rect">
@@ -7350,12 +7350,12 @@
         </p:nvSpPr>
         <p:spPr>
           <a:xfrm>
-            <a:off x="457200" y="1783080"/>
-            <a:ext cx="3383280" cy="4343400"/>
+            <a:off x="685800" y="1691640"/>
+            <a:ext cx="3291840" cy="4069080"/>
           </a:xfrm>
           <a:prstGeom prst="roundRect">
             <a:avLst>
-              <a:gd name="adj" fmla="val 3243"/>
+              <a:gd name="adj" fmla="val 3333"/>
             </a:avLst>
           </a:prstGeom>
           <a:solidFill>
@@ -7377,7 +7377,7 @@
         </p:nvSpPr>
         <p:spPr>
           <a:xfrm>
-            <a:off x="777240" y="2103120"/>
+            <a:off x="1051560" y="2057400"/>
             <a:ext cx="1828800" cy="365760"/>
           </a:xfrm>
           <a:prstGeom prst="roundRect">
@@ -7404,7 +7404,7 @@
         </p:nvSpPr>
         <p:spPr>
           <a:xfrm>
-            <a:off x="777240" y="2103120"/>
+            <a:off x="1051560" y="2057400"/>
             <a:ext cx="1828800" cy="365760"/>
           </a:xfrm>
           <a:prstGeom prst="rect">
@@ -7443,8 +7443,8 @@
         </p:nvSpPr>
         <p:spPr>
           <a:xfrm>
-            <a:off x="777240" y="2651760"/>
-            <a:ext cx="2743200" cy="1463040"/>
+            <a:off x="1051560" y="2651760"/>
+            <a:ext cx="2560320" cy="1280160"/>
           </a:xfrm>
           <a:prstGeom prst="rect">
             <a:avLst/>
@@ -7468,7 +7468,7 @@
                 <a:ea typeface="Bricolage Grotesque" pitchFamily="34" charset="-122"/>
                 <a:cs typeface="Bricolage Grotesque" pitchFamily="34" charset="-120"/>
               </a:rPr>
-              <a:t>Consequat duis aute irure dolor in reprehenderit in.</a:t>
+              <a:t>Consequat duis aute irure dolor in reprehenderit.</a:t>
             </a:r>
             <a:endParaRPr lang="en-US" sz="2000" dirty="0"/>
           </a:p>
@@ -7482,8 +7482,8 @@
         </p:nvSpPr>
         <p:spPr>
           <a:xfrm>
-            <a:off x="777240" y="4297680"/>
-            <a:ext cx="2743200" cy="1645920"/>
+            <a:off x="1051560" y="4206240"/>
+            <a:ext cx="2560320" cy="1188720"/>
           </a:xfrm>
           <a:prstGeom prst="rect">
             <a:avLst/>
@@ -7571,17 +7571,17 @@
           </p:nvPr>
         </p:nvGraphicFramePr>
         <p:xfrm>
-          <a:off x="4114800" y="1783080"/>
-          <a:ext cx="7619695" cy="914400"/>
+          <a:off x="4251960" y="1691640"/>
+          <a:ext cx="7253935" cy="914400"/>
         </p:xfrm>
         <a:graphic>
           <a:graphicData uri="http://schemas.openxmlformats.org/drawingml/2006/table">
             <a:tbl>
               <a:tblPr/>
               <a:tblGrid>
-                <a:gridCol w="731520"/>
-                <a:gridCol w="3687775"/>
-                <a:gridCol w="2011680"/>
+                <a:gridCol w="822960"/>
+                <a:gridCol w="3322015"/>
+                <a:gridCol w="1920240"/>
                 <a:gridCol w="1188720"/>
               </a:tblGrid>
               <a:tr h="457200">
@@ -7611,7 +7611,7 @@
                       </a:endParaRPr>
                     </a:p>
                   </a:txBody>
-                  <a:tcPr marL="137160" marR="137160" marT="0" marB="0" anchor="ctr">
+                  <a:tcPr marL="182880" marR="182880" marT="0" marB="0" anchor="ctr">
                     <a:lnL w="9525" cap="flat" cmpd="sng" algn="ctr">
                       <a:solidFill>
                         <a:srgbClr val="D9D9D6"/>
@@ -7679,7 +7679,7 @@
                       </a:endParaRPr>
                     </a:p>
                   </a:txBody>
-                  <a:tcPr marL="137160" marR="137160" marT="0" marB="0" anchor="ctr">
+                  <a:tcPr marL="182880" marR="182880" marT="0" marB="0" anchor="ctr">
                     <a:lnL w="9525" cap="flat" cmpd="sng" algn="ctr">
                       <a:solidFill>
                         <a:srgbClr val="D9D9D6"/>
@@ -7747,7 +7747,7 @@
                       </a:endParaRPr>
                     </a:p>
                   </a:txBody>
-                  <a:tcPr marL="137160" marR="137160" marT="0" marB="0" anchor="ctr">
+                  <a:tcPr marL="182880" marR="182880" marT="0" marB="0" anchor="ctr">
                     <a:lnL w="9525" cap="flat" cmpd="sng" algn="ctr">
                       <a:solidFill>
                         <a:srgbClr val="D9D9D6"/>
@@ -7815,7 +7815,7 @@
                       </a:endParaRPr>
                     </a:p>
                   </a:txBody>
-                  <a:tcPr marL="137160" marR="137160" marT="0" marB="0" anchor="ctr">
+                  <a:tcPr marL="182880" marR="182880" marT="0" marB="0" anchor="ctr">
                     <a:lnL w="9525" cap="flat" cmpd="sng" algn="ctr">
                       <a:solidFill>
                         <a:srgbClr val="D9D9D6"/>
@@ -7858,7 +7858,7 @@
                   </a:tcPr>
                 </a:tc>
               </a:tr>
-              <a:tr h="777240">
+              <a:tr h="722376">
                 <a:tc>
                   <a:txBody>
                     <a:bodyPr/>
@@ -7885,7 +7885,7 @@
                       </a:endParaRPr>
                     </a:p>
                   </a:txBody>
-                  <a:tcPr marL="137160" marR="137160" marT="0" marB="0" anchor="ctr">
+                  <a:tcPr marL="182880" marR="182880" marT="0" marB="0" anchor="ctr">
                     <a:lnL w="9525" cap="flat" cmpd="sng" algn="ctr">
                       <a:solidFill>
                         <a:srgbClr val="D9D9D6"/>
@@ -7944,7 +7944,7 @@
                           <a:ea typeface="Hanken Grotesk" pitchFamily="34" charset="-122"/>
                           <a:cs typeface="Hanken Grotesk" pitchFamily="34" charset="-120"/>
                         </a:rPr>
-                        <a:t>Ad minim veniam quis nostrud</a:t>
+                        <a:t>Ad minim veniam quis</a:t>
                       </a:r>
                       <a:endParaRPr lang="en-US" sz="1350" dirty="0">
                         <a:latin typeface="Hanken Grotesk" charset="0"/>
@@ -7953,7 +7953,7 @@
                       </a:endParaRPr>
                     </a:p>
                   </a:txBody>
-                  <a:tcPr marL="137160" marR="137160" marT="0" marB="0" anchor="ctr">
+                  <a:tcPr marL="182880" marR="182880" marT="0" marB="0" anchor="ctr">
                     <a:lnL w="9525" cap="flat" cmpd="sng" algn="ctr">
                       <a:solidFill>
                         <a:srgbClr val="D9D9D6"/>
@@ -8021,7 +8021,7 @@
                       </a:endParaRPr>
                     </a:p>
                   </a:txBody>
-                  <a:tcPr marL="137160" marR="137160" marT="0" marB="0" anchor="ctr">
+                  <a:tcPr marL="182880" marR="182880" marT="0" marB="0" anchor="ctr">
                     <a:lnL w="9525" cap="flat" cmpd="sng" algn="ctr">
                       <a:solidFill>
                         <a:srgbClr val="D9D9D6"/>
@@ -8089,7 +8089,7 @@
                       </a:endParaRPr>
                     </a:p>
                   </a:txBody>
-                  <a:tcPr marL="137160" marR="137160" marT="0" marB="0" anchor="ctr">
+                  <a:tcPr marL="182880" marR="182880" marT="0" marB="0" anchor="ctr">
                     <a:lnL w="9525" cap="flat" cmpd="sng" algn="ctr">
                       <a:solidFill>
                         <a:srgbClr val="D9D9D6"/>
@@ -8132,7 +8132,7 @@
                   </a:tcPr>
                 </a:tc>
               </a:tr>
-              <a:tr h="777240">
+              <a:tr h="722376">
                 <a:tc>
                   <a:txBody>
                     <a:bodyPr/>
@@ -8159,7 +8159,7 @@
                       </a:endParaRPr>
                     </a:p>
                   </a:txBody>
-                  <a:tcPr marL="137160" marR="137160" marT="0" marB="0" anchor="ctr">
+                  <a:tcPr marL="182880" marR="182880" marT="0" marB="0" anchor="ctr">
                     <a:lnL w="9525" cap="flat" cmpd="sng" algn="ctr">
                       <a:solidFill>
                         <a:srgbClr val="D9D9D6"/>
@@ -8218,7 +8218,7 @@
                           <a:ea typeface="Hanken Grotesk" pitchFamily="34" charset="-122"/>
                           <a:cs typeface="Hanken Grotesk" pitchFamily="34" charset="-120"/>
                         </a:rPr>
-                        <a:t>Fugiat nulla pariatur excepteur sint</a:t>
+                        <a:t>Fugiat nulla pariatur excepteur</a:t>
                       </a:r>
                       <a:endParaRPr lang="en-US" sz="1350" dirty="0">
                         <a:latin typeface="Hanken Grotesk" charset="0"/>
@@ -8227,7 +8227,7 @@
                       </a:endParaRPr>
                     </a:p>
                   </a:txBody>
-                  <a:tcPr marL="137160" marR="137160" marT="0" marB="0" anchor="ctr">
+                  <a:tcPr marL="182880" marR="182880" marT="0" marB="0" anchor="ctr">
                     <a:lnL w="9525" cap="flat" cmpd="sng" algn="ctr">
                       <a:solidFill>
                         <a:srgbClr val="D9D9D6"/>
@@ -8295,7 +8295,7 @@
                       </a:endParaRPr>
                     </a:p>
                   </a:txBody>
-                  <a:tcPr marL="137160" marR="137160" marT="0" marB="0" anchor="ctr">
+                  <a:tcPr marL="182880" marR="182880" marT="0" marB="0" anchor="ctr">
                     <a:lnL w="9525" cap="flat" cmpd="sng" algn="ctr">
                       <a:solidFill>
                         <a:srgbClr val="D9D9D6"/>
@@ -8363,7 +8363,7 @@
                       </a:endParaRPr>
                     </a:p>
                   </a:txBody>
-                  <a:tcPr marL="137160" marR="137160" marT="0" marB="0" anchor="ctr">
+                  <a:tcPr marL="182880" marR="182880" marT="0" marB="0" anchor="ctr">
                     <a:lnL w="9525" cap="flat" cmpd="sng" algn="ctr">
                       <a:solidFill>
                         <a:srgbClr val="D9D9D6"/>
@@ -8406,7 +8406,7 @@
                   </a:tcPr>
                 </a:tc>
               </a:tr>
-              <a:tr h="777240">
+              <a:tr h="722376">
                 <a:tc>
                   <a:txBody>
                     <a:bodyPr/>
@@ -8433,7 +8433,7 @@
                       </a:endParaRPr>
                     </a:p>
                   </a:txBody>
-                  <a:tcPr marL="137160" marR="137160" marT="0" marB="0" anchor="ctr">
+                  <a:tcPr marL="182880" marR="182880" marT="0" marB="0" anchor="ctr">
                     <a:lnL w="9525" cap="flat" cmpd="sng" algn="ctr">
                       <a:solidFill>
                         <a:srgbClr val="D9D9D6"/>
@@ -8492,7 +8492,7 @@
                           <a:ea typeface="Hanken Grotesk" pitchFamily="34" charset="-122"/>
                           <a:cs typeface="Hanken Grotesk" pitchFamily="34" charset="-120"/>
                         </a:rPr>
-                        <a:t>Odio nullam varius turpis et</a:t>
+                        <a:t>Odio nullam varius turpis</a:t>
                       </a:r>
                       <a:endParaRPr lang="en-US" sz="1350" dirty="0">
                         <a:latin typeface="Hanken Grotesk" charset="0"/>
@@ -8501,7 +8501,7 @@
                       </a:endParaRPr>
                     </a:p>
                   </a:txBody>
-                  <a:tcPr marL="137160" marR="137160" marT="0" marB="0" anchor="ctr">
+                  <a:tcPr marL="182880" marR="182880" marT="0" marB="0" anchor="ctr">
                     <a:lnL w="9525" cap="flat" cmpd="sng" algn="ctr">
                       <a:solidFill>
                         <a:srgbClr val="D9D9D6"/>
@@ -8569,7 +8569,7 @@
                       </a:endParaRPr>
                     </a:p>
                   </a:txBody>
-                  <a:tcPr marL="137160" marR="137160" marT="0" marB="0" anchor="ctr">
+                  <a:tcPr marL="182880" marR="182880" marT="0" marB="0" anchor="ctr">
                     <a:lnL w="9525" cap="flat" cmpd="sng" algn="ctr">
                       <a:solidFill>
                         <a:srgbClr val="D9D9D6"/>
@@ -8637,7 +8637,7 @@
                       </a:endParaRPr>
                     </a:p>
                   </a:txBody>
-                  <a:tcPr marL="137160" marR="137160" marT="0" marB="0" anchor="ctr">
+                  <a:tcPr marL="182880" marR="182880" marT="0" marB="0" anchor="ctr">
                     <a:lnL w="9525" cap="flat" cmpd="sng" algn="ctr">
                       <a:solidFill>
                         <a:srgbClr val="D9D9D6"/>
@@ -8680,7 +8680,7 @@
                   </a:tcPr>
                 </a:tc>
               </a:tr>
-              <a:tr h="777240">
+              <a:tr h="722376">
                 <a:tc>
                   <a:txBody>
                     <a:bodyPr/>
@@ -8707,7 +8707,7 @@
                       </a:endParaRPr>
                     </a:p>
                   </a:txBody>
-                  <a:tcPr marL="137160" marR="137160" marT="0" marB="0" anchor="ctr">
+                  <a:tcPr marL="182880" marR="182880" marT="0" marB="0" anchor="ctr">
                     <a:lnL w="9525" cap="flat" cmpd="sng" algn="ctr">
                       <a:solidFill>
                         <a:srgbClr val="D9D9D6"/>
@@ -8766,7 +8766,7 @@
                           <a:ea typeface="Hanken Grotesk" pitchFamily="34" charset="-122"/>
                           <a:cs typeface="Hanken Grotesk" pitchFamily="34" charset="-120"/>
                         </a:rPr>
-                        <a:t>Amet consectetur adipiscing elit sed</a:t>
+                        <a:t>Amet consectetur adipiscing elit</a:t>
                       </a:r>
                       <a:endParaRPr lang="en-US" sz="1350" dirty="0">
                         <a:latin typeface="Hanken Grotesk" charset="0"/>
@@ -8775,7 +8775,7 @@
                       </a:endParaRPr>
                     </a:p>
                   </a:txBody>
-                  <a:tcPr marL="137160" marR="137160" marT="0" marB="0" anchor="ctr">
+                  <a:tcPr marL="182880" marR="182880" marT="0" marB="0" anchor="ctr">
                     <a:lnL w="9525" cap="flat" cmpd="sng" algn="ctr">
                       <a:solidFill>
                         <a:srgbClr val="D9D9D6"/>
@@ -8843,7 +8843,7 @@
                       </a:endParaRPr>
                     </a:p>
                   </a:txBody>
-                  <a:tcPr marL="137160" marR="137160" marT="0" marB="0" anchor="ctr">
+                  <a:tcPr marL="182880" marR="182880" marT="0" marB="0" anchor="ctr">
                     <a:lnL w="9525" cap="flat" cmpd="sng" algn="ctr">
                       <a:solidFill>
                         <a:srgbClr val="D9D9D6"/>
@@ -8911,7 +8911,7 @@
                       </a:endParaRPr>
                     </a:p>
                   </a:txBody>
-                  <a:tcPr marL="137160" marR="137160" marT="0" marB="0" anchor="ctr">
+                  <a:tcPr marL="182880" marR="182880" marT="0" marB="0" anchor="ctr">
                     <a:lnL w="9525" cap="flat" cmpd="sng" algn="ctr">
                       <a:solidFill>
                         <a:srgbClr val="D9D9D6"/>
@@ -8954,7 +8954,7 @@
                   </a:tcPr>
                 </a:tc>
               </a:tr>
-              <a:tr h="777240">
+              <a:tr h="722376">
                 <a:tc>
                   <a:txBody>
                     <a:bodyPr/>
@@ -8981,7 +8981,7 @@
                       </a:endParaRPr>
                     </a:p>
                   </a:txBody>
-                  <a:tcPr marL="137160" marR="137160" marT="0" marB="0" anchor="ctr">
+                  <a:tcPr marL="182880" marR="182880" marT="0" marB="0" anchor="ctr">
                     <a:lnL w="9525" cap="flat" cmpd="sng" algn="ctr">
                       <a:solidFill>
                         <a:srgbClr val="D9D9D6"/>
@@ -9040,7 +9040,7 @@
                           <a:ea typeface="Hanken Grotesk" pitchFamily="34" charset="-122"/>
                           <a:cs typeface="Hanken Grotesk" pitchFamily="34" charset="-120"/>
                         </a:rPr>
-                        <a:t>Ex ea commodo consequat duis</a:t>
+                        <a:t>Ex ea commodo consequat</a:t>
                       </a:r>
                       <a:endParaRPr lang="en-US" sz="1350" dirty="0">
                         <a:latin typeface="Hanken Grotesk" charset="0"/>
@@ -9049,7 +9049,7 @@
                       </a:endParaRPr>
                     </a:p>
                   </a:txBody>
-                  <a:tcPr marL="137160" marR="137160" marT="0" marB="0" anchor="ctr">
+                  <a:tcPr marL="182880" marR="182880" marT="0" marB="0" anchor="ctr">
                     <a:lnL w="9525" cap="flat" cmpd="sng" algn="ctr">
                       <a:solidFill>
                         <a:srgbClr val="D9D9D6"/>
@@ -9117,7 +9117,7 @@
                       </a:endParaRPr>
                     </a:p>
                   </a:txBody>
-                  <a:tcPr marL="137160" marR="137160" marT="0" marB="0" anchor="ctr">
+                  <a:tcPr marL="182880" marR="182880" marT="0" marB="0" anchor="ctr">
                     <a:lnL w="9525" cap="flat" cmpd="sng" algn="ctr">
                       <a:solidFill>
                         <a:srgbClr val="D9D9D6"/>
@@ -9185,7 +9185,7 @@
                       </a:endParaRPr>
                     </a:p>
                   </a:txBody>
-                  <a:tcPr marL="137160" marR="137160" marT="0" marB="0" anchor="ctr">
+                  <a:tcPr marL="182880" marR="182880" marT="0" marB="0" anchor="ctr">
                     <a:lnL w="9525" cap="flat" cmpd="sng" algn="ctr">
                       <a:solidFill>
                         <a:srgbClr val="D9D9D6"/>
@@ -9272,8 +9272,8 @@
         </p:nvSpPr>
         <p:spPr>
           <a:xfrm>
-            <a:off x="457200" y="384048"/>
-            <a:ext cx="8961120" cy="274320"/>
+            <a:off x="685800" y="502920"/>
+            <a:ext cx="8595360" cy="274320"/>
           </a:xfrm>
           <a:prstGeom prst="rect">
             <a:avLst/>
@@ -9311,8 +9311,8 @@
         </p:nvSpPr>
         <p:spPr>
           <a:xfrm>
-            <a:off x="457200" y="676656"/>
-            <a:ext cx="11274552" cy="868680"/>
+            <a:off x="685800" y="804672"/>
+            <a:ext cx="10820095" cy="566928"/>
           </a:xfrm>
           <a:prstGeom prst="rect">
             <a:avLst/>
@@ -9331,7 +9331,7 @@
               <a:buNone/>
             </a:pPr>
             <a:r>
-              <a:rPr lang="en-US" sz="3000" b="1" dirty="0">
+              <a:rPr lang="en-US" sz="2800" b="1" dirty="0">
                 <a:solidFill>
                   <a:srgbClr val="222731"/>
                 </a:solidFill>
@@ -9341,7 +9341,7 @@
               </a:rPr>
               <a:t>Two ways to turn this template into your deck</a:t>
             </a:r>
-            <a:endParaRPr lang="en-US" sz="3000" dirty="0"/>
+            <a:endParaRPr lang="en-US" sz="2800" dirty="0"/>
           </a:p>
         </p:txBody>
       </p:sp>
@@ -9353,7 +9353,7 @@
         </p:nvSpPr>
         <p:spPr>
           <a:xfrm>
-            <a:off x="457200" y="6400800"/>
+            <a:off x="685800" y="6400800"/>
             <a:ext cx="4389120" cy="256032"/>
           </a:xfrm>
           <a:prstGeom prst="rect">
@@ -9393,7 +9393,7 @@
         <p:spPr>
           <a:xfrm>
             <a:off x="4937760" y="6400800"/>
-            <a:ext cx="5943600" cy="256032"/>
+            <a:ext cx="5790895" cy="256032"/>
           </a:xfrm>
           <a:prstGeom prst="rect">
             <a:avLst/>
@@ -9431,7 +9431,7 @@
         </p:nvSpPr>
         <p:spPr>
           <a:xfrm>
-            <a:off x="11091672" y="6400800"/>
+            <a:off x="10865815" y="6400800"/>
             <a:ext cx="640080" cy="256032"/>
           </a:xfrm>
           <a:prstGeom prst="rect">
@@ -9470,12 +9470,12 @@
         </p:nvSpPr>
         <p:spPr>
           <a:xfrm>
-            <a:off x="457200" y="1783080"/>
-            <a:ext cx="4754880" cy="2011680"/>
+            <a:off x="685800" y="1691640"/>
+            <a:ext cx="4754880" cy="1828800"/>
           </a:xfrm>
           <a:prstGeom prst="roundRect">
             <a:avLst>
-              <a:gd name="adj" fmla="val 5455"/>
+              <a:gd name="adj" fmla="val 6000"/>
             </a:avLst>
           </a:prstGeom>
           <a:solidFill>
@@ -9497,8 +9497,8 @@
         </p:nvSpPr>
         <p:spPr>
           <a:xfrm>
-            <a:off x="731520" y="2011680"/>
-            <a:ext cx="4206240" cy="274320"/>
+            <a:off x="1051560" y="1984248"/>
+            <a:ext cx="4023360" cy="274320"/>
           </a:xfrm>
           <a:prstGeom prst="rect">
             <a:avLst/>
@@ -9536,8 +9536,8 @@
         </p:nvSpPr>
         <p:spPr>
           <a:xfrm>
-            <a:off x="731520" y="2331720"/>
-            <a:ext cx="4206240" cy="1371600"/>
+            <a:off x="1051560" y="2331720"/>
+            <a:ext cx="4023360" cy="1097280"/>
           </a:xfrm>
           <a:prstGeom prst="rect">
             <a:avLst/>
@@ -9551,13 +9551,13 @@
           <a:p>
             <a:pPr marL="342900" indent="-342900">
               <a:spcAft>
-                <a:spcPts val="500"/>
+                <a:spcPts val="400"/>
               </a:spcAft>
               <a:buSzPct val="100000"/>
               <a:buChar char="•"/>
             </a:pPr>
             <a:r>
-              <a:rPr lang="en-US" sz="1350" dirty="0">
+              <a:rPr lang="en-US" sz="1300" dirty="0">
                 <a:solidFill>
                   <a:srgbClr val="222731"/>
                 </a:solidFill>
@@ -9567,18 +9567,18 @@
               </a:rPr>
               <a:t>Replace every lorem ipsum line and dummy number with your content.</a:t>
             </a:r>
-            <a:endParaRPr lang="en-US" sz="1350" dirty="0"/>
+            <a:endParaRPr lang="en-US" sz="1300" dirty="0"/>
           </a:p>
           <a:p>
             <a:pPr marL="342900" indent="-342900">
               <a:spcAft>
-                <a:spcPts val="500"/>
+                <a:spcPts val="400"/>
               </a:spcAft>
               <a:buSzPct val="100000"/>
               <a:buChar char="•"/>
             </a:pPr>
             <a:r>
-              <a:rPr lang="en-US" sz="1350" dirty="0">
+              <a:rPr lang="en-US" sz="1300" dirty="0">
                 <a:solidFill>
                   <a:srgbClr val="222731"/>
                 </a:solidFill>
@@ -9588,18 +9588,18 @@
               </a:rPr>
               <a:t>Keep the layouts. Delete slides you have no evidence for.</a:t>
             </a:r>
-            <a:endParaRPr lang="en-US" sz="1350" dirty="0"/>
+            <a:endParaRPr lang="en-US" sz="1300" dirty="0"/>
           </a:p>
           <a:p>
             <a:pPr marL="342900" indent="-342900">
               <a:spcAft>
-                <a:spcPts val="500"/>
+                <a:spcPts val="400"/>
               </a:spcAft>
               <a:buSzPct val="100000"/>
               <a:buChar char="•"/>
             </a:pPr>
             <a:r>
-              <a:rPr lang="en-US" sz="1350" dirty="0">
+              <a:rPr lang="en-US" sz="1300" dirty="0">
                 <a:solidFill>
                   <a:srgbClr val="222731"/>
                 </a:solidFill>
@@ -9609,7 +9609,7 @@
               </a:rPr>
               <a:t>Put real screenshots behind the grey phone screens.</a:t>
             </a:r>
-            <a:endParaRPr lang="en-US" sz="1350" dirty="0"/>
+            <a:endParaRPr lang="en-US" sz="1300" dirty="0"/>
           </a:p>
         </p:txBody>
       </p:sp>
@@ -9621,12 +9621,12 @@
         </p:nvSpPr>
         <p:spPr>
           <a:xfrm>
-            <a:off x="457200" y="3977640"/>
-            <a:ext cx="4754880" cy="2148840"/>
+            <a:off x="685800" y="3794760"/>
+            <a:ext cx="4754880" cy="1965960"/>
           </a:xfrm>
           <a:prstGeom prst="roundRect">
             <a:avLst>
-              <a:gd name="adj" fmla="val 5106"/>
+              <a:gd name="adj" fmla="val 5581"/>
             </a:avLst>
           </a:prstGeom>
           <a:solidFill>
@@ -9648,8 +9648,8 @@
         </p:nvSpPr>
         <p:spPr>
           <a:xfrm>
-            <a:off x="731520" y="4206240"/>
-            <a:ext cx="4206240" cy="274320"/>
+            <a:off x="1051560" y="4087368"/>
+            <a:ext cx="4023360" cy="274320"/>
           </a:xfrm>
           <a:prstGeom prst="rect">
             <a:avLst/>
@@ -9673,7 +9673,7 @@
                 <a:ea typeface="Hanken Grotesk" pitchFamily="34" charset="-122"/>
                 <a:cs typeface="Hanken Grotesk" pitchFamily="34" charset="-120"/>
               </a:rPr>
-              <a:t>OPTION B · USE YOUR AI TOOL</a:t>
+              <a:t>OPTION B · USE CLAUDE</a:t>
             </a:r>
             <a:endParaRPr lang="en-US" sz="1050" dirty="0"/>
           </a:p>
@@ -9687,8 +9687,8 @@
         </p:nvSpPr>
         <p:spPr>
           <a:xfrm>
-            <a:off x="731520" y="4526280"/>
-            <a:ext cx="4206240" cy="274320"/>
+            <a:off x="1051560" y="4416552"/>
+            <a:ext cx="4023360" cy="274320"/>
           </a:xfrm>
           <a:prstGeom prst="rect">
             <a:avLst/>
@@ -9712,7 +9712,7 @@
                 <a:ea typeface="Hanken Grotesk" pitchFamily="34" charset="-122"/>
                 <a:cs typeface="Hanken Grotesk" pitchFamily="34" charset="-120"/>
               </a:rPr>
-              <a:t>Attach cx-presentation-system.md, then write:</a:t>
+              <a:t>Attach the Storyloom spec, then write:</a:t>
             </a:r>
             <a:endParaRPr lang="en-US" sz="1350" dirty="0"/>
           </a:p>
@@ -9726,12 +9726,12 @@
         </p:nvSpPr>
         <p:spPr>
           <a:xfrm>
-            <a:off x="731520" y="4846320"/>
-            <a:ext cx="4206240" cy="1097280"/>
+            <a:off x="1051560" y="4782312"/>
+            <a:ext cx="4023360" cy="704088"/>
           </a:xfrm>
           <a:prstGeom prst="roundRect">
             <a:avLst>
-              <a:gd name="adj" fmla="val 6667"/>
+              <a:gd name="adj" fmla="val 10390"/>
             </a:avLst>
           </a:prstGeom>
           <a:solidFill>
@@ -9753,8 +9753,8 @@
         </p:nvSpPr>
         <p:spPr>
           <a:xfrm>
-            <a:off x="868680" y="4892040"/>
-            <a:ext cx="3931920" cy="1005840"/>
+            <a:off x="1188720" y="4782312"/>
+            <a:ext cx="3749040" cy="704088"/>
           </a:xfrm>
           <a:prstGeom prst="rect">
             <a:avLst/>
@@ -9792,8 +9792,8 @@
         </p:nvSpPr>
         <p:spPr>
           <a:xfrm>
-            <a:off x="5577840" y="1783080"/>
-            <a:ext cx="6156655" cy="274320"/>
+            <a:off x="5989320" y="1691640"/>
+            <a:ext cx="5516575" cy="274320"/>
           </a:xfrm>
           <a:prstGeom prst="rect">
             <a:avLst/>
@@ -9831,8 +9831,8 @@
         </p:nvSpPr>
         <p:spPr>
           <a:xfrm>
-            <a:off x="5577840" y="2148840"/>
-            <a:ext cx="411480" cy="329184"/>
+            <a:off x="5989320" y="2075688"/>
+            <a:ext cx="411480" cy="311727"/>
           </a:xfrm>
           <a:prstGeom prst="rect">
             <a:avLst/>
@@ -9870,8 +9870,8 @@
         </p:nvSpPr>
         <p:spPr>
           <a:xfrm>
-            <a:off x="6035040" y="2148840"/>
-            <a:ext cx="3322015" cy="329184"/>
+            <a:off x="6446520" y="2075688"/>
+            <a:ext cx="2681935" cy="311727"/>
           </a:xfrm>
           <a:prstGeom prst="rect">
             <a:avLst/>
@@ -9909,8 +9909,8 @@
         </p:nvSpPr>
         <p:spPr>
           <a:xfrm>
-            <a:off x="9402775" y="2148840"/>
-            <a:ext cx="2331720" cy="329184"/>
+            <a:off x="9174175" y="2075688"/>
+            <a:ext cx="2331720" cy="311727"/>
           </a:xfrm>
           <a:prstGeom prst="rect">
             <a:avLst/>
@@ -9948,8 +9948,8 @@
         </p:nvSpPr>
         <p:spPr>
           <a:xfrm>
-            <a:off x="5577840" y="2478024"/>
-            <a:ext cx="6156655" cy="0"/>
+            <a:off x="5989320" y="2387415"/>
+            <a:ext cx="5516575" cy="0"/>
           </a:xfrm>
           <a:prstGeom prst="line">
             <a:avLst/>
@@ -9971,8 +9971,8 @@
         </p:nvSpPr>
         <p:spPr>
           <a:xfrm>
-            <a:off x="5577840" y="2478024"/>
-            <a:ext cx="411480" cy="329184"/>
+            <a:off x="5989320" y="2387415"/>
+            <a:ext cx="411480" cy="311727"/>
           </a:xfrm>
           <a:prstGeom prst="rect">
             <a:avLst/>
@@ -10010,8 +10010,8 @@
         </p:nvSpPr>
         <p:spPr>
           <a:xfrm>
-            <a:off x="6035040" y="2478024"/>
-            <a:ext cx="3322015" cy="329184"/>
+            <a:off x="6446520" y="2387415"/>
+            <a:ext cx="2681935" cy="311727"/>
           </a:xfrm>
           <a:prstGeom prst="rect">
             <a:avLst/>
@@ -10049,8 +10049,8 @@
         </p:nvSpPr>
         <p:spPr>
           <a:xfrm>
-            <a:off x="9402775" y="2478024"/>
-            <a:ext cx="2331720" cy="329184"/>
+            <a:off x="9174175" y="2387415"/>
+            <a:ext cx="2331720" cy="311727"/>
           </a:xfrm>
           <a:prstGeom prst="rect">
             <a:avLst/>
@@ -10088,8 +10088,8 @@
         </p:nvSpPr>
         <p:spPr>
           <a:xfrm>
-            <a:off x="5577840" y="2807208"/>
-            <a:ext cx="6156655" cy="0"/>
+            <a:off x="5989320" y="2699143"/>
+            <a:ext cx="5516575" cy="0"/>
           </a:xfrm>
           <a:prstGeom prst="line">
             <a:avLst/>
@@ -10111,8 +10111,8 @@
         </p:nvSpPr>
         <p:spPr>
           <a:xfrm>
-            <a:off x="5577840" y="2807208"/>
-            <a:ext cx="411480" cy="329184"/>
+            <a:off x="5989320" y="2699143"/>
+            <a:ext cx="411480" cy="311727"/>
           </a:xfrm>
           <a:prstGeom prst="rect">
             <a:avLst/>
@@ -10150,8 +10150,8 @@
         </p:nvSpPr>
         <p:spPr>
           <a:xfrm>
-            <a:off x="6035040" y="2807208"/>
-            <a:ext cx="3322015" cy="329184"/>
+            <a:off x="6446520" y="2699143"/>
+            <a:ext cx="2681935" cy="311727"/>
           </a:xfrm>
           <a:prstGeom prst="rect">
             <a:avLst/>
@@ -10189,8 +10189,8 @@
         </p:nvSpPr>
         <p:spPr>
           <a:xfrm>
-            <a:off x="9402775" y="2807208"/>
-            <a:ext cx="2331720" cy="329184"/>
+            <a:off x="9174175" y="2699143"/>
+            <a:ext cx="2331720" cy="311727"/>
           </a:xfrm>
           <a:prstGeom prst="rect">
             <a:avLst/>
@@ -10228,8 +10228,8 @@
         </p:nvSpPr>
         <p:spPr>
           <a:xfrm>
-            <a:off x="5577840" y="3136392"/>
-            <a:ext cx="6156655" cy="0"/>
+            <a:off x="5989320" y="3010870"/>
+            <a:ext cx="5516575" cy="0"/>
           </a:xfrm>
           <a:prstGeom prst="line">
             <a:avLst/>
@@ -10251,8 +10251,8 @@
         </p:nvSpPr>
         <p:spPr>
           <a:xfrm>
-            <a:off x="5577840" y="3136392"/>
-            <a:ext cx="411480" cy="329184"/>
+            <a:off x="5989320" y="3010870"/>
+            <a:ext cx="411480" cy="311727"/>
           </a:xfrm>
           <a:prstGeom prst="rect">
             <a:avLst/>
@@ -10290,8 +10290,8 @@
         </p:nvSpPr>
         <p:spPr>
           <a:xfrm>
-            <a:off x="6035040" y="3136392"/>
-            <a:ext cx="3322015" cy="329184"/>
+            <a:off x="6446520" y="3010870"/>
+            <a:ext cx="2681935" cy="311727"/>
           </a:xfrm>
           <a:prstGeom prst="rect">
             <a:avLst/>
@@ -10329,8 +10329,8 @@
         </p:nvSpPr>
         <p:spPr>
           <a:xfrm>
-            <a:off x="9402775" y="3136392"/>
-            <a:ext cx="2331720" cy="329184"/>
+            <a:off x="9174175" y="3010870"/>
+            <a:ext cx="2331720" cy="311727"/>
           </a:xfrm>
           <a:prstGeom prst="rect">
             <a:avLst/>
@@ -10368,8 +10368,8 @@
         </p:nvSpPr>
         <p:spPr>
           <a:xfrm>
-            <a:off x="5577840" y="3465576"/>
-            <a:ext cx="6156655" cy="0"/>
+            <a:off x="5989320" y="3322597"/>
+            <a:ext cx="5516575" cy="0"/>
           </a:xfrm>
           <a:prstGeom prst="line">
             <a:avLst/>
@@ -10391,8 +10391,8 @@
         </p:nvSpPr>
         <p:spPr>
           <a:xfrm>
-            <a:off x="5577840" y="3465576"/>
-            <a:ext cx="411480" cy="329184"/>
+            <a:off x="5989320" y="3322597"/>
+            <a:ext cx="411480" cy="311727"/>
           </a:xfrm>
           <a:prstGeom prst="rect">
             <a:avLst/>
@@ -10430,8 +10430,8 @@
         </p:nvSpPr>
         <p:spPr>
           <a:xfrm>
-            <a:off x="6035040" y="3465576"/>
-            <a:ext cx="3322015" cy="329184"/>
+            <a:off x="6446520" y="3322597"/>
+            <a:ext cx="2681935" cy="311727"/>
           </a:xfrm>
           <a:prstGeom prst="rect">
             <a:avLst/>
@@ -10469,8 +10469,8 @@
         </p:nvSpPr>
         <p:spPr>
           <a:xfrm>
-            <a:off x="9402775" y="3465576"/>
-            <a:ext cx="2331720" cy="329184"/>
+            <a:off x="9174175" y="3322597"/>
+            <a:ext cx="2331720" cy="311727"/>
           </a:xfrm>
           <a:prstGeom prst="rect">
             <a:avLst/>
@@ -10508,8 +10508,8 @@
         </p:nvSpPr>
         <p:spPr>
           <a:xfrm>
-            <a:off x="5577840" y="3794760"/>
-            <a:ext cx="6156655" cy="0"/>
+            <a:off x="5989320" y="3634324"/>
+            <a:ext cx="5516575" cy="0"/>
           </a:xfrm>
           <a:prstGeom prst="line">
             <a:avLst/>
@@ -10531,8 +10531,8 @@
         </p:nvSpPr>
         <p:spPr>
           <a:xfrm>
-            <a:off x="5577840" y="3794760"/>
-            <a:ext cx="411480" cy="329184"/>
+            <a:off x="5989320" y="3634324"/>
+            <a:ext cx="411480" cy="311727"/>
           </a:xfrm>
           <a:prstGeom prst="rect">
             <a:avLst/>
@@ -10570,8 +10570,8 @@
         </p:nvSpPr>
         <p:spPr>
           <a:xfrm>
-            <a:off x="6035040" y="3794760"/>
-            <a:ext cx="3322015" cy="329184"/>
+            <a:off x="6446520" y="3634324"/>
+            <a:ext cx="2681935" cy="311727"/>
           </a:xfrm>
           <a:prstGeom prst="rect">
             <a:avLst/>
@@ -10609,8 +10609,8 @@
         </p:nvSpPr>
         <p:spPr>
           <a:xfrm>
-            <a:off x="9402775" y="3794760"/>
-            <a:ext cx="2331720" cy="329184"/>
+            <a:off x="9174175" y="3634324"/>
+            <a:ext cx="2331720" cy="311727"/>
           </a:xfrm>
           <a:prstGeom prst="rect">
             <a:avLst/>
@@ -10648,8 +10648,8 @@
         </p:nvSpPr>
         <p:spPr>
           <a:xfrm>
-            <a:off x="5577840" y="4123944"/>
-            <a:ext cx="6156655" cy="0"/>
+            <a:off x="5989320" y="3946052"/>
+            <a:ext cx="5516575" cy="0"/>
           </a:xfrm>
           <a:prstGeom prst="line">
             <a:avLst/>
@@ -10671,8 +10671,8 @@
         </p:nvSpPr>
         <p:spPr>
           <a:xfrm>
-            <a:off x="5577840" y="4123944"/>
-            <a:ext cx="411480" cy="329184"/>
+            <a:off x="5989320" y="3946052"/>
+            <a:ext cx="411480" cy="311727"/>
           </a:xfrm>
           <a:prstGeom prst="rect">
             <a:avLst/>
@@ -10710,8 +10710,8 @@
         </p:nvSpPr>
         <p:spPr>
           <a:xfrm>
-            <a:off x="6035040" y="4123944"/>
-            <a:ext cx="3322015" cy="329184"/>
+            <a:off x="6446520" y="3946052"/>
+            <a:ext cx="2681935" cy="311727"/>
           </a:xfrm>
           <a:prstGeom prst="rect">
             <a:avLst/>
@@ -10749,8 +10749,8 @@
         </p:nvSpPr>
         <p:spPr>
           <a:xfrm>
-            <a:off x="9402775" y="4123944"/>
-            <a:ext cx="2331720" cy="329184"/>
+            <a:off x="9174175" y="3946052"/>
+            <a:ext cx="2331720" cy="311727"/>
           </a:xfrm>
           <a:prstGeom prst="rect">
             <a:avLst/>
@@ -10788,8 +10788,8 @@
         </p:nvSpPr>
         <p:spPr>
           <a:xfrm>
-            <a:off x="5577840" y="4453128"/>
-            <a:ext cx="6156655" cy="0"/>
+            <a:off x="5989320" y="4257779"/>
+            <a:ext cx="5516575" cy="0"/>
           </a:xfrm>
           <a:prstGeom prst="line">
             <a:avLst/>
@@ -10811,8 +10811,8 @@
         </p:nvSpPr>
         <p:spPr>
           <a:xfrm>
-            <a:off x="5577840" y="4453128"/>
-            <a:ext cx="411480" cy="329184"/>
+            <a:off x="5989320" y="4257779"/>
+            <a:ext cx="411480" cy="311727"/>
           </a:xfrm>
           <a:prstGeom prst="rect">
             <a:avLst/>
@@ -10850,8 +10850,8 @@
         </p:nvSpPr>
         <p:spPr>
           <a:xfrm>
-            <a:off x="6035040" y="4453128"/>
-            <a:ext cx="3322015" cy="329184"/>
+            <a:off x="6446520" y="4257779"/>
+            <a:ext cx="2681935" cy="311727"/>
           </a:xfrm>
           <a:prstGeom prst="rect">
             <a:avLst/>
@@ -10889,8 +10889,8 @@
         </p:nvSpPr>
         <p:spPr>
           <a:xfrm>
-            <a:off x="9402775" y="4453128"/>
-            <a:ext cx="2331720" cy="329184"/>
+            <a:off x="9174175" y="4257779"/>
+            <a:ext cx="2331720" cy="311727"/>
           </a:xfrm>
           <a:prstGeom prst="rect">
             <a:avLst/>
@@ -10928,8 +10928,8 @@
         </p:nvSpPr>
         <p:spPr>
           <a:xfrm>
-            <a:off x="5577840" y="4782312"/>
-            <a:ext cx="6156655" cy="0"/>
+            <a:off x="5989320" y="4569506"/>
+            <a:ext cx="5516575" cy="0"/>
           </a:xfrm>
           <a:prstGeom prst="line">
             <a:avLst/>
@@ -10951,8 +10951,8 @@
         </p:nvSpPr>
         <p:spPr>
           <a:xfrm>
-            <a:off x="5577840" y="4782312"/>
-            <a:ext cx="411480" cy="329184"/>
+            <a:off x="5989320" y="4569506"/>
+            <a:ext cx="411480" cy="311727"/>
           </a:xfrm>
           <a:prstGeom prst="rect">
             <a:avLst/>
@@ -10990,8 +10990,8 @@
         </p:nvSpPr>
         <p:spPr>
           <a:xfrm>
-            <a:off x="6035040" y="4782312"/>
-            <a:ext cx="3322015" cy="329184"/>
+            <a:off x="6446520" y="4569506"/>
+            <a:ext cx="2681935" cy="311727"/>
           </a:xfrm>
           <a:prstGeom prst="rect">
             <a:avLst/>
@@ -11029,8 +11029,8 @@
         </p:nvSpPr>
         <p:spPr>
           <a:xfrm>
-            <a:off x="9402775" y="4782312"/>
-            <a:ext cx="2331720" cy="329184"/>
+            <a:off x="9174175" y="4569506"/>
+            <a:ext cx="2331720" cy="311727"/>
           </a:xfrm>
           <a:prstGeom prst="rect">
             <a:avLst/>
@@ -11068,8 +11068,8 @@
         </p:nvSpPr>
         <p:spPr>
           <a:xfrm>
-            <a:off x="5577840" y="5111496"/>
-            <a:ext cx="6156655" cy="0"/>
+            <a:off x="5989320" y="4881233"/>
+            <a:ext cx="5516575" cy="0"/>
           </a:xfrm>
           <a:prstGeom prst="line">
             <a:avLst/>
@@ -11091,8 +11091,8 @@
         </p:nvSpPr>
         <p:spPr>
           <a:xfrm>
-            <a:off x="5577840" y="5111496"/>
-            <a:ext cx="411480" cy="329184"/>
+            <a:off x="5989320" y="4881233"/>
+            <a:ext cx="411480" cy="311727"/>
           </a:xfrm>
           <a:prstGeom prst="rect">
             <a:avLst/>
@@ -11130,8 +11130,8 @@
         </p:nvSpPr>
         <p:spPr>
           <a:xfrm>
-            <a:off x="6035040" y="5111496"/>
-            <a:ext cx="3322015" cy="329184"/>
+            <a:off x="6446520" y="4881233"/>
+            <a:ext cx="2681935" cy="311727"/>
           </a:xfrm>
           <a:prstGeom prst="rect">
             <a:avLst/>
@@ -11169,8 +11169,8 @@
         </p:nvSpPr>
         <p:spPr>
           <a:xfrm>
-            <a:off x="9402775" y="5111496"/>
-            <a:ext cx="2331720" cy="329184"/>
+            <a:off x="9174175" y="4881233"/>
+            <a:ext cx="2331720" cy="311727"/>
           </a:xfrm>
           <a:prstGeom prst="rect">
             <a:avLst/>
@@ -11208,8 +11208,8 @@
         </p:nvSpPr>
         <p:spPr>
           <a:xfrm>
-            <a:off x="5577840" y="5440680"/>
-            <a:ext cx="6156655" cy="0"/>
+            <a:off x="5989320" y="5192961"/>
+            <a:ext cx="5516575" cy="0"/>
           </a:xfrm>
           <a:prstGeom prst="line">
             <a:avLst/>
@@ -11231,8 +11231,8 @@
         </p:nvSpPr>
         <p:spPr>
           <a:xfrm>
-            <a:off x="5577840" y="5440680"/>
-            <a:ext cx="411480" cy="329184"/>
+            <a:off x="5989320" y="5192961"/>
+            <a:ext cx="411480" cy="311727"/>
           </a:xfrm>
           <a:prstGeom prst="rect">
             <a:avLst/>
@@ -11270,8 +11270,8 @@
         </p:nvSpPr>
         <p:spPr>
           <a:xfrm>
-            <a:off x="6035040" y="5440680"/>
-            <a:ext cx="3322015" cy="329184"/>
+            <a:off x="6446520" y="5192961"/>
+            <a:ext cx="2681935" cy="311727"/>
           </a:xfrm>
           <a:prstGeom prst="rect">
             <a:avLst/>
@@ -11309,8 +11309,8 @@
         </p:nvSpPr>
         <p:spPr>
           <a:xfrm>
-            <a:off x="9402775" y="5440680"/>
-            <a:ext cx="2331720" cy="329184"/>
+            <a:off x="9174175" y="5192961"/>
+            <a:ext cx="2331720" cy="311727"/>
           </a:xfrm>
           <a:prstGeom prst="rect">
             <a:avLst/>
@@ -11348,8 +11348,8 @@
         </p:nvSpPr>
         <p:spPr>
           <a:xfrm>
-            <a:off x="5577840" y="6172200"/>
-            <a:ext cx="6156655" cy="228600"/>
+            <a:off x="5989320" y="5989320"/>
+            <a:ext cx="5516575" cy="256032"/>
           </a:xfrm>
           <a:prstGeom prst="rect">
             <a:avLst/>
@@ -11419,8 +11419,8 @@
         </p:nvSpPr>
         <p:spPr>
           <a:xfrm>
-            <a:off x="457200" y="384048"/>
-            <a:ext cx="8961120" cy="274320"/>
+            <a:off x="685800" y="502920"/>
+            <a:ext cx="8595360" cy="274320"/>
           </a:xfrm>
           <a:prstGeom prst="rect">
             <a:avLst/>
@@ -11458,8 +11458,8 @@
         </p:nvSpPr>
         <p:spPr>
           <a:xfrm>
-            <a:off x="457200" y="676656"/>
-            <a:ext cx="11274552" cy="868680"/>
+            <a:off x="685800" y="804672"/>
+            <a:ext cx="10820095" cy="566928"/>
           </a:xfrm>
           <a:prstGeom prst="rect">
             <a:avLst/>
@@ -11478,7 +11478,7 @@
               <a:buNone/>
             </a:pPr>
             <a:r>
-              <a:rPr lang="en-US" sz="3000" b="1" dirty="0">
+              <a:rPr lang="en-US" sz="2800" b="1" dirty="0">
                 <a:solidFill>
                   <a:srgbClr val="222731"/>
                 </a:solidFill>
@@ -11486,9 +11486,9 @@
                 <a:ea typeface="Bricolage Grotesque" pitchFamily="34" charset="-122"/>
                 <a:cs typeface="Bricolage Grotesque" pitchFamily="34" charset="-120"/>
               </a:rPr>
-              <a:t>Elit sed do eiusmod tempor incididunt ut labore et</a:t>
-            </a:r>
-            <a:endParaRPr lang="en-US" sz="3000" dirty="0"/>
+              <a:t>Elit sed do eiusmod tempor incididunt</a:t>
+            </a:r>
+            <a:endParaRPr lang="en-US" sz="2800" dirty="0"/>
           </a:p>
         </p:txBody>
       </p:sp>
@@ -11500,7 +11500,7 @@
         </p:nvSpPr>
         <p:spPr>
           <a:xfrm>
-            <a:off x="457200" y="6400800"/>
+            <a:off x="685800" y="6400800"/>
             <a:ext cx="4389120" cy="256032"/>
           </a:xfrm>
           <a:prstGeom prst="rect">
@@ -11540,7 +11540,7 @@
         <p:spPr>
           <a:xfrm>
             <a:off x="4937760" y="6400800"/>
-            <a:ext cx="5943600" cy="256032"/>
+            <a:ext cx="5790895" cy="256032"/>
           </a:xfrm>
           <a:prstGeom prst="rect">
             <a:avLst/>
@@ -11578,7 +11578,7 @@
         </p:nvSpPr>
         <p:spPr>
           <a:xfrm>
-            <a:off x="11091672" y="6400800"/>
+            <a:off x="10865815" y="6400800"/>
             <a:ext cx="640080" cy="256032"/>
           </a:xfrm>
           <a:prstGeom prst="rect">
@@ -11617,12 +11617,12 @@
         </p:nvSpPr>
         <p:spPr>
           <a:xfrm>
-            <a:off x="457200" y="1783080"/>
-            <a:ext cx="3576218" cy="2788920"/>
+            <a:off x="685800" y="1691640"/>
+            <a:ext cx="3423818" cy="2514600"/>
           </a:xfrm>
           <a:prstGeom prst="roundRect">
             <a:avLst>
-              <a:gd name="adj" fmla="val 3934"/>
+              <a:gd name="adj" fmla="val 4364"/>
             </a:avLst>
           </a:prstGeom>
           <a:solidFill>
@@ -11644,7 +11644,7 @@
         </p:nvSpPr>
         <p:spPr>
           <a:xfrm>
-            <a:off x="731520" y="2002536"/>
+            <a:off x="1051560" y="2057400"/>
             <a:ext cx="457200" cy="457200"/>
           </a:xfrm>
           <a:prstGeom prst="roundRect">
@@ -11679,7 +11679,7 @@
         </p:blipFill>
         <p:spPr>
           <a:xfrm>
-            <a:off x="822960" y="2093976"/>
+            <a:off x="1143000" y="2148840"/>
             <a:ext cx="274320" cy="274320"/>
           </a:xfrm>
           <a:prstGeom prst="rect">
@@ -11695,8 +11695,8 @@
         </p:nvSpPr>
         <p:spPr>
           <a:xfrm>
-            <a:off x="1325880" y="2084832"/>
-            <a:ext cx="2433218" cy="274320"/>
+            <a:off x="1645920" y="2148840"/>
+            <a:ext cx="2097938" cy="274320"/>
           </a:xfrm>
           <a:prstGeom prst="rect">
             <a:avLst/>
@@ -11734,8 +11734,8 @@
         </p:nvSpPr>
         <p:spPr>
           <a:xfrm>
-            <a:off x="731520" y="2560320"/>
-            <a:ext cx="3027578" cy="777240"/>
+            <a:off x="1051560" y="2651760"/>
+            <a:ext cx="2692298" cy="731520"/>
           </a:xfrm>
           <a:prstGeom prst="rect">
             <a:avLst/>
@@ -11773,8 +11773,8 @@
         </p:nvSpPr>
         <p:spPr>
           <a:xfrm>
-            <a:off x="731520" y="3429000"/>
-            <a:ext cx="3027578" cy="1005840"/>
+            <a:off x="1051560" y="3429000"/>
+            <a:ext cx="2692298" cy="640080"/>
           </a:xfrm>
           <a:prstGeom prst="rect">
             <a:avLst/>
@@ -11792,13 +11792,13 @@
             <a:r>
               <a:rPr lang="en-US" sz="1350" dirty="0">
                 <a:solidFill>
-                  <a:srgbClr val="222731"/>
-                </a:solidFill>
-                <a:latin typeface="Hanken Grotesk" pitchFamily="34" charset="0"/>
-                <a:ea typeface="Hanken Grotesk" pitchFamily="34" charset="-122"/>
-                <a:cs typeface="Hanken Grotesk" pitchFamily="34" charset="-120"/>
-              </a:rPr>
-              <a:t>Labore et dolore magna aliqua ut enim ad minim veniam quis nostrud exercitation ullamco laboris nisi.</a:t>
+                  <a:srgbClr val="63666A"/>
+                </a:solidFill>
+                <a:latin typeface="Hanken Grotesk" pitchFamily="34" charset="0"/>
+                <a:ea typeface="Hanken Grotesk" pitchFamily="34" charset="-122"/>
+                <a:cs typeface="Hanken Grotesk" pitchFamily="34" charset="-120"/>
+              </a:rPr>
+              <a:t>Labore et dolore magna aliqua ut enim ad minim veniam quis nostrud.</a:t>
             </a:r>
             <a:endParaRPr lang="en-US" sz="1350" dirty="0"/>
           </a:p>
@@ -11812,12 +11812,12 @@
         </p:nvSpPr>
         <p:spPr>
           <a:xfrm>
-            <a:off x="4307738" y="1783080"/>
-            <a:ext cx="3576218" cy="2788920"/>
+            <a:off x="4383938" y="1691640"/>
+            <a:ext cx="3423818" cy="2514600"/>
           </a:xfrm>
           <a:prstGeom prst="roundRect">
             <a:avLst>
-              <a:gd name="adj" fmla="val 3934"/>
+              <a:gd name="adj" fmla="val 4364"/>
             </a:avLst>
           </a:prstGeom>
           <a:solidFill>
@@ -11839,7 +11839,7 @@
         </p:nvSpPr>
         <p:spPr>
           <a:xfrm>
-            <a:off x="4582058" y="2002536"/>
+            <a:off x="4749698" y="2057400"/>
             <a:ext cx="457200" cy="457200"/>
           </a:xfrm>
           <a:prstGeom prst="roundRect">
@@ -11874,7 +11874,7 @@
         </p:blipFill>
         <p:spPr>
           <a:xfrm>
-            <a:off x="4673498" y="2093976"/>
+            <a:off x="4841138" y="2148840"/>
             <a:ext cx="274320" cy="274320"/>
           </a:xfrm>
           <a:prstGeom prst="rect">
@@ -11890,8 +11890,8 @@
         </p:nvSpPr>
         <p:spPr>
           <a:xfrm>
-            <a:off x="5176418" y="2084832"/>
-            <a:ext cx="2433218" cy="274320"/>
+            <a:off x="5344058" y="2148840"/>
+            <a:ext cx="2097938" cy="274320"/>
           </a:xfrm>
           <a:prstGeom prst="rect">
             <a:avLst/>
@@ -11929,8 +11929,8 @@
         </p:nvSpPr>
         <p:spPr>
           <a:xfrm>
-            <a:off x="4582058" y="2560320"/>
-            <a:ext cx="3027578" cy="777240"/>
+            <a:off x="4749698" y="2651760"/>
+            <a:ext cx="2692298" cy="731520"/>
           </a:xfrm>
           <a:prstGeom prst="rect">
             <a:avLst/>
@@ -11968,8 +11968,8 @@
         </p:nvSpPr>
         <p:spPr>
           <a:xfrm>
-            <a:off x="4582058" y="3429000"/>
-            <a:ext cx="3027578" cy="1005840"/>
+            <a:off x="4749698" y="3429000"/>
+            <a:ext cx="2692298" cy="640080"/>
           </a:xfrm>
           <a:prstGeom prst="rect">
             <a:avLst/>
@@ -11987,13 +11987,13 @@
             <a:r>
               <a:rPr lang="en-US" sz="1350" dirty="0">
                 <a:solidFill>
-                  <a:srgbClr val="222731"/>
-                </a:solidFill>
-                <a:latin typeface="Hanken Grotesk" pitchFamily="34" charset="0"/>
-                <a:ea typeface="Hanken Grotesk" pitchFamily="34" charset="-122"/>
-                <a:cs typeface="Hanken Grotesk" pitchFamily="34" charset="-120"/>
-              </a:rPr>
-              <a:t>Ad minim veniam quis nostrud exercitation ullamco laboris nisi ut aliquip ex ea commodo consequat duis.</a:t>
+                  <a:srgbClr val="63666A"/>
+                </a:solidFill>
+                <a:latin typeface="Hanken Grotesk" pitchFamily="34" charset="0"/>
+                <a:ea typeface="Hanken Grotesk" pitchFamily="34" charset="-122"/>
+                <a:cs typeface="Hanken Grotesk" pitchFamily="34" charset="-120"/>
+              </a:rPr>
+              <a:t>Ad minim veniam quis nostrud exercitation ullamco laboris nisi ut aliquip ex.</a:t>
             </a:r>
             <a:endParaRPr lang="en-US" sz="1350" dirty="0"/>
           </a:p>
@@ -12007,12 +12007,12 @@
         </p:nvSpPr>
         <p:spPr>
           <a:xfrm>
-            <a:off x="8158277" y="1783080"/>
-            <a:ext cx="3576218" cy="2788920"/>
+            <a:off x="8082077" y="1691640"/>
+            <a:ext cx="3423818" cy="2514600"/>
           </a:xfrm>
           <a:prstGeom prst="roundRect">
             <a:avLst>
-              <a:gd name="adj" fmla="val 3934"/>
+              <a:gd name="adj" fmla="val 4364"/>
             </a:avLst>
           </a:prstGeom>
           <a:solidFill>
@@ -12034,7 +12034,7 @@
         </p:nvSpPr>
         <p:spPr>
           <a:xfrm>
-            <a:off x="8432597" y="2002536"/>
+            <a:off x="8447837" y="2057400"/>
             <a:ext cx="457200" cy="457200"/>
           </a:xfrm>
           <a:prstGeom prst="roundRect">
@@ -12069,7 +12069,7 @@
         </p:blipFill>
         <p:spPr>
           <a:xfrm>
-            <a:off x="8524037" y="2093976"/>
+            <a:off x="8539277" y="2148840"/>
             <a:ext cx="274320" cy="274320"/>
           </a:xfrm>
           <a:prstGeom prst="rect">
@@ -12085,8 +12085,8 @@
         </p:nvSpPr>
         <p:spPr>
           <a:xfrm>
-            <a:off x="9026957" y="2084832"/>
-            <a:ext cx="2433218" cy="274320"/>
+            <a:off x="9042197" y="2148840"/>
+            <a:ext cx="2097938" cy="274320"/>
           </a:xfrm>
           <a:prstGeom prst="rect">
             <a:avLst/>
@@ -12124,8 +12124,8 @@
         </p:nvSpPr>
         <p:spPr>
           <a:xfrm>
-            <a:off x="8432597" y="2560320"/>
-            <a:ext cx="3027578" cy="777240"/>
+            <a:off x="8447837" y="2651760"/>
+            <a:ext cx="2692298" cy="731520"/>
           </a:xfrm>
           <a:prstGeom prst="rect">
             <a:avLst/>
@@ -12163,8 +12163,8 @@
         </p:nvSpPr>
         <p:spPr>
           <a:xfrm>
-            <a:off x="8432597" y="3429000"/>
-            <a:ext cx="3027578" cy="1005840"/>
+            <a:off x="8447837" y="3429000"/>
+            <a:ext cx="2692298" cy="640080"/>
           </a:xfrm>
           <a:prstGeom prst="rect">
             <a:avLst/>
@@ -12182,13 +12182,13 @@
             <a:r>
               <a:rPr lang="en-US" sz="1350" dirty="0">
                 <a:solidFill>
-                  <a:srgbClr val="222731"/>
-                </a:solidFill>
-                <a:latin typeface="Hanken Grotesk" pitchFamily="34" charset="0"/>
-                <a:ea typeface="Hanken Grotesk" pitchFamily="34" charset="-122"/>
-                <a:cs typeface="Hanken Grotesk" pitchFamily="34" charset="-120"/>
-              </a:rPr>
-              <a:t>Laboris nisi ut aliquip ex ea commodo consequat duis aute irure dolor in reprehenderit in voluptate.</a:t>
+                  <a:srgbClr val="63666A"/>
+                </a:solidFill>
+                <a:latin typeface="Hanken Grotesk" pitchFamily="34" charset="0"/>
+                <a:ea typeface="Hanken Grotesk" pitchFamily="34" charset="-122"/>
+                <a:cs typeface="Hanken Grotesk" pitchFamily="34" charset="-120"/>
+              </a:rPr>
+              <a:t>Laboris nisi ut aliquip ex ea commodo consequat duis aute irure dolor.</a:t>
             </a:r>
             <a:endParaRPr lang="en-US" sz="1350" dirty="0"/>
           </a:p>
@@ -12202,12 +12202,12 @@
         </p:nvSpPr>
         <p:spPr>
           <a:xfrm>
-            <a:off x="457200" y="4846320"/>
-            <a:ext cx="11277295" cy="1234440"/>
+            <a:off x="685800" y="4480560"/>
+            <a:ext cx="10820095" cy="1143000"/>
           </a:xfrm>
           <a:prstGeom prst="roundRect">
             <a:avLst>
-              <a:gd name="adj" fmla="val 7407"/>
+              <a:gd name="adj" fmla="val 9600"/>
             </a:avLst>
           </a:prstGeom>
           <a:solidFill>
@@ -12229,12 +12229,12 @@
         </p:nvSpPr>
         <p:spPr>
           <a:xfrm>
-            <a:off x="731520" y="5230368"/>
-            <a:ext cx="1188720" cy="457200"/>
+            <a:off x="1051560" y="4841748"/>
+            <a:ext cx="1188720" cy="420624"/>
           </a:xfrm>
           <a:prstGeom prst="roundRect">
             <a:avLst>
-              <a:gd name="adj" fmla="val 16000"/>
+              <a:gd name="adj" fmla="val 17391"/>
             </a:avLst>
           </a:prstGeom>
           <a:solidFill>
@@ -12256,8 +12256,8 @@
         </p:nvSpPr>
         <p:spPr>
           <a:xfrm>
-            <a:off x="731520" y="5230368"/>
-            <a:ext cx="1188720" cy="457200"/>
+            <a:off x="1051560" y="4841748"/>
+            <a:ext cx="1188720" cy="420624"/>
           </a:xfrm>
           <a:prstGeom prst="rect">
             <a:avLst/>
@@ -12295,8 +12295,8 @@
         </p:nvSpPr>
         <p:spPr>
           <a:xfrm>
-            <a:off x="2194560" y="4846320"/>
-            <a:ext cx="9052560" cy="1234440"/>
+            <a:off x="2514600" y="4480560"/>
+            <a:ext cx="8625535" cy="1143000"/>
           </a:xfrm>
           <a:prstGeom prst="rect">
             <a:avLst/>
@@ -12320,7 +12320,7 @@
                 <a:ea typeface="Hanken Grotesk" pitchFamily="34" charset="-122"/>
                 <a:cs typeface="Hanken Grotesk" pitchFamily="34" charset="-120"/>
               </a:rPr>
-              <a:t>Deserunt mollit anim id est laborum curabitur pretium tincidunt lacus nulla gravida orci a odio nullam varius turpis et commodo pharetra est.</a:t>
+              <a:t>Deserunt mollit anim id est laborum curabitur pretium tincidunt lacus nulla gravida orci a odio nullam.</a:t>
             </a:r>
             <a:endParaRPr lang="en-US" sz="1600" dirty="0"/>
           </a:p>
@@ -12366,8 +12366,8 @@
         </p:nvSpPr>
         <p:spPr>
           <a:xfrm>
-            <a:off x="457200" y="384048"/>
-            <a:ext cx="8961120" cy="274320"/>
+            <a:off x="685800" y="502920"/>
+            <a:ext cx="8595360" cy="274320"/>
           </a:xfrm>
           <a:prstGeom prst="rect">
             <a:avLst/>
@@ -12405,8 +12405,8 @@
         </p:nvSpPr>
         <p:spPr>
           <a:xfrm>
-            <a:off x="457200" y="676656"/>
-            <a:ext cx="11274552" cy="868680"/>
+            <a:off x="685800" y="804672"/>
+            <a:ext cx="10820095" cy="566928"/>
           </a:xfrm>
           <a:prstGeom prst="rect">
             <a:avLst/>
@@ -12425,7 +12425,7 @@
               <a:buNone/>
             </a:pPr>
             <a:r>
-              <a:rPr lang="en-US" sz="3000" b="1" dirty="0">
+              <a:rPr lang="en-US" sz="2800" b="1" dirty="0">
                 <a:solidFill>
                   <a:srgbClr val="222731"/>
                 </a:solidFill>
@@ -12433,9 +12433,9 @@
                 <a:ea typeface="Bricolage Grotesque" pitchFamily="34" charset="-122"/>
                 <a:cs typeface="Bricolage Grotesque" pitchFamily="34" charset="-120"/>
               </a:rPr>
-              <a:t>Laboris nisi ut aliquip ex ea commodo consequat duis aute</a:t>
-            </a:r>
-            <a:endParaRPr lang="en-US" sz="3000" dirty="0"/>
+              <a:t>Laboris nisi ut aliquip ex ea commodo</a:t>
+            </a:r>
+            <a:endParaRPr lang="en-US" sz="2800" dirty="0"/>
           </a:p>
         </p:txBody>
       </p:sp>
@@ -12447,7 +12447,7 @@
         </p:nvSpPr>
         <p:spPr>
           <a:xfrm>
-            <a:off x="457200" y="6400800"/>
+            <a:off x="685800" y="6400800"/>
             <a:ext cx="4389120" cy="256032"/>
           </a:xfrm>
           <a:prstGeom prst="rect">
@@ -12487,7 +12487,7 @@
         <p:spPr>
           <a:xfrm>
             <a:off x="4937760" y="6400800"/>
-            <a:ext cx="5943600" cy="256032"/>
+            <a:ext cx="5790895" cy="256032"/>
           </a:xfrm>
           <a:prstGeom prst="rect">
             <a:avLst/>
@@ -12525,7 +12525,7 @@
         </p:nvSpPr>
         <p:spPr>
           <a:xfrm>
-            <a:off x="11091672" y="6400800"/>
+            <a:off x="10865815" y="6400800"/>
             <a:ext cx="640080" cy="256032"/>
           </a:xfrm>
           <a:prstGeom prst="rect">
@@ -12564,12 +12564,12 @@
         </p:nvSpPr>
         <p:spPr>
           <a:xfrm>
-            <a:off x="457200" y="1783080"/>
-            <a:ext cx="3576218" cy="4343400"/>
+            <a:off x="685800" y="1691640"/>
+            <a:ext cx="3423818" cy="4069080"/>
           </a:xfrm>
           <a:prstGeom prst="roundRect">
             <a:avLst>
-              <a:gd name="adj" fmla="val 3068"/>
+              <a:gd name="adj" fmla="val 3205"/>
             </a:avLst>
           </a:prstGeom>
           <a:solidFill>
@@ -12591,8 +12591,8 @@
         </p:nvSpPr>
         <p:spPr>
           <a:xfrm>
-            <a:off x="731520" y="2057400"/>
-            <a:ext cx="640080" cy="640080"/>
+            <a:off x="1051560" y="2057400"/>
+            <a:ext cx="585216" cy="585216"/>
           </a:xfrm>
           <a:prstGeom prst="roundRect">
             <a:avLst>
@@ -12626,8 +12626,8 @@
         </p:blipFill>
         <p:spPr>
           <a:xfrm>
-            <a:off x="859536" y="2185416"/>
-            <a:ext cx="384048" cy="384048"/>
+            <a:off x="1168603" y="2174443"/>
+            <a:ext cx="351130" cy="351130"/>
           </a:xfrm>
           <a:prstGeom prst="rect">
             <a:avLst/>
@@ -12642,8 +12642,8 @@
         </p:nvSpPr>
         <p:spPr>
           <a:xfrm>
-            <a:off x="1508760" y="2075688"/>
-            <a:ext cx="2296058" cy="329184"/>
+            <a:off x="1801368" y="2075688"/>
+            <a:ext cx="1942490" cy="310896"/>
           </a:xfrm>
           <a:prstGeom prst="rect">
             <a:avLst/>
@@ -12681,8 +12681,8 @@
         </p:nvSpPr>
         <p:spPr>
           <a:xfrm>
-            <a:off x="1508760" y="2423160"/>
-            <a:ext cx="2296058" cy="274320"/>
+            <a:off x="1801368" y="2386584"/>
+            <a:ext cx="1942490" cy="256032"/>
           </a:xfrm>
           <a:prstGeom prst="rect">
             <a:avLst/>
@@ -12720,8 +12720,8 @@
         </p:nvSpPr>
         <p:spPr>
           <a:xfrm>
-            <a:off x="731520" y="2971800"/>
-            <a:ext cx="3027578" cy="274320"/>
+            <a:off x="1051560" y="2834640"/>
+            <a:ext cx="2692298" cy="274320"/>
           </a:xfrm>
           <a:prstGeom prst="rect">
             <a:avLst/>
@@ -12759,8 +12759,8 @@
         </p:nvSpPr>
         <p:spPr>
           <a:xfrm>
-            <a:off x="731520" y="3246120"/>
-            <a:ext cx="3027578" cy="914400"/>
+            <a:off x="1051560" y="3127248"/>
+            <a:ext cx="2692298" cy="594360"/>
           </a:xfrm>
           <a:prstGeom prst="rect">
             <a:avLst/>
@@ -12788,7 +12788,7 @@
                 <a:ea typeface="Hanken Grotesk" pitchFamily="34" charset="-122"/>
                 <a:cs typeface="Hanken Grotesk" pitchFamily="34" charset="-120"/>
               </a:rPr>
-              <a:t>Labore et dolore magna aliqua ut enim ad.</a:t>
+              <a:t>Labore et dolore magna.</a:t>
             </a:r>
             <a:endParaRPr lang="en-US" sz="1150" dirty="0"/>
           </a:p>
@@ -12809,7 +12809,7 @@
                 <a:ea typeface="Hanken Grotesk" pitchFamily="34" charset="-122"/>
                 <a:cs typeface="Hanken Grotesk" pitchFamily="34" charset="-120"/>
               </a:rPr>
-              <a:t>Deserunt mollit anim id est laborum curabitur.</a:t>
+              <a:t>Deserunt mollit anim id.</a:t>
             </a:r>
             <a:endParaRPr lang="en-US" sz="1150" dirty="0"/>
           </a:p>
@@ -12823,8 +12823,8 @@
         </p:nvSpPr>
         <p:spPr>
           <a:xfrm>
-            <a:off x="731520" y="4114800"/>
-            <a:ext cx="3027578" cy="274320"/>
+            <a:off x="1051560" y="3840480"/>
+            <a:ext cx="2692298" cy="274320"/>
           </a:xfrm>
           <a:prstGeom prst="rect">
             <a:avLst/>
@@ -12862,8 +12862,8 @@
         </p:nvSpPr>
         <p:spPr>
           <a:xfrm>
-            <a:off x="731520" y="4389120"/>
-            <a:ext cx="3027578" cy="914400"/>
+            <a:off x="1051560" y="4133088"/>
+            <a:ext cx="2692298" cy="594360"/>
           </a:xfrm>
           <a:prstGeom prst="rect">
             <a:avLst/>
@@ -12891,7 +12891,7 @@
                 <a:ea typeface="Hanken Grotesk" pitchFamily="34" charset="-122"/>
                 <a:cs typeface="Hanken Grotesk" pitchFamily="34" charset="-120"/>
               </a:rPr>
-              <a:t>Consequat duis aute irure dolor in reprehenderit in.</a:t>
+              <a:t>Consequat duis aute irure.</a:t>
             </a:r>
             <a:endParaRPr lang="en-US" sz="1150" dirty="0"/>
           </a:p>
@@ -12912,7 +12912,7 @@
                 <a:ea typeface="Hanken Grotesk" pitchFamily="34" charset="-122"/>
                 <a:cs typeface="Hanken Grotesk" pitchFamily="34" charset="-120"/>
               </a:rPr>
-              <a:t>Est eros bibendum elit nec luctus magna.</a:t>
+              <a:t>Est eros bibendum elit.</a:t>
             </a:r>
             <a:endParaRPr lang="en-US" sz="1150" dirty="0"/>
           </a:p>
@@ -12926,8 +12926,8 @@
         </p:nvSpPr>
         <p:spPr>
           <a:xfrm>
-            <a:off x="731520" y="5486400"/>
-            <a:ext cx="3027578" cy="411480"/>
+            <a:off x="1051560" y="4983480"/>
+            <a:ext cx="2692298" cy="411480"/>
           </a:xfrm>
           <a:prstGeom prst="roundRect">
             <a:avLst>
@@ -12953,8 +12953,8 @@
         </p:nvSpPr>
         <p:spPr>
           <a:xfrm>
-            <a:off x="868680" y="5486400"/>
-            <a:ext cx="2753258" cy="411480"/>
+            <a:off x="1188720" y="4983480"/>
+            <a:ext cx="2417978" cy="411480"/>
           </a:xfrm>
           <a:prstGeom prst="rect">
             <a:avLst/>
@@ -12992,12 +12992,12 @@
         </p:nvSpPr>
         <p:spPr>
           <a:xfrm>
-            <a:off x="4307738" y="1783080"/>
-            <a:ext cx="3576218" cy="4343400"/>
+            <a:off x="4383938" y="1691640"/>
+            <a:ext cx="3423818" cy="4069080"/>
           </a:xfrm>
           <a:prstGeom prst="roundRect">
             <a:avLst>
-              <a:gd name="adj" fmla="val 3068"/>
+              <a:gd name="adj" fmla="val 3205"/>
             </a:avLst>
           </a:prstGeom>
           <a:solidFill>
@@ -13019,8 +13019,8 @@
         </p:nvSpPr>
         <p:spPr>
           <a:xfrm>
-            <a:off x="4582058" y="2057400"/>
-            <a:ext cx="640080" cy="640080"/>
+            <a:off x="4749698" y="2057400"/>
+            <a:ext cx="585216" cy="585216"/>
           </a:xfrm>
           <a:prstGeom prst="roundRect">
             <a:avLst>
@@ -13054,8 +13054,8 @@
         </p:blipFill>
         <p:spPr>
           <a:xfrm>
-            <a:off x="4710074" y="2185416"/>
-            <a:ext cx="384048" cy="384048"/>
+            <a:off x="4866742" y="2174443"/>
+            <a:ext cx="351130" cy="351130"/>
           </a:xfrm>
           <a:prstGeom prst="rect">
             <a:avLst/>
@@ -13070,8 +13070,8 @@
         </p:nvSpPr>
         <p:spPr>
           <a:xfrm>
-            <a:off x="5359298" y="2075688"/>
-            <a:ext cx="2296058" cy="329184"/>
+            <a:off x="5499506" y="2075688"/>
+            <a:ext cx="1942490" cy="310896"/>
           </a:xfrm>
           <a:prstGeom prst="rect">
             <a:avLst/>
@@ -13109,8 +13109,8 @@
         </p:nvSpPr>
         <p:spPr>
           <a:xfrm>
-            <a:off x="5359298" y="2423160"/>
-            <a:ext cx="2296058" cy="274320"/>
+            <a:off x="5499506" y="2386584"/>
+            <a:ext cx="1942490" cy="256032"/>
           </a:xfrm>
           <a:prstGeom prst="rect">
             <a:avLst/>
@@ -13148,8 +13148,8 @@
         </p:nvSpPr>
         <p:spPr>
           <a:xfrm>
-            <a:off x="4582058" y="2971800"/>
-            <a:ext cx="3027578" cy="274320"/>
+            <a:off x="4749698" y="2834640"/>
+            <a:ext cx="2692298" cy="274320"/>
           </a:xfrm>
           <a:prstGeom prst="rect">
             <a:avLst/>
@@ -13187,8 +13187,8 @@
         </p:nvSpPr>
         <p:spPr>
           <a:xfrm>
-            <a:off x="4582058" y="3246120"/>
-            <a:ext cx="3027578" cy="914400"/>
+            <a:off x="4749698" y="3127248"/>
+            <a:ext cx="2692298" cy="594360"/>
           </a:xfrm>
           <a:prstGeom prst="rect">
             <a:avLst/>
@@ -13216,7 +13216,7 @@
                 <a:ea typeface="Hanken Grotesk" pitchFamily="34" charset="-122"/>
                 <a:cs typeface="Hanken Grotesk" pitchFamily="34" charset="-120"/>
               </a:rPr>
-              <a:t>Fugiat nulla pariatur excepteur sint occaecat cupidatat non.</a:t>
+              <a:t>Fugiat nulla pariatur excepteur.</a:t>
             </a:r>
             <a:endParaRPr lang="en-US" sz="1150" dirty="0"/>
           </a:p>
@@ -13237,7 +13237,7 @@
                 <a:ea typeface="Hanken Grotesk" pitchFamily="34" charset="-122"/>
                 <a:cs typeface="Hanken Grotesk" pitchFamily="34" charset="-120"/>
               </a:rPr>
-              <a:t>Nibh euismod gravida lorem ipsum dolor sit.</a:t>
+              <a:t>Nibh euismod gravida lorem.</a:t>
             </a:r>
             <a:endParaRPr lang="en-US" sz="1150" dirty="0"/>
           </a:p>
@@ -13251,8 +13251,8 @@
         </p:nvSpPr>
         <p:spPr>
           <a:xfrm>
-            <a:off x="4582058" y="4114800"/>
-            <a:ext cx="3027578" cy="274320"/>
+            <a:off x="4749698" y="3840480"/>
+            <a:ext cx="2692298" cy="274320"/>
           </a:xfrm>
           <a:prstGeom prst="rect">
             <a:avLst/>
@@ -13290,8 +13290,8 @@
         </p:nvSpPr>
         <p:spPr>
           <a:xfrm>
-            <a:off x="4582058" y="4389120"/>
-            <a:ext cx="3027578" cy="914400"/>
+            <a:off x="4749698" y="4133088"/>
+            <a:ext cx="2692298" cy="594360"/>
           </a:xfrm>
           <a:prstGeom prst="rect">
             <a:avLst/>
@@ -13319,7 +13319,7 @@
                 <a:ea typeface="Hanken Grotesk" pitchFamily="34" charset="-122"/>
                 <a:cs typeface="Hanken Grotesk" pitchFamily="34" charset="-120"/>
               </a:rPr>
-              <a:t>Pretium tincidunt lacus nulla gravida orci a odio.</a:t>
+              <a:t>Pretium tincidunt lacus nulla.</a:t>
             </a:r>
             <a:endParaRPr lang="en-US" sz="1150" dirty="0"/>
           </a:p>
@@ -13340,7 +13340,7 @@
                 <a:ea typeface="Hanken Grotesk" pitchFamily="34" charset="-122"/>
                 <a:cs typeface="Hanken Grotesk" pitchFamily="34" charset="-120"/>
               </a:rPr>
-              <a:t>Aliqua ut enim ad minim veniam quis.</a:t>
+              <a:t>Aliqua ut enim ad.</a:t>
             </a:r>
             <a:endParaRPr lang="en-US" sz="1150" dirty="0"/>
           </a:p>
@@ -13354,8 +13354,8 @@
         </p:nvSpPr>
         <p:spPr>
           <a:xfrm>
-            <a:off x="4582058" y="5486400"/>
-            <a:ext cx="3027578" cy="411480"/>
+            <a:off x="4749698" y="4983480"/>
+            <a:ext cx="2692298" cy="411480"/>
           </a:xfrm>
           <a:prstGeom prst="roundRect">
             <a:avLst>
@@ -13381,8 +13381,8 @@
         </p:nvSpPr>
         <p:spPr>
           <a:xfrm>
-            <a:off x="4719218" y="5486400"/>
-            <a:ext cx="2753258" cy="411480"/>
+            <a:off x="4886858" y="4983480"/>
+            <a:ext cx="2417978" cy="411480"/>
           </a:xfrm>
           <a:prstGeom prst="rect">
             <a:avLst/>
@@ -13420,12 +13420,12 @@
         </p:nvSpPr>
         <p:spPr>
           <a:xfrm>
-            <a:off x="8158277" y="1783080"/>
-            <a:ext cx="3576218" cy="4343400"/>
+            <a:off x="8082077" y="1691640"/>
+            <a:ext cx="3423818" cy="4069080"/>
           </a:xfrm>
           <a:prstGeom prst="roundRect">
             <a:avLst>
-              <a:gd name="adj" fmla="val 3068"/>
+              <a:gd name="adj" fmla="val 3205"/>
             </a:avLst>
           </a:prstGeom>
           <a:solidFill>
@@ -13447,8 +13447,8 @@
         </p:nvSpPr>
         <p:spPr>
           <a:xfrm>
-            <a:off x="8432597" y="2057400"/>
-            <a:ext cx="640080" cy="640080"/>
+            <a:off x="8447837" y="2057400"/>
+            <a:ext cx="585216" cy="585216"/>
           </a:xfrm>
           <a:prstGeom prst="roundRect">
             <a:avLst>
@@ -13482,8 +13482,8 @@
         </p:blipFill>
         <p:spPr>
           <a:xfrm>
-            <a:off x="8560613" y="2185416"/>
-            <a:ext cx="384048" cy="384048"/>
+            <a:off x="8564880" y="2174443"/>
+            <a:ext cx="351130" cy="351130"/>
           </a:xfrm>
           <a:prstGeom prst="rect">
             <a:avLst/>
@@ -13498,8 +13498,8 @@
         </p:nvSpPr>
         <p:spPr>
           <a:xfrm>
-            <a:off x="9209837" y="2075688"/>
-            <a:ext cx="2296058" cy="329184"/>
+            <a:off x="9197645" y="2075688"/>
+            <a:ext cx="1942490" cy="310896"/>
           </a:xfrm>
           <a:prstGeom prst="rect">
             <a:avLst/>
@@ -13537,8 +13537,8 @@
         </p:nvSpPr>
         <p:spPr>
           <a:xfrm>
-            <a:off x="9209837" y="2423160"/>
-            <a:ext cx="2296058" cy="274320"/>
+            <a:off x="9197645" y="2386584"/>
+            <a:ext cx="1942490" cy="256032"/>
           </a:xfrm>
           <a:prstGeom prst="rect">
             <a:avLst/>
@@ -13576,8 +13576,8 @@
         </p:nvSpPr>
         <p:spPr>
           <a:xfrm>
-            <a:off x="8432597" y="2971800"/>
-            <a:ext cx="3027578" cy="274320"/>
+            <a:off x="8447837" y="2834640"/>
+            <a:ext cx="2692298" cy="274320"/>
           </a:xfrm>
           <a:prstGeom prst="rect">
             <a:avLst/>
@@ -13615,8 +13615,8 @@
         </p:nvSpPr>
         <p:spPr>
           <a:xfrm>
-            <a:off x="8432597" y="3246120"/>
-            <a:ext cx="3027578" cy="914400"/>
+            <a:off x="8447837" y="3127248"/>
+            <a:ext cx="2692298" cy="594360"/>
           </a:xfrm>
           <a:prstGeom prst="rect">
             <a:avLst/>
@@ -13644,7 +13644,7 @@
                 <a:ea typeface="Hanken Grotesk" pitchFamily="34" charset="-122"/>
                 <a:cs typeface="Hanken Grotesk" pitchFamily="34" charset="-120"/>
               </a:rPr>
-              <a:t>Est eros bibendum elit nec luctus magna felis.</a:t>
+              <a:t>Est eros bibendum elit.</a:t>
             </a:r>
             <a:endParaRPr lang="en-US" sz="1150" dirty="0"/>
           </a:p>
@@ -13665,7 +13665,7 @@
                 <a:ea typeface="Hanken Grotesk" pitchFamily="34" charset="-122"/>
                 <a:cs typeface="Hanken Grotesk" pitchFamily="34" charset="-120"/>
               </a:rPr>
-              <a:t>Ex ea commodo consequat duis aute irure.</a:t>
+              <a:t>Ex ea commodo consequat.</a:t>
             </a:r>
             <a:endParaRPr lang="en-US" sz="1150" dirty="0"/>
           </a:p>
@@ -13679,8 +13679,8 @@
         </p:nvSpPr>
         <p:spPr>
           <a:xfrm>
-            <a:off x="8432597" y="4114800"/>
-            <a:ext cx="3027578" cy="274320"/>
+            <a:off x="8447837" y="3840480"/>
+            <a:ext cx="2692298" cy="274320"/>
           </a:xfrm>
           <a:prstGeom prst="rect">
             <a:avLst/>
@@ -13718,8 +13718,8 @@
         </p:nvSpPr>
         <p:spPr>
           <a:xfrm>
-            <a:off x="8432597" y="4389120"/>
-            <a:ext cx="3027578" cy="914400"/>
+            <a:off x="8447837" y="4133088"/>
+            <a:ext cx="2692298" cy="594360"/>
           </a:xfrm>
           <a:prstGeom prst="rect">
             <a:avLst/>
@@ -13747,7 +13747,7 @@
                 <a:ea typeface="Hanken Grotesk" pitchFamily="34" charset="-122"/>
                 <a:cs typeface="Hanken Grotesk" pitchFamily="34" charset="-120"/>
               </a:rPr>
-              <a:t>Amet consectetur adipiscing elit sed do eiusmod tempor.</a:t>
+              <a:t>Amet consectetur adipiscing elit.</a:t>
             </a:r>
             <a:endParaRPr lang="en-US" sz="1150" dirty="0"/>
           </a:p>
@@ -13768,7 +13768,7 @@
                 <a:ea typeface="Hanken Grotesk" pitchFamily="34" charset="-122"/>
                 <a:cs typeface="Hanken Grotesk" pitchFamily="34" charset="-120"/>
               </a:rPr>
-              <a:t>Sint occaecat cupidatat non proident sunt in.</a:t>
+              <a:t>Sint occaecat cupidatat non.</a:t>
             </a:r>
             <a:endParaRPr lang="en-US" sz="1150" dirty="0"/>
           </a:p>
@@ -13782,8 +13782,8 @@
         </p:nvSpPr>
         <p:spPr>
           <a:xfrm>
-            <a:off x="8432597" y="5486400"/>
-            <a:ext cx="3027578" cy="411480"/>
+            <a:off x="8447837" y="4983480"/>
+            <a:ext cx="2692298" cy="411480"/>
           </a:xfrm>
           <a:prstGeom prst="roundRect">
             <a:avLst>
@@ -13809,8 +13809,8 @@
         </p:nvSpPr>
         <p:spPr>
           <a:xfrm>
-            <a:off x="8569757" y="5486400"/>
-            <a:ext cx="2753258" cy="411480"/>
+            <a:off x="8584997" y="4983480"/>
+            <a:ext cx="2417978" cy="411480"/>
           </a:xfrm>
           <a:prstGeom prst="rect">
             <a:avLst/>
@@ -13880,8 +13880,8 @@
         </p:nvSpPr>
         <p:spPr>
           <a:xfrm>
-            <a:off x="457200" y="384048"/>
-            <a:ext cx="8961120" cy="274320"/>
+            <a:off x="685800" y="502920"/>
+            <a:ext cx="8595360" cy="274320"/>
           </a:xfrm>
           <a:prstGeom prst="rect">
             <a:avLst/>
@@ -13919,8 +13919,8 @@
         </p:nvSpPr>
         <p:spPr>
           <a:xfrm>
-            <a:off x="457200" y="676656"/>
-            <a:ext cx="11274552" cy="868680"/>
+            <a:off x="685800" y="804672"/>
+            <a:ext cx="10820095" cy="566928"/>
           </a:xfrm>
           <a:prstGeom prst="rect">
             <a:avLst/>
@@ -13939,7 +13939,7 @@
               <a:buNone/>
             </a:pPr>
             <a:r>
-              <a:rPr lang="en-US" sz="3000" b="1" dirty="0">
+              <a:rPr lang="en-US" sz="2800" b="1" dirty="0">
                 <a:solidFill>
                   <a:srgbClr val="222731"/>
                 </a:solidFill>
@@ -13947,9 +13947,9 @@
                 <a:ea typeface="Bricolage Grotesque" pitchFamily="34" charset="-122"/>
                 <a:cs typeface="Bricolage Grotesque" pitchFamily="34" charset="-120"/>
               </a:rPr>
-              <a:t>Fugiat nulla pariatur excepteur sint occaecat cupidatat non proident sunt in</a:t>
-            </a:r>
-            <a:endParaRPr lang="en-US" sz="3000" dirty="0"/>
+              <a:t>Fugiat nulla pariatur excepteur sint occaecat</a:t>
+            </a:r>
+            <a:endParaRPr lang="en-US" sz="2800" dirty="0"/>
           </a:p>
         </p:txBody>
       </p:sp>
@@ -13961,7 +13961,7 @@
         </p:nvSpPr>
         <p:spPr>
           <a:xfrm>
-            <a:off x="457200" y="6400800"/>
+            <a:off x="685800" y="6400800"/>
             <a:ext cx="4389120" cy="256032"/>
           </a:xfrm>
           <a:prstGeom prst="rect">
@@ -14001,7 +14001,7 @@
         <p:spPr>
           <a:xfrm>
             <a:off x="4937760" y="6400800"/>
-            <a:ext cx="5943600" cy="256032"/>
+            <a:ext cx="5790895" cy="256032"/>
           </a:xfrm>
           <a:prstGeom prst="rect">
             <a:avLst/>
@@ -14039,7 +14039,7 @@
         </p:nvSpPr>
         <p:spPr>
           <a:xfrm>
-            <a:off x="11091672" y="6400800"/>
+            <a:off x="10865815" y="6400800"/>
             <a:ext cx="640080" cy="256032"/>
           </a:xfrm>
           <a:prstGeom prst="rect">
@@ -14078,8 +14078,8 @@
         </p:nvSpPr>
         <p:spPr>
           <a:xfrm>
-            <a:off x="1965960" y="1783080"/>
-            <a:ext cx="1865925" cy="640080"/>
+            <a:off x="2148840" y="1691640"/>
+            <a:ext cx="1725107" cy="640080"/>
           </a:xfrm>
           <a:prstGeom prst="roundRect">
             <a:avLst>
@@ -14105,8 +14105,8 @@
         </p:nvSpPr>
         <p:spPr>
           <a:xfrm>
-            <a:off x="2093976" y="1783080"/>
-            <a:ext cx="1683045" cy="640080"/>
+            <a:off x="2295144" y="1691640"/>
+            <a:ext cx="1505651" cy="640080"/>
           </a:xfrm>
           <a:prstGeom prst="rect">
             <a:avLst/>
@@ -14161,8 +14161,8 @@
         </p:nvSpPr>
         <p:spPr>
           <a:xfrm>
-            <a:off x="3941613" y="1783080"/>
-            <a:ext cx="1865925" cy="640080"/>
+            <a:off x="4056827" y="1691640"/>
+            <a:ext cx="1725107" cy="640080"/>
           </a:xfrm>
           <a:prstGeom prst="roundRect">
             <a:avLst>
@@ -14188,8 +14188,8 @@
         </p:nvSpPr>
         <p:spPr>
           <a:xfrm>
-            <a:off x="4069629" y="1783080"/>
-            <a:ext cx="1683045" cy="640080"/>
+            <a:off x="4203131" y="1691640"/>
+            <a:ext cx="1505651" cy="640080"/>
           </a:xfrm>
           <a:prstGeom prst="rect">
             <a:avLst/>
@@ -14244,8 +14244,8 @@
         </p:nvSpPr>
         <p:spPr>
           <a:xfrm>
-            <a:off x="5917265" y="1783080"/>
-            <a:ext cx="1865925" cy="640080"/>
+            <a:off x="5964814" y="1691640"/>
+            <a:ext cx="1725107" cy="640080"/>
           </a:xfrm>
           <a:prstGeom prst="roundRect">
             <a:avLst>
@@ -14271,8 +14271,8 @@
         </p:nvSpPr>
         <p:spPr>
           <a:xfrm>
-            <a:off x="6045281" y="1783080"/>
-            <a:ext cx="1683045" cy="640080"/>
+            <a:off x="6111118" y="1691640"/>
+            <a:ext cx="1505651" cy="640080"/>
           </a:xfrm>
           <a:prstGeom prst="rect">
             <a:avLst/>
@@ -14327,8 +14327,8 @@
         </p:nvSpPr>
         <p:spPr>
           <a:xfrm>
-            <a:off x="7892918" y="1783080"/>
-            <a:ext cx="1865925" cy="640080"/>
+            <a:off x="7872801" y="1691640"/>
+            <a:ext cx="1725107" cy="640080"/>
           </a:xfrm>
           <a:prstGeom prst="roundRect">
             <a:avLst>
@@ -14354,8 +14354,8 @@
         </p:nvSpPr>
         <p:spPr>
           <a:xfrm>
-            <a:off x="8020934" y="1783080"/>
-            <a:ext cx="1683045" cy="640080"/>
+            <a:off x="8019105" y="1691640"/>
+            <a:ext cx="1505651" cy="640080"/>
           </a:xfrm>
           <a:prstGeom prst="rect">
             <a:avLst/>
@@ -14410,8 +14410,8 @@
         </p:nvSpPr>
         <p:spPr>
           <a:xfrm>
-            <a:off x="9868571" y="1783080"/>
-            <a:ext cx="1865925" cy="640080"/>
+            <a:off x="9780788" y="1691640"/>
+            <a:ext cx="1725107" cy="640080"/>
           </a:xfrm>
           <a:prstGeom prst="roundRect">
             <a:avLst>
@@ -14437,8 +14437,8 @@
         </p:nvSpPr>
         <p:spPr>
           <a:xfrm>
-            <a:off x="9996587" y="1783080"/>
-            <a:ext cx="1683045" cy="640080"/>
+            <a:off x="9927092" y="1691640"/>
+            <a:ext cx="1505651" cy="640080"/>
           </a:xfrm>
           <a:prstGeom prst="rect">
             <a:avLst/>
@@ -14493,8 +14493,8 @@
         </p:nvSpPr>
         <p:spPr>
           <a:xfrm>
-            <a:off x="457200" y="2560320"/>
-            <a:ext cx="1371600" cy="1188720"/>
+            <a:off x="685800" y="2514600"/>
+            <a:ext cx="1280160" cy="1097280"/>
           </a:xfrm>
           <a:prstGeom prst="rect">
             <a:avLst/>
@@ -14532,12 +14532,12 @@
         </p:nvSpPr>
         <p:spPr>
           <a:xfrm>
-            <a:off x="1965960" y="2560320"/>
-            <a:ext cx="1865925" cy="1188720"/>
+            <a:off x="2148840" y="2514600"/>
+            <a:ext cx="1725107" cy="1097280"/>
           </a:xfrm>
           <a:prstGeom prst="roundRect">
             <a:avLst>
-              <a:gd name="adj" fmla="val 6154"/>
+              <a:gd name="adj" fmla="val 6667"/>
             </a:avLst>
           </a:prstGeom>
           <a:solidFill>
@@ -14559,8 +14559,8 @@
         </p:nvSpPr>
         <p:spPr>
           <a:xfrm>
-            <a:off x="2093976" y="2670048"/>
-            <a:ext cx="1609893" cy="1005840"/>
+            <a:off x="2295144" y="2642616"/>
+            <a:ext cx="1432499" cy="896112"/>
           </a:xfrm>
           <a:prstGeom prst="rect">
             <a:avLst/>
@@ -14584,7 +14584,7 @@
                 <a:ea typeface="Hanken Grotesk" pitchFamily="34" charset="-122"/>
                 <a:cs typeface="Hanken Grotesk" pitchFamily="34" charset="-120"/>
               </a:rPr>
-              <a:t>Labore et dolore magna aliqua ut enim ad minim.</a:t>
+              <a:t>Labore et dolore magna aliqua ut enim ad.</a:t>
             </a:r>
             <a:endParaRPr lang="en-US" sz="1150" dirty="0"/>
           </a:p>
@@ -14598,12 +14598,12 @@
         </p:nvSpPr>
         <p:spPr>
           <a:xfrm>
-            <a:off x="3941613" y="2560320"/>
-            <a:ext cx="1865925" cy="1188720"/>
+            <a:off x="4056827" y="2514600"/>
+            <a:ext cx="1725107" cy="1097280"/>
           </a:xfrm>
           <a:prstGeom prst="roundRect">
             <a:avLst>
-              <a:gd name="adj" fmla="val 6154"/>
+              <a:gd name="adj" fmla="val 6667"/>
             </a:avLst>
           </a:prstGeom>
           <a:solidFill>
@@ -14625,8 +14625,8 @@
         </p:nvSpPr>
         <p:spPr>
           <a:xfrm>
-            <a:off x="4069629" y="2670048"/>
-            <a:ext cx="1609893" cy="1005840"/>
+            <a:off x="4203131" y="2642616"/>
+            <a:ext cx="1432499" cy="896112"/>
           </a:xfrm>
           <a:prstGeom prst="rect">
             <a:avLst/>
@@ -14650,7 +14650,7 @@
                 <a:ea typeface="Hanken Grotesk" pitchFamily="34" charset="-122"/>
                 <a:cs typeface="Hanken Grotesk" pitchFamily="34" charset="-120"/>
               </a:rPr>
-              <a:t>Ad minim veniam quis nostrud exercitation ullamco laboris nisi.</a:t>
+              <a:t>Ad minim veniam quis nostrud exercitation ullamco laboris.</a:t>
             </a:r>
             <a:endParaRPr lang="en-US" sz="1150" dirty="0"/>
           </a:p>
@@ -14664,12 +14664,12 @@
         </p:nvSpPr>
         <p:spPr>
           <a:xfrm>
-            <a:off x="5917265" y="2560320"/>
-            <a:ext cx="1865925" cy="1188720"/>
+            <a:off x="5964814" y="2514600"/>
+            <a:ext cx="1725107" cy="1097280"/>
           </a:xfrm>
           <a:prstGeom prst="roundRect">
             <a:avLst>
-              <a:gd name="adj" fmla="val 6154"/>
+              <a:gd name="adj" fmla="val 6667"/>
             </a:avLst>
           </a:prstGeom>
           <a:solidFill>
@@ -14691,8 +14691,8 @@
         </p:nvSpPr>
         <p:spPr>
           <a:xfrm>
-            <a:off x="6045281" y="2670048"/>
-            <a:ext cx="1609893" cy="1005840"/>
+            <a:off x="6111118" y="2642616"/>
+            <a:ext cx="1432499" cy="896112"/>
           </a:xfrm>
           <a:prstGeom prst="rect">
             <a:avLst/>
@@ -14716,7 +14716,7 @@
                 <a:ea typeface="Hanken Grotesk" pitchFamily="34" charset="-122"/>
                 <a:cs typeface="Hanken Grotesk" pitchFamily="34" charset="-120"/>
               </a:rPr>
-              <a:t>Laboris nisi ut aliquip ex ea commodo consequat duis.</a:t>
+              <a:t>Laboris nisi ut aliquip ex ea commodo consequat.</a:t>
             </a:r>
             <a:endParaRPr lang="en-US" sz="1150" dirty="0"/>
           </a:p>
@@ -14730,12 +14730,12 @@
         </p:nvSpPr>
         <p:spPr>
           <a:xfrm>
-            <a:off x="7892918" y="2560320"/>
-            <a:ext cx="1865925" cy="1188720"/>
+            <a:off x="7872801" y="2514600"/>
+            <a:ext cx="1725107" cy="1097280"/>
           </a:xfrm>
           <a:prstGeom prst="roundRect">
             <a:avLst>
-              <a:gd name="adj" fmla="val 6154"/>
+              <a:gd name="adj" fmla="val 6667"/>
             </a:avLst>
           </a:prstGeom>
           <a:solidFill>
@@ -14757,8 +14757,8 @@
         </p:nvSpPr>
         <p:spPr>
           <a:xfrm>
-            <a:off x="8020934" y="2670048"/>
-            <a:ext cx="1609893" cy="1005840"/>
+            <a:off x="8019105" y="2642616"/>
+            <a:ext cx="1432499" cy="896112"/>
           </a:xfrm>
           <a:prstGeom prst="rect">
             <a:avLst/>
@@ -14782,7 +14782,7 @@
                 <a:ea typeface="Hanken Grotesk" pitchFamily="34" charset="-122"/>
                 <a:cs typeface="Hanken Grotesk" pitchFamily="34" charset="-120"/>
               </a:rPr>
-              <a:t>Consequat duis aute irure dolor in reprehenderit in voluptate.</a:t>
+              <a:t>Consequat duis aute irure dolor in reprehenderit in.</a:t>
             </a:r>
             <a:endParaRPr lang="en-US" sz="1150" dirty="0"/>
           </a:p>
@@ -14796,12 +14796,12 @@
         </p:nvSpPr>
         <p:spPr>
           <a:xfrm>
-            <a:off x="9868571" y="2560320"/>
-            <a:ext cx="1865925" cy="1188720"/>
+            <a:off x="9780788" y="2514600"/>
+            <a:ext cx="1725107" cy="1097280"/>
           </a:xfrm>
           <a:prstGeom prst="roundRect">
             <a:avLst>
-              <a:gd name="adj" fmla="val 6154"/>
+              <a:gd name="adj" fmla="val 6667"/>
             </a:avLst>
           </a:prstGeom>
           <a:solidFill>
@@ -14823,8 +14823,8 @@
         </p:nvSpPr>
         <p:spPr>
           <a:xfrm>
-            <a:off x="9996587" y="2670048"/>
-            <a:ext cx="1609893" cy="1005840"/>
+            <a:off x="9927092" y="2642616"/>
+            <a:ext cx="1432499" cy="896112"/>
           </a:xfrm>
           <a:prstGeom prst="rect">
             <a:avLst/>
@@ -14848,7 +14848,7 @@
                 <a:ea typeface="Hanken Grotesk" pitchFamily="34" charset="-122"/>
                 <a:cs typeface="Hanken Grotesk" pitchFamily="34" charset="-120"/>
               </a:rPr>
-              <a:t>In voluptate velit esse cillum dolore eu fugiat nulla.</a:t>
+              <a:t>In voluptate velit esse cillum dolore eu fugiat.</a:t>
             </a:r>
             <a:endParaRPr lang="en-US" sz="1150" dirty="0"/>
           </a:p>
@@ -14862,8 +14862,8 @@
         </p:nvSpPr>
         <p:spPr>
           <a:xfrm>
-            <a:off x="457200" y="3840480"/>
-            <a:ext cx="1371600" cy="914400"/>
+            <a:off x="685800" y="3794760"/>
+            <a:ext cx="1280160" cy="777240"/>
           </a:xfrm>
           <a:prstGeom prst="rect">
             <a:avLst/>
@@ -14901,12 +14901,12 @@
         </p:nvSpPr>
         <p:spPr>
           <a:xfrm>
-            <a:off x="1965960" y="3840480"/>
-            <a:ext cx="1865925" cy="914400"/>
+            <a:off x="2148840" y="3794760"/>
+            <a:ext cx="1725107" cy="777240"/>
           </a:xfrm>
           <a:prstGeom prst="roundRect">
             <a:avLst>
-              <a:gd name="adj" fmla="val 8000"/>
+              <a:gd name="adj" fmla="val 9412"/>
             </a:avLst>
           </a:prstGeom>
           <a:solidFill>
@@ -14928,8 +14928,8 @@
         </p:nvSpPr>
         <p:spPr>
           <a:xfrm>
-            <a:off x="2093976" y="4114800"/>
-            <a:ext cx="603504" cy="274320"/>
+            <a:off x="2295144" y="4041648"/>
+            <a:ext cx="457200" cy="274320"/>
           </a:xfrm>
           <a:prstGeom prst="roundRect">
             <a:avLst>
@@ -14955,8 +14955,8 @@
         </p:nvSpPr>
         <p:spPr>
           <a:xfrm>
-            <a:off x="2093976" y="4114800"/>
-            <a:ext cx="603504" cy="274320"/>
+            <a:off x="2295144" y="4041648"/>
+            <a:ext cx="457200" cy="274320"/>
           </a:xfrm>
           <a:prstGeom prst="rect">
             <a:avLst/>
@@ -14994,12 +14994,12 @@
         </p:nvSpPr>
         <p:spPr>
           <a:xfrm>
-            <a:off x="3941613" y="3840480"/>
-            <a:ext cx="1865925" cy="914400"/>
+            <a:off x="4056827" y="3794760"/>
+            <a:ext cx="1725107" cy="777240"/>
           </a:xfrm>
           <a:prstGeom prst="roundRect">
             <a:avLst>
-              <a:gd name="adj" fmla="val 8000"/>
+              <a:gd name="adj" fmla="val 9412"/>
             </a:avLst>
           </a:prstGeom>
           <a:solidFill>
@@ -15021,8 +15021,8 @@
         </p:nvSpPr>
         <p:spPr>
           <a:xfrm>
-            <a:off x="4069629" y="4114800"/>
-            <a:ext cx="603504" cy="274320"/>
+            <a:off x="4203131" y="4041648"/>
+            <a:ext cx="457200" cy="274320"/>
           </a:xfrm>
           <a:prstGeom prst="roundRect">
             <a:avLst>
@@ -15048,8 +15048,8 @@
         </p:nvSpPr>
         <p:spPr>
           <a:xfrm>
-            <a:off x="4069629" y="4114800"/>
-            <a:ext cx="603504" cy="274320"/>
+            <a:off x="4203131" y="4041648"/>
+            <a:ext cx="457200" cy="274320"/>
           </a:xfrm>
           <a:prstGeom prst="rect">
             <a:avLst/>
@@ -15087,8 +15087,8 @@
         </p:nvSpPr>
         <p:spPr>
           <a:xfrm>
-            <a:off x="4727997" y="4114800"/>
-            <a:ext cx="603504" cy="274320"/>
+            <a:off x="4715195" y="4041648"/>
+            <a:ext cx="457200" cy="274320"/>
           </a:xfrm>
           <a:prstGeom prst="roundRect">
             <a:avLst>
@@ -15114,8 +15114,8 @@
         </p:nvSpPr>
         <p:spPr>
           <a:xfrm>
-            <a:off x="4727997" y="4114800"/>
-            <a:ext cx="603504" cy="274320"/>
+            <a:off x="4715195" y="4041648"/>
+            <a:ext cx="457200" cy="274320"/>
           </a:xfrm>
           <a:prstGeom prst="rect">
             <a:avLst/>
@@ -15153,12 +15153,12 @@
         </p:nvSpPr>
         <p:spPr>
           <a:xfrm>
-            <a:off x="5917265" y="3840480"/>
-            <a:ext cx="1865925" cy="914400"/>
+            <a:off x="5964814" y="3794760"/>
+            <a:ext cx="1725107" cy="777240"/>
           </a:xfrm>
           <a:prstGeom prst="roundRect">
             <a:avLst>
-              <a:gd name="adj" fmla="val 8000"/>
+              <a:gd name="adj" fmla="val 9412"/>
             </a:avLst>
           </a:prstGeom>
           <a:solidFill>
@@ -15180,8 +15180,8 @@
         </p:nvSpPr>
         <p:spPr>
           <a:xfrm>
-            <a:off x="6045281" y="4114800"/>
-            <a:ext cx="603504" cy="274320"/>
+            <a:off x="6111118" y="4041648"/>
+            <a:ext cx="457200" cy="274320"/>
           </a:xfrm>
           <a:prstGeom prst="roundRect">
             <a:avLst>
@@ -15207,8 +15207,8 @@
         </p:nvSpPr>
         <p:spPr>
           <a:xfrm>
-            <a:off x="6045281" y="4114800"/>
-            <a:ext cx="603504" cy="274320"/>
+            <a:off x="6111118" y="4041648"/>
+            <a:ext cx="457200" cy="274320"/>
           </a:xfrm>
           <a:prstGeom prst="rect">
             <a:avLst/>
@@ -15246,8 +15246,8 @@
         </p:nvSpPr>
         <p:spPr>
           <a:xfrm>
-            <a:off x="6703649" y="4114800"/>
-            <a:ext cx="603504" cy="274320"/>
+            <a:off x="6623182" y="4041648"/>
+            <a:ext cx="457200" cy="274320"/>
           </a:xfrm>
           <a:prstGeom prst="roundRect">
             <a:avLst>
@@ -15273,8 +15273,8 @@
         </p:nvSpPr>
         <p:spPr>
           <a:xfrm>
-            <a:off x="6703649" y="4114800"/>
-            <a:ext cx="603504" cy="274320"/>
+            <a:off x="6623182" y="4041648"/>
+            <a:ext cx="457200" cy="274320"/>
           </a:xfrm>
           <a:prstGeom prst="rect">
             <a:avLst/>
@@ -15312,8 +15312,8 @@
         </p:nvSpPr>
         <p:spPr>
           <a:xfrm>
-            <a:off x="7362017" y="4114800"/>
-            <a:ext cx="603504" cy="274320"/>
+            <a:off x="7135246" y="4041648"/>
+            <a:ext cx="457200" cy="274320"/>
           </a:xfrm>
           <a:prstGeom prst="roundRect">
             <a:avLst>
@@ -15339,8 +15339,8 @@
         </p:nvSpPr>
         <p:spPr>
           <a:xfrm>
-            <a:off x="7362017" y="4114800"/>
-            <a:ext cx="603504" cy="274320"/>
+            <a:off x="7135246" y="4041648"/>
+            <a:ext cx="457200" cy="274320"/>
           </a:xfrm>
           <a:prstGeom prst="rect">
             <a:avLst/>
@@ -15378,12 +15378,12 @@
         </p:nvSpPr>
         <p:spPr>
           <a:xfrm>
-            <a:off x="7892918" y="3840480"/>
-            <a:ext cx="1865925" cy="914400"/>
+            <a:off x="7872801" y="3794760"/>
+            <a:ext cx="1725107" cy="777240"/>
           </a:xfrm>
           <a:prstGeom prst="roundRect">
             <a:avLst>
-              <a:gd name="adj" fmla="val 8000"/>
+              <a:gd name="adj" fmla="val 9412"/>
             </a:avLst>
           </a:prstGeom>
           <a:solidFill>
@@ -15405,8 +15405,8 @@
         </p:nvSpPr>
         <p:spPr>
           <a:xfrm>
-            <a:off x="8020934" y="4114800"/>
-            <a:ext cx="603504" cy="274320"/>
+            <a:off x="8019105" y="4041648"/>
+            <a:ext cx="457200" cy="274320"/>
           </a:xfrm>
           <a:prstGeom prst="roundRect">
             <a:avLst>
@@ -15432,8 +15432,8 @@
         </p:nvSpPr>
         <p:spPr>
           <a:xfrm>
-            <a:off x="8020934" y="4114800"/>
-            <a:ext cx="603504" cy="274320"/>
+            <a:off x="8019105" y="4041648"/>
+            <a:ext cx="457200" cy="274320"/>
           </a:xfrm>
           <a:prstGeom prst="rect">
             <a:avLst/>
@@ -15471,12 +15471,12 @@
         </p:nvSpPr>
         <p:spPr>
           <a:xfrm>
-            <a:off x="9868571" y="3840480"/>
-            <a:ext cx="1865925" cy="914400"/>
+            <a:off x="9780788" y="3794760"/>
+            <a:ext cx="1725107" cy="777240"/>
           </a:xfrm>
           <a:prstGeom prst="roundRect">
             <a:avLst>
-              <a:gd name="adj" fmla="val 8000"/>
+              <a:gd name="adj" fmla="val 9412"/>
             </a:avLst>
           </a:prstGeom>
           <a:solidFill>
@@ -15498,8 +15498,8 @@
         </p:nvSpPr>
         <p:spPr>
           <a:xfrm>
-            <a:off x="9996587" y="4114800"/>
-            <a:ext cx="603504" cy="274320"/>
+            <a:off x="9927092" y="4041648"/>
+            <a:ext cx="457200" cy="274320"/>
           </a:xfrm>
           <a:prstGeom prst="roundRect">
             <a:avLst>
@@ -15525,8 +15525,8 @@
         </p:nvSpPr>
         <p:spPr>
           <a:xfrm>
-            <a:off x="9996587" y="4114800"/>
-            <a:ext cx="603504" cy="274320"/>
+            <a:off x="9927092" y="4041648"/>
+            <a:ext cx="457200" cy="274320"/>
           </a:xfrm>
           <a:prstGeom prst="rect">
             <a:avLst/>
@@ -15564,8 +15564,8 @@
         </p:nvSpPr>
         <p:spPr>
           <a:xfrm>
-            <a:off x="10654955" y="4114800"/>
-            <a:ext cx="603504" cy="274320"/>
+            <a:off x="10439156" y="4041648"/>
+            <a:ext cx="457200" cy="274320"/>
           </a:xfrm>
           <a:prstGeom prst="roundRect">
             <a:avLst>
@@ -15591,8 +15591,8 @@
         </p:nvSpPr>
         <p:spPr>
           <a:xfrm>
-            <a:off x="10654955" y="4114800"/>
-            <a:ext cx="603504" cy="274320"/>
+            <a:off x="10439156" y="4041648"/>
+            <a:ext cx="457200" cy="274320"/>
           </a:xfrm>
           <a:prstGeom prst="rect">
             <a:avLst/>
@@ -15630,8 +15630,8 @@
         </p:nvSpPr>
         <p:spPr>
           <a:xfrm>
-            <a:off x="457200" y="4892040"/>
-            <a:ext cx="1371600" cy="548640"/>
+            <a:off x="685800" y="4754880"/>
+            <a:ext cx="1280160" cy="457200"/>
           </a:xfrm>
           <a:prstGeom prst="rect">
             <a:avLst/>
@@ -15669,12 +15669,12 @@
         </p:nvSpPr>
         <p:spPr>
           <a:xfrm>
-            <a:off x="1965960" y="4892040"/>
-            <a:ext cx="1865925" cy="548640"/>
+            <a:off x="2148840" y="4754880"/>
+            <a:ext cx="1725107" cy="457200"/>
           </a:xfrm>
           <a:prstGeom prst="roundRect">
             <a:avLst>
-              <a:gd name="adj" fmla="val 13333"/>
+              <a:gd name="adj" fmla="val 16000"/>
             </a:avLst>
           </a:prstGeom>
           <a:solidFill>
@@ -15696,8 +15696,8 @@
         </p:nvSpPr>
         <p:spPr>
           <a:xfrm>
-            <a:off x="2093976" y="4892040"/>
-            <a:ext cx="1609893" cy="548640"/>
+            <a:off x="2295144" y="4754880"/>
+            <a:ext cx="1432499" cy="457200"/>
           </a:xfrm>
           <a:prstGeom prst="rect">
             <a:avLst/>
@@ -15735,12 +15735,12 @@
         </p:nvSpPr>
         <p:spPr>
           <a:xfrm>
-            <a:off x="3941613" y="4892040"/>
-            <a:ext cx="1865925" cy="548640"/>
+            <a:off x="4056827" y="4754880"/>
+            <a:ext cx="1725107" cy="457200"/>
           </a:xfrm>
           <a:prstGeom prst="roundRect">
             <a:avLst>
-              <a:gd name="adj" fmla="val 13333"/>
+              <a:gd name="adj" fmla="val 16000"/>
             </a:avLst>
           </a:prstGeom>
           <a:solidFill>
@@ -15762,8 +15762,8 @@
         </p:nvSpPr>
         <p:spPr>
           <a:xfrm>
-            <a:off x="4069629" y="4892040"/>
-            <a:ext cx="1609893" cy="548640"/>
+            <a:off x="4203131" y="4754880"/>
+            <a:ext cx="1432499" cy="457200"/>
           </a:xfrm>
           <a:prstGeom prst="rect">
             <a:avLst/>
@@ -15801,12 +15801,12 @@
         </p:nvSpPr>
         <p:spPr>
           <a:xfrm>
-            <a:off x="5917265" y="4892040"/>
-            <a:ext cx="1865925" cy="548640"/>
+            <a:off x="5964814" y="4754880"/>
+            <a:ext cx="1725107" cy="457200"/>
           </a:xfrm>
           <a:prstGeom prst="roundRect">
             <a:avLst>
-              <a:gd name="adj" fmla="val 13333"/>
+              <a:gd name="adj" fmla="val 16000"/>
             </a:avLst>
           </a:prstGeom>
           <a:solidFill>
@@ -15828,8 +15828,8 @@
         </p:nvSpPr>
         <p:spPr>
           <a:xfrm>
-            <a:off x="6045281" y="4892040"/>
-            <a:ext cx="1609893" cy="548640"/>
+            <a:off x="6111118" y="4754880"/>
+            <a:ext cx="1432499" cy="457200"/>
           </a:xfrm>
           <a:prstGeom prst="rect">
             <a:avLst/>
@@ -15867,12 +15867,12 @@
         </p:nvSpPr>
         <p:spPr>
           <a:xfrm>
-            <a:off x="7892918" y="4892040"/>
-            <a:ext cx="1865925" cy="548640"/>
+            <a:off x="7872801" y="4754880"/>
+            <a:ext cx="1725107" cy="457200"/>
           </a:xfrm>
           <a:prstGeom prst="roundRect">
             <a:avLst>
-              <a:gd name="adj" fmla="val 13333"/>
+              <a:gd name="adj" fmla="val 16000"/>
             </a:avLst>
           </a:prstGeom>
           <a:solidFill>
@@ -15894,8 +15894,8 @@
         </p:nvSpPr>
         <p:spPr>
           <a:xfrm>
-            <a:off x="8020934" y="4892040"/>
-            <a:ext cx="1609893" cy="548640"/>
+            <a:off x="8019105" y="4754880"/>
+            <a:ext cx="1432499" cy="457200"/>
           </a:xfrm>
           <a:prstGeom prst="rect">
             <a:avLst/>
@@ -15933,12 +15933,12 @@
         </p:nvSpPr>
         <p:spPr>
           <a:xfrm>
-            <a:off x="9868571" y="4892040"/>
-            <a:ext cx="1865925" cy="548640"/>
+            <a:off x="9780788" y="4754880"/>
+            <a:ext cx="1725107" cy="457200"/>
           </a:xfrm>
           <a:prstGeom prst="roundRect">
             <a:avLst>
-              <a:gd name="adj" fmla="val 13333"/>
+              <a:gd name="adj" fmla="val 16000"/>
             </a:avLst>
           </a:prstGeom>
           <a:solidFill>
@@ -15960,8 +15960,8 @@
         </p:nvSpPr>
         <p:spPr>
           <a:xfrm>
-            <a:off x="9996587" y="4892040"/>
-            <a:ext cx="1609893" cy="548640"/>
+            <a:off x="9927092" y="4754880"/>
+            <a:ext cx="1432499" cy="457200"/>
           </a:xfrm>
           <a:prstGeom prst="rect">
             <a:avLst/>
@@ -15999,8 +15999,8 @@
         </p:nvSpPr>
         <p:spPr>
           <a:xfrm>
-            <a:off x="457200" y="5577840"/>
-            <a:ext cx="1371600" cy="548640"/>
+            <a:off x="685800" y="5394960"/>
+            <a:ext cx="1280160" cy="365760"/>
           </a:xfrm>
           <a:prstGeom prst="rect">
             <a:avLst/>
@@ -16038,12 +16038,12 @@
         </p:nvSpPr>
         <p:spPr>
           <a:xfrm>
-            <a:off x="1965960" y="5577840"/>
-            <a:ext cx="1865925" cy="548640"/>
+            <a:off x="2148840" y="5394960"/>
+            <a:ext cx="1725107" cy="365760"/>
           </a:xfrm>
           <a:prstGeom prst="roundRect">
             <a:avLst>
-              <a:gd name="adj" fmla="val 13333"/>
+              <a:gd name="adj" fmla="val 20000"/>
             </a:avLst>
           </a:prstGeom>
           <a:solidFill>
@@ -16065,8 +16065,8 @@
         </p:nvSpPr>
         <p:spPr>
           <a:xfrm>
-            <a:off x="2093976" y="5577840"/>
-            <a:ext cx="1609893" cy="548640"/>
+            <a:off x="2295144" y="5394960"/>
+            <a:ext cx="1432499" cy="365760"/>
           </a:xfrm>
           <a:prstGeom prst="rect">
             <a:avLst/>
@@ -16104,12 +16104,12 @@
         </p:nvSpPr>
         <p:spPr>
           <a:xfrm>
-            <a:off x="3941613" y="5577840"/>
-            <a:ext cx="1865925" cy="548640"/>
+            <a:off x="4056827" y="5394960"/>
+            <a:ext cx="1725107" cy="365760"/>
           </a:xfrm>
           <a:prstGeom prst="roundRect">
             <a:avLst>
-              <a:gd name="adj" fmla="val 13333"/>
+              <a:gd name="adj" fmla="val 20000"/>
             </a:avLst>
           </a:prstGeom>
           <a:solidFill>
@@ -16131,8 +16131,8 @@
         </p:nvSpPr>
         <p:spPr>
           <a:xfrm>
-            <a:off x="4069629" y="5577840"/>
-            <a:ext cx="1609893" cy="548640"/>
+            <a:off x="4203131" y="5394960"/>
+            <a:ext cx="1432499" cy="365760"/>
           </a:xfrm>
           <a:prstGeom prst="rect">
             <a:avLst/>
@@ -16170,12 +16170,12 @@
         </p:nvSpPr>
         <p:spPr>
           <a:xfrm>
-            <a:off x="5917265" y="5577840"/>
-            <a:ext cx="1865925" cy="548640"/>
+            <a:off x="5964814" y="5394960"/>
+            <a:ext cx="1725107" cy="365760"/>
           </a:xfrm>
           <a:prstGeom prst="roundRect">
             <a:avLst>
-              <a:gd name="adj" fmla="val 13333"/>
+              <a:gd name="adj" fmla="val 20000"/>
             </a:avLst>
           </a:prstGeom>
           <a:solidFill>
@@ -16197,8 +16197,8 @@
         </p:nvSpPr>
         <p:spPr>
           <a:xfrm>
-            <a:off x="6045281" y="5577840"/>
-            <a:ext cx="1609893" cy="548640"/>
+            <a:off x="6111118" y="5394960"/>
+            <a:ext cx="1432499" cy="365760"/>
           </a:xfrm>
           <a:prstGeom prst="rect">
             <a:avLst/>
@@ -16236,12 +16236,12 @@
         </p:nvSpPr>
         <p:spPr>
           <a:xfrm>
-            <a:off x="7892918" y="5577840"/>
-            <a:ext cx="1865925" cy="548640"/>
+            <a:off x="7872801" y="5394960"/>
+            <a:ext cx="1725107" cy="365760"/>
           </a:xfrm>
           <a:prstGeom prst="roundRect">
             <a:avLst>
-              <a:gd name="adj" fmla="val 13333"/>
+              <a:gd name="adj" fmla="val 20000"/>
             </a:avLst>
           </a:prstGeom>
           <a:solidFill>
@@ -16263,8 +16263,8 @@
         </p:nvSpPr>
         <p:spPr>
           <a:xfrm>
-            <a:off x="8020934" y="5577840"/>
-            <a:ext cx="1609893" cy="548640"/>
+            <a:off x="8019105" y="5394960"/>
+            <a:ext cx="1432499" cy="365760"/>
           </a:xfrm>
           <a:prstGeom prst="rect">
             <a:avLst/>
@@ -16302,12 +16302,12 @@
         </p:nvSpPr>
         <p:spPr>
           <a:xfrm>
-            <a:off x="9868571" y="5577840"/>
-            <a:ext cx="1865925" cy="548640"/>
+            <a:off x="9780788" y="5394960"/>
+            <a:ext cx="1725107" cy="365760"/>
           </a:xfrm>
           <a:prstGeom prst="roundRect">
             <a:avLst>
-              <a:gd name="adj" fmla="val 13333"/>
+              <a:gd name="adj" fmla="val 20000"/>
             </a:avLst>
           </a:prstGeom>
           <a:solidFill>
@@ -16329,8 +16329,8 @@
         </p:nvSpPr>
         <p:spPr>
           <a:xfrm>
-            <a:off x="9996587" y="5577840"/>
-            <a:ext cx="1609893" cy="548640"/>
+            <a:off x="9927092" y="5394960"/>
+            <a:ext cx="1432499" cy="365760"/>
           </a:xfrm>
           <a:prstGeom prst="rect">
             <a:avLst/>
@@ -16400,8 +16400,8 @@
         </p:nvSpPr>
         <p:spPr>
           <a:xfrm>
-            <a:off x="457200" y="384048"/>
-            <a:ext cx="8961120" cy="274320"/>
+            <a:off x="685800" y="502920"/>
+            <a:ext cx="8595360" cy="274320"/>
           </a:xfrm>
           <a:prstGeom prst="rect">
             <a:avLst/>
@@ -16439,8 +16439,8 @@
         </p:nvSpPr>
         <p:spPr>
           <a:xfrm>
-            <a:off x="457200" y="676656"/>
-            <a:ext cx="11274552" cy="868680"/>
+            <a:off x="685800" y="804672"/>
+            <a:ext cx="10820095" cy="566928"/>
           </a:xfrm>
           <a:prstGeom prst="rect">
             <a:avLst/>
@@ -16459,7 +16459,7 @@
               <a:buNone/>
             </a:pPr>
             <a:r>
-              <a:rPr lang="en-US" sz="3000" b="1" dirty="0">
+              <a:rPr lang="en-US" sz="2800" b="1" dirty="0">
                 <a:solidFill>
                   <a:srgbClr val="222731"/>
                 </a:solidFill>
@@ -16467,9 +16467,9 @@
                 <a:ea typeface="Bricolage Grotesque" pitchFamily="34" charset="-122"/>
                 <a:cs typeface="Bricolage Grotesque" pitchFamily="34" charset="-120"/>
               </a:rPr>
-              <a:t>Pretium tincidunt lacus nulla gravida orci a odio nullam</a:t>
-            </a:r>
-            <a:endParaRPr lang="en-US" sz="3000" dirty="0"/>
+              <a:t>Pretium tincidunt lacus nulla gravida orci a</a:t>
+            </a:r>
+            <a:endParaRPr lang="en-US" sz="2800" dirty="0"/>
           </a:p>
         </p:txBody>
       </p:sp>
@@ -16481,7 +16481,7 @@
         </p:nvSpPr>
         <p:spPr>
           <a:xfrm>
-            <a:off x="457200" y="6400800"/>
+            <a:off x="685800" y="6400800"/>
             <a:ext cx="4389120" cy="256032"/>
           </a:xfrm>
           <a:prstGeom prst="rect">
@@ -16521,7 +16521,7 @@
         <p:spPr>
           <a:xfrm>
             <a:off x="4937760" y="6400800"/>
-            <a:ext cx="5943600" cy="256032"/>
+            <a:ext cx="5790895" cy="256032"/>
           </a:xfrm>
           <a:prstGeom prst="rect">
             <a:avLst/>
@@ -16559,7 +16559,7 @@
         </p:nvSpPr>
         <p:spPr>
           <a:xfrm>
-            <a:off x="11091672" y="6400800"/>
+            <a:off x="10865815" y="6400800"/>
             <a:ext cx="640080" cy="256032"/>
           </a:xfrm>
           <a:prstGeom prst="rect">
@@ -16598,8 +16598,8 @@
         </p:nvSpPr>
         <p:spPr>
           <a:xfrm>
-            <a:off x="1965960" y="1645920"/>
-            <a:ext cx="1865925" cy="548640"/>
+            <a:off x="2148840" y="1691640"/>
+            <a:ext cx="1725107" cy="548640"/>
           </a:xfrm>
           <a:prstGeom prst="roundRect">
             <a:avLst>
@@ -16625,8 +16625,8 @@
         </p:nvSpPr>
         <p:spPr>
           <a:xfrm>
-            <a:off x="2093976" y="1645920"/>
-            <a:ext cx="1683045" cy="548640"/>
+            <a:off x="2295144" y="1691640"/>
+            <a:ext cx="1505651" cy="548640"/>
           </a:xfrm>
           <a:prstGeom prst="rect">
             <a:avLst/>
@@ -16650,7 +16650,7 @@
                 <a:ea typeface="Hanken Grotesk" pitchFamily="34" charset="-122"/>
                 <a:cs typeface="Hanken Grotesk" pitchFamily="34" charset="-120"/>
               </a:rPr>
-              <a:t>Stage 1 · Ad minim</a:t>
+              <a:t>Stage 1 · Ad</a:t>
             </a:r>
             <a:endParaRPr lang="en-US" sz="1150" dirty="0"/>
           </a:p>
@@ -16664,8 +16664,8 @@
         </p:nvSpPr>
         <p:spPr>
           <a:xfrm>
-            <a:off x="3941613" y="1645920"/>
-            <a:ext cx="1865925" cy="548640"/>
+            <a:off x="4056827" y="1691640"/>
+            <a:ext cx="1725107" cy="548640"/>
           </a:xfrm>
           <a:prstGeom prst="roundRect">
             <a:avLst>
@@ -16691,8 +16691,8 @@
         </p:nvSpPr>
         <p:spPr>
           <a:xfrm>
-            <a:off x="4069629" y="1645920"/>
-            <a:ext cx="1683045" cy="548640"/>
+            <a:off x="4203131" y="1691640"/>
+            <a:ext cx="1505651" cy="548640"/>
           </a:xfrm>
           <a:prstGeom prst="rect">
             <a:avLst/>
@@ -16716,7 +16716,7 @@
                 <a:ea typeface="Hanken Grotesk" pitchFamily="34" charset="-122"/>
                 <a:cs typeface="Hanken Grotesk" pitchFamily="34" charset="-120"/>
               </a:rPr>
-              <a:t>Stage 2 · Laboris nisi</a:t>
+              <a:t>Stage 2 · Laboris</a:t>
             </a:r>
             <a:endParaRPr lang="en-US" sz="1150" dirty="0"/>
           </a:p>
@@ -16730,8 +16730,8 @@
         </p:nvSpPr>
         <p:spPr>
           <a:xfrm>
-            <a:off x="5917265" y="1645920"/>
-            <a:ext cx="1865925" cy="548640"/>
+            <a:off x="5964814" y="1691640"/>
+            <a:ext cx="1725107" cy="548640"/>
           </a:xfrm>
           <a:prstGeom prst="roundRect">
             <a:avLst>
@@ -16757,8 +16757,8 @@
         </p:nvSpPr>
         <p:spPr>
           <a:xfrm>
-            <a:off x="6045281" y="1645920"/>
-            <a:ext cx="1683045" cy="548640"/>
+            <a:off x="6111118" y="1691640"/>
+            <a:ext cx="1505651" cy="548640"/>
           </a:xfrm>
           <a:prstGeom prst="rect">
             <a:avLst/>
@@ -16782,7 +16782,7 @@
                 <a:ea typeface="Hanken Grotesk" pitchFamily="34" charset="-122"/>
                 <a:cs typeface="Hanken Grotesk" pitchFamily="34" charset="-120"/>
               </a:rPr>
-              <a:t>Stage 3 · Consequat duis</a:t>
+              <a:t>Stage 3 · Consequat</a:t>
             </a:r>
             <a:endParaRPr lang="en-US" sz="1150" dirty="0"/>
           </a:p>
@@ -16796,8 +16796,8 @@
         </p:nvSpPr>
         <p:spPr>
           <a:xfrm>
-            <a:off x="7892918" y="1645920"/>
-            <a:ext cx="1865925" cy="548640"/>
+            <a:off x="7872801" y="1691640"/>
+            <a:ext cx="1725107" cy="548640"/>
           </a:xfrm>
           <a:prstGeom prst="roundRect">
             <a:avLst>
@@ -16823,8 +16823,8 @@
         </p:nvSpPr>
         <p:spPr>
           <a:xfrm>
-            <a:off x="8020934" y="1645920"/>
-            <a:ext cx="1683045" cy="548640"/>
+            <a:off x="8019105" y="1691640"/>
+            <a:ext cx="1505651" cy="548640"/>
           </a:xfrm>
           <a:prstGeom prst="rect">
             <a:avLst/>
@@ -16848,7 +16848,7 @@
                 <a:ea typeface="Hanken Grotesk" pitchFamily="34" charset="-122"/>
                 <a:cs typeface="Hanken Grotesk" pitchFamily="34" charset="-120"/>
               </a:rPr>
-              <a:t>Stage 4 · In voluptate</a:t>
+              <a:t>Stage 4 · In</a:t>
             </a:r>
             <a:endParaRPr lang="en-US" sz="1150" dirty="0"/>
           </a:p>
@@ -16862,8 +16862,8 @@
         </p:nvSpPr>
         <p:spPr>
           <a:xfrm>
-            <a:off x="9868571" y="1645920"/>
-            <a:ext cx="1865925" cy="548640"/>
+            <a:off x="9780788" y="1691640"/>
+            <a:ext cx="1725107" cy="548640"/>
           </a:xfrm>
           <a:prstGeom prst="roundRect">
             <a:avLst>
@@ -16889,8 +16889,8 @@
         </p:nvSpPr>
         <p:spPr>
           <a:xfrm>
-            <a:off x="9996587" y="1645920"/>
-            <a:ext cx="1683045" cy="548640"/>
+            <a:off x="9927092" y="1691640"/>
+            <a:ext cx="1505651" cy="548640"/>
           </a:xfrm>
           <a:prstGeom prst="rect">
             <a:avLst/>
@@ -16914,7 +16914,7 @@
                 <a:ea typeface="Hanken Grotesk" pitchFamily="34" charset="-122"/>
                 <a:cs typeface="Hanken Grotesk" pitchFamily="34" charset="-120"/>
               </a:rPr>
-              <a:t>Stage 5 · Fugiat nulla</a:t>
+              <a:t>Stage 5 · Fugiat</a:t>
             </a:r>
             <a:endParaRPr lang="en-US" sz="1150" dirty="0"/>
           </a:p>
@@ -16928,8 +16928,8 @@
         </p:nvSpPr>
         <p:spPr>
           <a:xfrm>
-            <a:off x="457200" y="2331720"/>
-            <a:ext cx="1371600" cy="1051560"/>
+            <a:off x="685800" y="2423160"/>
+            <a:ext cx="1280160" cy="960120"/>
           </a:xfrm>
           <a:prstGeom prst="rect">
             <a:avLst/>
@@ -16967,12 +16967,12 @@
         </p:nvSpPr>
         <p:spPr>
           <a:xfrm>
-            <a:off x="1965960" y="2331720"/>
-            <a:ext cx="1865925" cy="1051560"/>
+            <a:off x="2148840" y="2423160"/>
+            <a:ext cx="1725107" cy="960120"/>
           </a:xfrm>
           <a:prstGeom prst="roundRect">
             <a:avLst>
-              <a:gd name="adj" fmla="val 6957"/>
+              <a:gd name="adj" fmla="val 7619"/>
             </a:avLst>
           </a:prstGeom>
           <a:solidFill>
@@ -16994,8 +16994,8 @@
         </p:nvSpPr>
         <p:spPr>
           <a:xfrm>
-            <a:off x="2093976" y="2441448"/>
-            <a:ext cx="1609893" cy="868680"/>
+            <a:off x="2295144" y="2551176"/>
+            <a:ext cx="1432499" cy="758952"/>
           </a:xfrm>
           <a:prstGeom prst="rect">
             <a:avLst/>
@@ -17019,7 +17019,7 @@
                 <a:ea typeface="Hanken Grotesk" pitchFamily="34" charset="-122"/>
                 <a:cs typeface="Hanken Grotesk" pitchFamily="34" charset="-120"/>
               </a:rPr>
-              <a:t>Laboris nisi ut aliquip ex ea commodo.</a:t>
+              <a:t>Laboris nisi ut aliquip ex ea.</a:t>
             </a:r>
             <a:endParaRPr lang="en-US" sz="1150" dirty="0"/>
           </a:p>
@@ -17033,12 +17033,12 @@
         </p:nvSpPr>
         <p:spPr>
           <a:xfrm>
-            <a:off x="3941613" y="2331720"/>
-            <a:ext cx="1865925" cy="1051560"/>
+            <a:off x="4056827" y="2423160"/>
+            <a:ext cx="1725107" cy="960120"/>
           </a:xfrm>
           <a:prstGeom prst="roundRect">
             <a:avLst>
-              <a:gd name="adj" fmla="val 6957"/>
+              <a:gd name="adj" fmla="val 7619"/>
             </a:avLst>
           </a:prstGeom>
           <a:solidFill>
@@ -17060,8 +17060,8 @@
         </p:nvSpPr>
         <p:spPr>
           <a:xfrm>
-            <a:off x="4069629" y="2441448"/>
-            <a:ext cx="1609893" cy="868680"/>
+            <a:off x="4203131" y="2551176"/>
+            <a:ext cx="1432499" cy="758952"/>
           </a:xfrm>
           <a:prstGeom prst="rect">
             <a:avLst/>
@@ -17085,7 +17085,7 @@
                 <a:ea typeface="Hanken Grotesk" pitchFamily="34" charset="-122"/>
                 <a:cs typeface="Hanken Grotesk" pitchFamily="34" charset="-120"/>
               </a:rPr>
-              <a:t>Consequat duis aute irure dolor in reprehenderit.</a:t>
+              <a:t>Consequat duis aute irure dolor in.</a:t>
             </a:r>
             <a:endParaRPr lang="en-US" sz="1150" dirty="0"/>
           </a:p>
@@ -17099,12 +17099,12 @@
         </p:nvSpPr>
         <p:spPr>
           <a:xfrm>
-            <a:off x="5917265" y="2331720"/>
-            <a:ext cx="1865925" cy="1051560"/>
+            <a:off x="5964814" y="2423160"/>
+            <a:ext cx="1725107" cy="960120"/>
           </a:xfrm>
           <a:prstGeom prst="roundRect">
             <a:avLst>
-              <a:gd name="adj" fmla="val 6957"/>
+              <a:gd name="adj" fmla="val 7619"/>
             </a:avLst>
           </a:prstGeom>
           <a:solidFill>
@@ -17126,8 +17126,8 @@
         </p:nvSpPr>
         <p:spPr>
           <a:xfrm>
-            <a:off x="6045281" y="2441448"/>
-            <a:ext cx="1609893" cy="868680"/>
+            <a:off x="6111118" y="2551176"/>
+            <a:ext cx="1432499" cy="758952"/>
           </a:xfrm>
           <a:prstGeom prst="rect">
             <a:avLst/>
@@ -17151,7 +17151,7 @@
                 <a:ea typeface="Hanken Grotesk" pitchFamily="34" charset="-122"/>
                 <a:cs typeface="Hanken Grotesk" pitchFamily="34" charset="-120"/>
               </a:rPr>
-              <a:t>In voluptate velit esse cillum dolore eu.</a:t>
+              <a:t>In voluptate velit esse cillum dolore.</a:t>
             </a:r>
             <a:endParaRPr lang="en-US" sz="1150" dirty="0"/>
           </a:p>
@@ -17165,12 +17165,12 @@
         </p:nvSpPr>
         <p:spPr>
           <a:xfrm>
-            <a:off x="7892918" y="2331720"/>
-            <a:ext cx="1865925" cy="1051560"/>
+            <a:off x="7872801" y="2423160"/>
+            <a:ext cx="1725107" cy="960120"/>
           </a:xfrm>
           <a:prstGeom prst="roundRect">
             <a:avLst>
-              <a:gd name="adj" fmla="val 6957"/>
+              <a:gd name="adj" fmla="val 7619"/>
             </a:avLst>
           </a:prstGeom>
           <a:solidFill>
@@ -17192,8 +17192,8 @@
         </p:nvSpPr>
         <p:spPr>
           <a:xfrm>
-            <a:off x="8020934" y="2441448"/>
-            <a:ext cx="1609893" cy="868680"/>
+            <a:off x="8019105" y="2551176"/>
+            <a:ext cx="1432499" cy="758952"/>
           </a:xfrm>
           <a:prstGeom prst="rect">
             <a:avLst/>
@@ -17217,7 +17217,7 @@
                 <a:ea typeface="Hanken Grotesk" pitchFamily="34" charset="-122"/>
                 <a:cs typeface="Hanken Grotesk" pitchFamily="34" charset="-120"/>
               </a:rPr>
-              <a:t>Fugiat nulla pariatur excepteur sint occaecat cupidatat.</a:t>
+              <a:t>Fugiat nulla pariatur excepteur sint occaecat.</a:t>
             </a:r>
             <a:endParaRPr lang="en-US" sz="1150" dirty="0"/>
           </a:p>
@@ -17231,12 +17231,12 @@
         </p:nvSpPr>
         <p:spPr>
           <a:xfrm>
-            <a:off x="9868571" y="2331720"/>
-            <a:ext cx="1865925" cy="1051560"/>
+            <a:off x="9780788" y="2423160"/>
+            <a:ext cx="1725107" cy="960120"/>
           </a:xfrm>
           <a:prstGeom prst="roundRect">
             <a:avLst>
-              <a:gd name="adj" fmla="val 6957"/>
+              <a:gd name="adj" fmla="val 7619"/>
             </a:avLst>
           </a:prstGeom>
           <a:solidFill>
@@ -17258,8 +17258,8 @@
         </p:nvSpPr>
         <p:spPr>
           <a:xfrm>
-            <a:off x="9996587" y="2441448"/>
-            <a:ext cx="1609893" cy="868680"/>
+            <a:off x="9927092" y="2551176"/>
+            <a:ext cx="1432499" cy="758952"/>
           </a:xfrm>
           <a:prstGeom prst="rect">
             <a:avLst/>
@@ -17283,7 +17283,7 @@
                 <a:ea typeface="Hanken Grotesk" pitchFamily="34" charset="-122"/>
                 <a:cs typeface="Hanken Grotesk" pitchFamily="34" charset="-120"/>
               </a:rPr>
-              <a:t>Non proident sunt in culpa qui officia.</a:t>
+              <a:t>Non proident sunt in culpa qui.</a:t>
             </a:r>
             <a:endParaRPr lang="en-US" sz="1150" dirty="0"/>
           </a:p>
@@ -17297,8 +17297,8 @@
         </p:nvSpPr>
         <p:spPr>
           <a:xfrm>
-            <a:off x="457200" y="3520440"/>
-            <a:ext cx="1371600" cy="1234440"/>
+            <a:off x="685800" y="3566160"/>
+            <a:ext cx="1280160" cy="1097280"/>
           </a:xfrm>
           <a:prstGeom prst="rect">
             <a:avLst/>
@@ -17336,12 +17336,12 @@
         </p:nvSpPr>
         <p:spPr>
           <a:xfrm>
-            <a:off x="1965960" y="3520440"/>
-            <a:ext cx="9768535" cy="1234440"/>
+            <a:off x="2148840" y="3566160"/>
+            <a:ext cx="9357055" cy="1097280"/>
           </a:xfrm>
           <a:prstGeom prst="roundRect">
             <a:avLst>
-              <a:gd name="adj" fmla="val 7407"/>
+              <a:gd name="adj" fmla="val 8333"/>
             </a:avLst>
           </a:prstGeom>
           <a:solidFill>
@@ -17363,8 +17363,8 @@
         </p:nvSpPr>
         <p:spPr>
           <a:xfrm>
-            <a:off x="2898922" y="3980840"/>
-            <a:ext cx="1975653" cy="86411"/>
+            <a:off x="3011394" y="3974897"/>
+            <a:ext cx="1907987" cy="63094"/>
           </a:xfrm>
           <a:prstGeom prst="line">
             <a:avLst/>
@@ -17386,8 +17386,8 @@
         </p:nvSpPr>
         <p:spPr>
           <a:xfrm>
-            <a:off x="4874575" y="4067251"/>
-            <a:ext cx="1975653" cy="172822"/>
+            <a:off x="4919381" y="4037990"/>
+            <a:ext cx="1907987" cy="126187"/>
           </a:xfrm>
           <a:prstGeom prst="line">
             <a:avLst/>
@@ -17409,8 +17409,8 @@
         </p:nvSpPr>
         <p:spPr>
           <a:xfrm flipV="1">
-            <a:off x="6850228" y="4096055"/>
-            <a:ext cx="1975653" cy="144018"/>
+            <a:off x="6827368" y="4059022"/>
+            <a:ext cx="1907987" cy="105156"/>
           </a:xfrm>
           <a:prstGeom prst="line">
             <a:avLst/>
@@ -17432,8 +17432,8 @@
         </p:nvSpPr>
         <p:spPr>
           <a:xfrm flipV="1">
-            <a:off x="8825880" y="4009644"/>
-            <a:ext cx="1975653" cy="86411"/>
+            <a:off x="8735355" y="3995928"/>
+            <a:ext cx="1907987" cy="63094"/>
           </a:xfrm>
           <a:prstGeom prst="line">
             <a:avLst/>
@@ -17455,7 +17455,7 @@
         </p:nvSpPr>
         <p:spPr>
           <a:xfrm>
-            <a:off x="2816626" y="3898544"/>
+            <a:off x="2929098" y="3892601"/>
             <a:ext cx="164592" cy="164592"/>
           </a:xfrm>
           <a:prstGeom prst="ellipse">
@@ -17480,8 +17480,8 @@
         </p:nvSpPr>
         <p:spPr>
           <a:xfrm>
-            <a:off x="1965960" y="4099712"/>
-            <a:ext cx="1865925" cy="237744"/>
+            <a:off x="2148840" y="4093769"/>
+            <a:ext cx="1725107" cy="237744"/>
           </a:xfrm>
           <a:prstGeom prst="rect">
             <a:avLst/>
@@ -17519,7 +17519,7 @@
         </p:nvSpPr>
         <p:spPr>
           <a:xfrm>
-            <a:off x="4792279" y="3984955"/>
+            <a:off x="4837085" y="3955694"/>
             <a:ext cx="164592" cy="164592"/>
           </a:xfrm>
           <a:prstGeom prst="ellipse">
@@ -17544,8 +17544,8 @@
         </p:nvSpPr>
         <p:spPr>
           <a:xfrm>
-            <a:off x="3941613" y="4186123"/>
-            <a:ext cx="1865925" cy="237744"/>
+            <a:off x="4056827" y="4156862"/>
+            <a:ext cx="1725107" cy="237744"/>
           </a:xfrm>
           <a:prstGeom prst="rect">
             <a:avLst/>
@@ -17583,7 +17583,7 @@
         </p:nvSpPr>
         <p:spPr>
           <a:xfrm>
-            <a:off x="6767932" y="4157777"/>
+            <a:off x="6745072" y="4081882"/>
             <a:ext cx="164592" cy="164592"/>
           </a:xfrm>
           <a:prstGeom prst="ellipse">
@@ -17608,8 +17608,8 @@
         </p:nvSpPr>
         <p:spPr>
           <a:xfrm>
-            <a:off x="5917265" y="4358945"/>
-            <a:ext cx="1865925" cy="237744"/>
+            <a:off x="5964814" y="4283050"/>
+            <a:ext cx="1725107" cy="237744"/>
           </a:xfrm>
           <a:prstGeom prst="rect">
             <a:avLst/>
@@ -17647,7 +17647,7 @@
         </p:nvSpPr>
         <p:spPr>
           <a:xfrm>
-            <a:off x="8743584" y="4013759"/>
+            <a:off x="8653059" y="3976726"/>
             <a:ext cx="164592" cy="164592"/>
           </a:xfrm>
           <a:prstGeom prst="ellipse">
@@ -17672,8 +17672,8 @@
         </p:nvSpPr>
         <p:spPr>
           <a:xfrm>
-            <a:off x="7892918" y="4214927"/>
-            <a:ext cx="1865925" cy="237744"/>
+            <a:off x="7872801" y="4177894"/>
+            <a:ext cx="1725107" cy="237744"/>
           </a:xfrm>
           <a:prstGeom prst="rect">
             <a:avLst/>
@@ -17711,7 +17711,7 @@
         </p:nvSpPr>
         <p:spPr>
           <a:xfrm>
-            <a:off x="10719237" y="3927348"/>
+            <a:off x="10561046" y="3913632"/>
             <a:ext cx="164592" cy="164592"/>
           </a:xfrm>
           <a:prstGeom prst="ellipse">
@@ -17736,8 +17736,8 @@
         </p:nvSpPr>
         <p:spPr>
           <a:xfrm>
-            <a:off x="9868571" y="4128516"/>
-            <a:ext cx="1865925" cy="237744"/>
+            <a:off x="9780788" y="4114800"/>
+            <a:ext cx="1725107" cy="237744"/>
           </a:xfrm>
           <a:prstGeom prst="rect">
             <a:avLst/>
@@ -17775,8 +17775,8 @@
         </p:nvSpPr>
         <p:spPr>
           <a:xfrm>
-            <a:off x="457200" y="4892040"/>
-            <a:ext cx="1371600" cy="1280160"/>
+            <a:off x="685800" y="4846320"/>
+            <a:ext cx="1280160" cy="914400"/>
           </a:xfrm>
           <a:prstGeom prst="rect">
             <a:avLst/>
@@ -17814,12 +17814,12 @@
         </p:nvSpPr>
         <p:spPr>
           <a:xfrm>
-            <a:off x="1965960" y="4892040"/>
-            <a:ext cx="1865925" cy="1280160"/>
+            <a:off x="2148840" y="4846320"/>
+            <a:ext cx="1725107" cy="914400"/>
           </a:xfrm>
           <a:prstGeom prst="roundRect">
             <a:avLst>
-              <a:gd name="adj" fmla="val 5714"/>
+              <a:gd name="adj" fmla="val 8000"/>
             </a:avLst>
           </a:prstGeom>
           <a:solidFill>
@@ -17841,8 +17841,8 @@
         </p:nvSpPr>
         <p:spPr>
           <a:xfrm>
-            <a:off x="2093976" y="5001768"/>
-            <a:ext cx="1609893" cy="1097280"/>
+            <a:off x="2295144" y="4974336"/>
+            <a:ext cx="1432499" cy="713232"/>
           </a:xfrm>
           <a:prstGeom prst="rect">
             <a:avLst/>
@@ -17866,7 +17866,7 @@
                 <a:ea typeface="Hanken Grotesk" pitchFamily="34" charset="-122"/>
                 <a:cs typeface="Hanken Grotesk" pitchFamily="34" charset="-120"/>
               </a:rPr>
-              <a:t>Odio nullam varius turpis et commodo pharetra.</a:t>
+              <a:t>Odio nullam varius turpis et commodo.</a:t>
             </a:r>
             <a:endParaRPr lang="en-US" sz="1150" dirty="0"/>
           </a:p>
@@ -17880,12 +17880,12 @@
         </p:nvSpPr>
         <p:spPr>
           <a:xfrm>
-            <a:off x="3941613" y="4892040"/>
-            <a:ext cx="1865925" cy="1280160"/>
+            <a:off x="4056827" y="4846320"/>
+            <a:ext cx="1725107" cy="914400"/>
           </a:xfrm>
           <a:prstGeom prst="roundRect">
             <a:avLst>
-              <a:gd name="adj" fmla="val 5714"/>
+              <a:gd name="adj" fmla="val 8000"/>
             </a:avLst>
           </a:prstGeom>
           <a:solidFill>
@@ -17907,8 +17907,8 @@
         </p:nvSpPr>
         <p:spPr>
           <a:xfrm>
-            <a:off x="4069629" y="5001768"/>
-            <a:ext cx="1609893" cy="1097280"/>
+            <a:off x="4203131" y="4974336"/>
+            <a:ext cx="1432499" cy="713232"/>
           </a:xfrm>
           <a:prstGeom prst="rect">
             <a:avLst/>
@@ -17932,7 +17932,7 @@
                 <a:ea typeface="Hanken Grotesk" pitchFamily="34" charset="-122"/>
                 <a:cs typeface="Hanken Grotesk" pitchFamily="34" charset="-120"/>
               </a:rPr>
-              <a:t>Est eros bibendum elit nec luctus magna.</a:t>
+              <a:t>Est eros bibendum elit nec luctus.</a:t>
             </a:r>
             <a:endParaRPr lang="en-US" sz="1150" dirty="0"/>
           </a:p>
@@ -17946,12 +17946,12 @@
         </p:nvSpPr>
         <p:spPr>
           <a:xfrm>
-            <a:off x="5917265" y="4892040"/>
-            <a:ext cx="1865925" cy="1280160"/>
+            <a:off x="5964814" y="4846320"/>
+            <a:ext cx="1725107" cy="914400"/>
           </a:xfrm>
           <a:prstGeom prst="roundRect">
             <a:avLst>
-              <a:gd name="adj" fmla="val 5714"/>
+              <a:gd name="adj" fmla="val 8000"/>
             </a:avLst>
           </a:prstGeom>
           <a:solidFill>
@@ -17973,8 +17973,8 @@
         </p:nvSpPr>
         <p:spPr>
           <a:xfrm>
-            <a:off x="6045281" y="5001768"/>
-            <a:ext cx="1609893" cy="1097280"/>
+            <a:off x="6111118" y="4974336"/>
+            <a:ext cx="1432499" cy="713232"/>
           </a:xfrm>
           <a:prstGeom prst="rect">
             <a:avLst/>
@@ -17998,7 +17998,7 @@
                 <a:ea typeface="Hanken Grotesk" pitchFamily="34" charset="-122"/>
                 <a:cs typeface="Hanken Grotesk" pitchFamily="34" charset="-120"/>
               </a:rPr>
-              <a:t>Felis sollicitudin mauris integer in mauris eu.</a:t>
+              <a:t>Felis sollicitudin mauris integer in mauris.</a:t>
             </a:r>
             <a:endParaRPr lang="en-US" sz="1150" dirty="0"/>
           </a:p>
@@ -18012,12 +18012,12 @@
         </p:nvSpPr>
         <p:spPr>
           <a:xfrm>
-            <a:off x="7892918" y="4892040"/>
-            <a:ext cx="1865925" cy="1280160"/>
+            <a:off x="7872801" y="4846320"/>
+            <a:ext cx="1725107" cy="914400"/>
           </a:xfrm>
           <a:prstGeom prst="roundRect">
             <a:avLst>
-              <a:gd name="adj" fmla="val 5714"/>
+              <a:gd name="adj" fmla="val 8000"/>
             </a:avLst>
           </a:prstGeom>
           <a:solidFill>
@@ -18039,8 +18039,8 @@
         </p:nvSpPr>
         <p:spPr>
           <a:xfrm>
-            <a:off x="8020934" y="5001768"/>
-            <a:ext cx="1609893" cy="1097280"/>
+            <a:off x="8019105" y="4974336"/>
+            <a:ext cx="1432499" cy="713232"/>
           </a:xfrm>
           <a:prstGeom prst="rect">
             <a:avLst/>
@@ -18064,7 +18064,7 @@
                 <a:ea typeface="Hanken Grotesk" pitchFamily="34" charset="-122"/>
                 <a:cs typeface="Hanken Grotesk" pitchFamily="34" charset="-120"/>
               </a:rPr>
-              <a:t>Nibh euismod gravida lorem ipsum dolor sit.</a:t>
+              <a:t>Nibh euismod gravida lorem ipsum dolor.</a:t>
             </a:r>
             <a:endParaRPr lang="en-US" sz="1150" dirty="0"/>
           </a:p>
@@ -18078,12 +18078,12 @@
         </p:nvSpPr>
         <p:spPr>
           <a:xfrm>
-            <a:off x="9868571" y="4892040"/>
-            <a:ext cx="1865925" cy="1280160"/>
+            <a:off x="9780788" y="4846320"/>
+            <a:ext cx="1725107" cy="914400"/>
           </a:xfrm>
           <a:prstGeom prst="roundRect">
             <a:avLst>
-              <a:gd name="adj" fmla="val 5714"/>
+              <a:gd name="adj" fmla="val 8000"/>
             </a:avLst>
           </a:prstGeom>
           <a:solidFill>
@@ -18105,8 +18105,8 @@
         </p:nvSpPr>
         <p:spPr>
           <a:xfrm>
-            <a:off x="9996587" y="5001768"/>
-            <a:ext cx="1609893" cy="1097280"/>
+            <a:off x="9927092" y="4974336"/>
+            <a:ext cx="1432499" cy="713232"/>
           </a:xfrm>
           <a:prstGeom prst="rect">
             <a:avLst/>
@@ -18130,7 +18130,7 @@
                 <a:ea typeface="Hanken Grotesk" pitchFamily="34" charset="-122"/>
                 <a:cs typeface="Hanken Grotesk" pitchFamily="34" charset="-120"/>
               </a:rPr>
-              <a:t>Amet consectetur adipiscing elit sed do eiusmod.</a:t>
+              <a:t>Amet consectetur adipiscing elit sed do.</a:t>
             </a:r>
             <a:endParaRPr lang="en-US" sz="1150" dirty="0"/>
           </a:p>
@@ -18176,8 +18176,8 @@
         </p:nvSpPr>
         <p:spPr>
           <a:xfrm>
-            <a:off x="457200" y="384048"/>
-            <a:ext cx="8961120" cy="274320"/>
+            <a:off x="685800" y="502920"/>
+            <a:ext cx="8595360" cy="274320"/>
           </a:xfrm>
           <a:prstGeom prst="rect">
             <a:avLst/>
@@ -18215,8 +18215,8 @@
         </p:nvSpPr>
         <p:spPr>
           <a:xfrm>
-            <a:off x="457200" y="676656"/>
-            <a:ext cx="11274552" cy="868680"/>
+            <a:off x="685800" y="804672"/>
+            <a:ext cx="10820095" cy="566928"/>
           </a:xfrm>
           <a:prstGeom prst="rect">
             <a:avLst/>
@@ -18235,7 +18235,7 @@
               <a:buNone/>
             </a:pPr>
             <a:r>
-              <a:rPr lang="en-US" sz="3000" b="1" dirty="0">
+              <a:rPr lang="en-US" sz="2800" b="1" dirty="0">
                 <a:solidFill>
                   <a:srgbClr val="222731"/>
                 </a:solidFill>
@@ -18243,9 +18243,9 @@
                 <a:ea typeface="Bricolage Grotesque" pitchFamily="34" charset="-122"/>
                 <a:cs typeface="Bricolage Grotesque" pitchFamily="34" charset="-120"/>
               </a:rPr>
-              <a:t>Felis sollicitudin mauris integer in mauris eu nibh euismod gravida</a:t>
-            </a:r>
-            <a:endParaRPr lang="en-US" sz="3000" dirty="0"/>
+              <a:t>Felis sollicitudin mauris integer in mauris</a:t>
+            </a:r>
+            <a:endParaRPr lang="en-US" sz="2800" dirty="0"/>
           </a:p>
         </p:txBody>
       </p:sp>
@@ -18257,7 +18257,7 @@
         </p:nvSpPr>
         <p:spPr>
           <a:xfrm>
-            <a:off x="457200" y="6400800"/>
+            <a:off x="685800" y="6400800"/>
             <a:ext cx="4389120" cy="256032"/>
           </a:xfrm>
           <a:prstGeom prst="rect">
@@ -18297,7 +18297,7 @@
         <p:spPr>
           <a:xfrm>
             <a:off x="4937760" y="6400800"/>
-            <a:ext cx="5943600" cy="256032"/>
+            <a:ext cx="5790895" cy="256032"/>
           </a:xfrm>
           <a:prstGeom prst="rect">
             <a:avLst/>
@@ -18335,7 +18335,7 @@
         </p:nvSpPr>
         <p:spPr>
           <a:xfrm>
-            <a:off x="11091672" y="6400800"/>
+            <a:off x="10865815" y="6400800"/>
             <a:ext cx="640080" cy="256032"/>
           </a:xfrm>
           <a:prstGeom prst="rect">
@@ -18374,12 +18374,12 @@
         </p:nvSpPr>
         <p:spPr>
           <a:xfrm>
-            <a:off x="457200" y="1783080"/>
-            <a:ext cx="3576218" cy="4343400"/>
+            <a:off x="685800" y="1691640"/>
+            <a:ext cx="3423818" cy="4069080"/>
           </a:xfrm>
           <a:prstGeom prst="roundRect">
             <a:avLst>
-              <a:gd name="adj" fmla="val 3068"/>
+              <a:gd name="adj" fmla="val 3205"/>
             </a:avLst>
           </a:prstGeom>
           <a:solidFill>
@@ -18401,8 +18401,8 @@
         </p:nvSpPr>
         <p:spPr>
           <a:xfrm>
-            <a:off x="777240" y="2103120"/>
-            <a:ext cx="658368" cy="658368"/>
+            <a:off x="1051560" y="2057400"/>
+            <a:ext cx="585216" cy="585216"/>
           </a:xfrm>
           <a:prstGeom prst="roundRect">
             <a:avLst>
@@ -18436,8 +18436,8 @@
         </p:blipFill>
         <p:spPr>
           <a:xfrm>
-            <a:off x="908914" y="2234794"/>
-            <a:ext cx="395021" cy="395021"/>
+            <a:off x="1168603" y="2174443"/>
+            <a:ext cx="351130" cy="351130"/>
           </a:xfrm>
           <a:prstGeom prst="rect">
             <a:avLst/>
@@ -18452,8 +18452,8 @@
         </p:nvSpPr>
         <p:spPr>
           <a:xfrm>
-            <a:off x="777240" y="2953512"/>
-            <a:ext cx="2936138" cy="274320"/>
+            <a:off x="1051560" y="2880360"/>
+            <a:ext cx="2692298" cy="274320"/>
           </a:xfrm>
           <a:prstGeom prst="rect">
             <a:avLst/>
@@ -18491,8 +18491,8 @@
         </p:nvSpPr>
         <p:spPr>
           <a:xfrm>
-            <a:off x="777240" y="3246120"/>
-            <a:ext cx="2936138" cy="731520"/>
+            <a:off x="1051560" y="3200400"/>
+            <a:ext cx="2692298" cy="731520"/>
           </a:xfrm>
           <a:prstGeom prst="rect">
             <a:avLst/>
@@ -18508,7 +18508,7 @@
               <a:buNone/>
             </a:pPr>
             <a:r>
-              <a:rPr lang="en-US" sz="2000" b="1" dirty="0">
+              <a:rPr lang="en-US" sz="1900" b="1" dirty="0">
                 <a:solidFill>
                   <a:srgbClr val="222731"/>
                 </a:solidFill>
@@ -18518,7 +18518,7 @@
               </a:rPr>
               <a:t>Exercitation ullamco laboris nisi</a:t>
             </a:r>
-            <a:endParaRPr lang="en-US" sz="2000" dirty="0"/>
+            <a:endParaRPr lang="en-US" sz="1900" dirty="0"/>
           </a:p>
         </p:txBody>
       </p:sp>
@@ -18530,8 +18530,8 @@
         </p:nvSpPr>
         <p:spPr>
           <a:xfrm>
-            <a:off x="777240" y="4069080"/>
-            <a:ext cx="2936138" cy="1828800"/>
+            <a:off x="1051560" y="4023360"/>
+            <a:ext cx="2692298" cy="1371600"/>
           </a:xfrm>
           <a:prstGeom prst="rect">
             <a:avLst/>
@@ -18555,7 +18555,7 @@
                 <a:ea typeface="Hanken Grotesk" pitchFamily="34" charset="-122"/>
                 <a:cs typeface="Hanken Grotesk" pitchFamily="34" charset="-120"/>
               </a:rPr>
-              <a:t>Dolor sit amet consectetur adipiscing elit sed do eiusmod tempor incididunt ut labore et dolore magna aliqua ut enim ad minim veniam quis nostrud exercitation ullamco laboris nisi ut aliquip.</a:t>
+              <a:t>Dolor sit amet consectetur adipiscing elit sed do eiusmod tempor incididunt ut labore et dolore magna aliqua ut enim ad.</a:t>
             </a:r>
             <a:endParaRPr lang="en-US" sz="1350" dirty="0"/>
           </a:p>
@@ -18569,12 +18569,12 @@
         </p:nvSpPr>
         <p:spPr>
           <a:xfrm>
-            <a:off x="4307738" y="1783080"/>
-            <a:ext cx="3576218" cy="4343400"/>
+            <a:off x="4383938" y="1691640"/>
+            <a:ext cx="3423818" cy="4069080"/>
           </a:xfrm>
           <a:prstGeom prst="roundRect">
             <a:avLst>
-              <a:gd name="adj" fmla="val 3068"/>
+              <a:gd name="adj" fmla="val 3205"/>
             </a:avLst>
           </a:prstGeom>
           <a:solidFill>
@@ -18596,8 +18596,8 @@
         </p:nvSpPr>
         <p:spPr>
           <a:xfrm>
-            <a:off x="4627778" y="2103120"/>
-            <a:ext cx="658368" cy="658368"/>
+            <a:off x="4749698" y="2057400"/>
+            <a:ext cx="585216" cy="585216"/>
           </a:xfrm>
           <a:prstGeom prst="roundRect">
             <a:avLst>
@@ -18631,8 +18631,8 @@
         </p:blipFill>
         <p:spPr>
           <a:xfrm>
-            <a:off x="4759452" y="2234794"/>
-            <a:ext cx="395021" cy="395021"/>
+            <a:off x="4866742" y="2174443"/>
+            <a:ext cx="351130" cy="351130"/>
           </a:xfrm>
           <a:prstGeom prst="rect">
             <a:avLst/>
@@ -18647,8 +18647,8 @@
         </p:nvSpPr>
         <p:spPr>
           <a:xfrm>
-            <a:off x="4627778" y="2953512"/>
-            <a:ext cx="2936138" cy="274320"/>
+            <a:off x="4749698" y="2880360"/>
+            <a:ext cx="2692298" cy="274320"/>
           </a:xfrm>
           <a:prstGeom prst="rect">
             <a:avLst/>
@@ -18686,8 +18686,8 @@
         </p:nvSpPr>
         <p:spPr>
           <a:xfrm>
-            <a:off x="4627778" y="3246120"/>
-            <a:ext cx="2936138" cy="731520"/>
+            <a:off x="4749698" y="3200400"/>
+            <a:ext cx="2692298" cy="731520"/>
           </a:xfrm>
           <a:prstGeom prst="rect">
             <a:avLst/>
@@ -18703,7 +18703,7 @@
               <a:buNone/>
             </a:pPr>
             <a:r>
-              <a:rPr lang="en-US" sz="2000" b="1" dirty="0">
+              <a:rPr lang="en-US" sz="1900" b="1" dirty="0">
                 <a:solidFill>
                   <a:srgbClr val="222731"/>
                 </a:solidFill>
@@ -18713,7 +18713,7 @@
               </a:rPr>
               <a:t>Qui officia deserunt mollit</a:t>
             </a:r>
-            <a:endParaRPr lang="en-US" sz="2000" dirty="0"/>
+            <a:endParaRPr lang="en-US" sz="1900" dirty="0"/>
           </a:p>
         </p:txBody>
       </p:sp>
@@ -18725,8 +18725,8 @@
         </p:nvSpPr>
         <p:spPr>
           <a:xfrm>
-            <a:off x="4627778" y="4069080"/>
-            <a:ext cx="2936138" cy="1828800"/>
+            <a:off x="4749698" y="4023360"/>
+            <a:ext cx="2692298" cy="1371600"/>
           </a:xfrm>
           <a:prstGeom prst="rect">
             <a:avLst/>
@@ -18750,7 +18750,7 @@
                 <a:ea typeface="Hanken Grotesk" pitchFamily="34" charset="-122"/>
                 <a:cs typeface="Hanken Grotesk" pitchFamily="34" charset="-120"/>
               </a:rPr>
-              <a:t>Ut aliquip ex ea commodo consequat duis aute irure dolor in reprehenderit in voluptate velit esse cillum dolore eu fugiat nulla pariatur excepteur sint occaecat cupidatat non proident sunt in.</a:t>
+              <a:t>Ut aliquip ex ea commodo consequat duis aute irure dolor in reprehenderit in voluptate velit esse cillum dolore eu fugiat.</a:t>
             </a:r>
             <a:endParaRPr lang="en-US" sz="1350" dirty="0"/>
           </a:p>
@@ -18764,12 +18764,12 @@
         </p:nvSpPr>
         <p:spPr>
           <a:xfrm>
-            <a:off x="8158277" y="1783080"/>
-            <a:ext cx="3576218" cy="4343400"/>
+            <a:off x="8082077" y="1691640"/>
+            <a:ext cx="3423818" cy="4069080"/>
           </a:xfrm>
           <a:prstGeom prst="roundRect">
             <a:avLst>
-              <a:gd name="adj" fmla="val 3068"/>
+              <a:gd name="adj" fmla="val 3205"/>
             </a:avLst>
           </a:prstGeom>
           <a:solidFill>
@@ -18791,8 +18791,8 @@
         </p:nvSpPr>
         <p:spPr>
           <a:xfrm>
-            <a:off x="8478317" y="2103120"/>
-            <a:ext cx="658368" cy="658368"/>
+            <a:off x="8447837" y="2057400"/>
+            <a:ext cx="585216" cy="585216"/>
           </a:xfrm>
           <a:prstGeom prst="roundRect">
             <a:avLst>
@@ -18826,8 +18826,8 @@
         </p:blipFill>
         <p:spPr>
           <a:xfrm>
-            <a:off x="8609990" y="2234794"/>
-            <a:ext cx="395021" cy="395021"/>
+            <a:off x="8564880" y="2174443"/>
+            <a:ext cx="351130" cy="351130"/>
           </a:xfrm>
           <a:prstGeom prst="rect">
             <a:avLst/>
@@ -18842,8 +18842,8 @@
         </p:nvSpPr>
         <p:spPr>
           <a:xfrm>
-            <a:off x="8478317" y="2953512"/>
-            <a:ext cx="2936138" cy="274320"/>
+            <a:off x="8447837" y="2880360"/>
+            <a:ext cx="2692298" cy="274320"/>
           </a:xfrm>
           <a:prstGeom prst="rect">
             <a:avLst/>
@@ -18881,8 +18881,8 @@
         </p:nvSpPr>
         <p:spPr>
           <a:xfrm>
-            <a:off x="8478317" y="3246120"/>
-            <a:ext cx="2936138" cy="731520"/>
+            <a:off x="8447837" y="3200400"/>
+            <a:ext cx="2692298" cy="731520"/>
           </a:xfrm>
           <a:prstGeom prst="rect">
             <a:avLst/>
@@ -18898,7 +18898,7 @@
               <a:buNone/>
             </a:pPr>
             <a:r>
-              <a:rPr lang="en-US" sz="2000" b="1" dirty="0">
+              <a:rPr lang="en-US" sz="1900" b="1" dirty="0">
                 <a:solidFill>
                   <a:srgbClr val="222731"/>
                 </a:solidFill>
@@ -18908,7 +18908,7 @@
               </a:rPr>
               <a:t>Mauris eu nibh euismod</a:t>
             </a:r>
-            <a:endParaRPr lang="en-US" sz="2000" dirty="0"/>
+            <a:endParaRPr lang="en-US" sz="1900" dirty="0"/>
           </a:p>
         </p:txBody>
       </p:sp>
@@ -18920,8 +18920,8 @@
         </p:nvSpPr>
         <p:spPr>
           <a:xfrm>
-            <a:off x="8478317" y="4069080"/>
-            <a:ext cx="2936138" cy="1828800"/>
+            <a:off x="8447837" y="4023360"/>
+            <a:ext cx="2692298" cy="1371600"/>
           </a:xfrm>
           <a:prstGeom prst="rect">
             <a:avLst/>
@@ -18945,7 +18945,7 @@
                 <a:ea typeface="Hanken Grotesk" pitchFamily="34" charset="-122"/>
                 <a:cs typeface="Hanken Grotesk" pitchFamily="34" charset="-120"/>
               </a:rPr>
-              <a:t>Sunt in culpa qui officia deserunt mollit anim id est laborum curabitur pretium tincidunt lacus nulla gravida orci a odio nullam varius turpis et commodo pharetra est eros bibendum elit.</a:t>
+              <a:t>Sunt in culpa qui officia deserunt mollit anim id est laborum curabitur pretium tincidunt lacus nulla gravida orci a odio.</a:t>
             </a:r>
             <a:endParaRPr lang="en-US" sz="1350" dirty="0"/>
           </a:p>
@@ -18991,8 +18991,8 @@
         </p:nvSpPr>
         <p:spPr>
           <a:xfrm>
-            <a:off x="457200" y="384048"/>
-            <a:ext cx="8961120" cy="274320"/>
+            <a:off x="685800" y="502920"/>
+            <a:ext cx="8595360" cy="274320"/>
           </a:xfrm>
           <a:prstGeom prst="rect">
             <a:avLst/>
@@ -19030,8 +19030,8 @@
         </p:nvSpPr>
         <p:spPr>
           <a:xfrm>
-            <a:off x="457200" y="676656"/>
-            <a:ext cx="11274552" cy="868680"/>
+            <a:off x="685800" y="804672"/>
+            <a:ext cx="10820095" cy="566928"/>
           </a:xfrm>
           <a:prstGeom prst="rect">
             <a:avLst/>
@@ -19050,7 +19050,7 @@
               <a:buNone/>
             </a:pPr>
             <a:r>
-              <a:rPr lang="en-US" sz="3000" b="1" dirty="0">
+              <a:rPr lang="en-US" sz="2800" b="1" dirty="0">
                 <a:solidFill>
                   <a:srgbClr val="222731"/>
                 </a:solidFill>
@@ -19058,9 +19058,9 @@
                 <a:ea typeface="Bricolage Grotesque" pitchFamily="34" charset="-122"/>
                 <a:cs typeface="Bricolage Grotesque" pitchFamily="34" charset="-120"/>
               </a:rPr>
-              <a:t>Tempor incididunt ut labore et dolore magna aliqua ut enim ad</a:t>
-            </a:r>
-            <a:endParaRPr lang="en-US" sz="3000" dirty="0"/>
+              <a:t>Tempor incididunt ut labore et dolore magna</a:t>
+            </a:r>
+            <a:endParaRPr lang="en-US" sz="2800" dirty="0"/>
           </a:p>
         </p:txBody>
       </p:sp>
@@ -19072,7 +19072,7 @@
         </p:nvSpPr>
         <p:spPr>
           <a:xfrm>
-            <a:off x="457200" y="6400800"/>
+            <a:off x="685800" y="6400800"/>
             <a:ext cx="4389120" cy="256032"/>
           </a:xfrm>
           <a:prstGeom prst="rect">
@@ -19112,7 +19112,7 @@
         <p:spPr>
           <a:xfrm>
             <a:off x="4937760" y="6400800"/>
-            <a:ext cx="5943600" cy="256032"/>
+            <a:ext cx="5790895" cy="256032"/>
           </a:xfrm>
           <a:prstGeom prst="rect">
             <a:avLst/>
@@ -19150,7 +19150,7 @@
         </p:nvSpPr>
         <p:spPr>
           <a:xfrm>
-            <a:off x="11091672" y="6400800"/>
+            <a:off x="10865815" y="6400800"/>
             <a:ext cx="640080" cy="256032"/>
           </a:xfrm>
           <a:prstGeom prst="rect">
@@ -19189,12 +19189,12 @@
         </p:nvSpPr>
         <p:spPr>
           <a:xfrm>
-            <a:off x="457200" y="1783080"/>
-            <a:ext cx="3576218" cy="4343400"/>
+            <a:off x="685800" y="1691640"/>
+            <a:ext cx="3423818" cy="4069080"/>
           </a:xfrm>
           <a:prstGeom prst="roundRect">
             <a:avLst>
-              <a:gd name="adj" fmla="val 3068"/>
+              <a:gd name="adj" fmla="val 3205"/>
             </a:avLst>
           </a:prstGeom>
           <a:solidFill>
@@ -19216,7 +19216,7 @@
         </p:nvSpPr>
         <p:spPr>
           <a:xfrm>
-            <a:off x="731520" y="2011680"/>
+            <a:off x="1051560" y="2057400"/>
             <a:ext cx="457200" cy="457200"/>
           </a:xfrm>
           <a:prstGeom prst="roundRect">
@@ -19251,7 +19251,7 @@
         </p:blipFill>
         <p:spPr>
           <a:xfrm>
-            <a:off x="822960" y="2103120"/>
+            <a:off x="1143000" y="2148840"/>
             <a:ext cx="274320" cy="274320"/>
           </a:xfrm>
           <a:prstGeom prst="rect">
@@ -19267,8 +19267,8 @@
         </p:nvSpPr>
         <p:spPr>
           <a:xfrm>
-            <a:off x="731520" y="2606040"/>
-            <a:ext cx="3027578" cy="1828800"/>
+            <a:off x="1051560" y="2697480"/>
+            <a:ext cx="2692298" cy="1371600"/>
           </a:xfrm>
           <a:prstGeom prst="rect">
             <a:avLst/>
@@ -19292,7 +19292,7 @@
                 <a:ea typeface="Bricolage Grotesque" pitchFamily="34" charset="-122"/>
                 <a:cs typeface="Bricolage Grotesque" pitchFamily="34" charset="-120"/>
               </a:rPr>
-              <a:t>“Labore et dolore magna aliqua ut enim ad minim veniam quis nostrud exercitation ullamco laboris nisi ut aliquip ex ea.”</a:t>
+              <a:t>“Labore et dolore magna aliqua ut enim ad minim veniam quis nostrud exercitation ullamco laboris.”</a:t>
             </a:r>
             <a:endParaRPr lang="en-US" sz="1600" dirty="0"/>
           </a:p>
@@ -19306,8 +19306,8 @@
         </p:nvSpPr>
         <p:spPr>
           <a:xfrm>
-            <a:off x="731520" y="4572000"/>
-            <a:ext cx="3027578" cy="0"/>
+            <a:off x="1051560" y="4206240"/>
+            <a:ext cx="2692298" cy="0"/>
           </a:xfrm>
           <a:prstGeom prst="line">
             <a:avLst/>
@@ -19329,8 +19329,8 @@
         </p:nvSpPr>
         <p:spPr>
           <a:xfrm>
-            <a:off x="731520" y="4709160"/>
-            <a:ext cx="3027578" cy="292608"/>
+            <a:off x="1051560" y="4343400"/>
+            <a:ext cx="2692298" cy="292608"/>
           </a:xfrm>
           <a:prstGeom prst="rect">
             <a:avLst/>
@@ -19368,8 +19368,8 @@
         </p:nvSpPr>
         <p:spPr>
           <a:xfrm>
-            <a:off x="731520" y="5029200"/>
-            <a:ext cx="3027578" cy="274320"/>
+            <a:off x="1051560" y="4654296"/>
+            <a:ext cx="2692298" cy="256032"/>
           </a:xfrm>
           <a:prstGeom prst="rect">
             <a:avLst/>
@@ -19407,8 +19407,8 @@
         </p:nvSpPr>
         <p:spPr>
           <a:xfrm>
-            <a:off x="731520" y="5440680"/>
-            <a:ext cx="3027578" cy="411480"/>
+            <a:off x="1051560" y="4983480"/>
+            <a:ext cx="2692298" cy="411480"/>
           </a:xfrm>
           <a:prstGeom prst="roundRect">
             <a:avLst>
@@ -19434,8 +19434,8 @@
         </p:nvSpPr>
         <p:spPr>
           <a:xfrm>
-            <a:off x="868680" y="5440680"/>
-            <a:ext cx="2753258" cy="411480"/>
+            <a:off x="1188720" y="4983480"/>
+            <a:ext cx="2417978" cy="411480"/>
           </a:xfrm>
           <a:prstGeom prst="rect">
             <a:avLst/>
@@ -19473,12 +19473,12 @@
         </p:nvSpPr>
         <p:spPr>
           <a:xfrm>
-            <a:off x="4307738" y="1783080"/>
-            <a:ext cx="3576218" cy="4343400"/>
+            <a:off x="4383938" y="1691640"/>
+            <a:ext cx="3423818" cy="4069080"/>
           </a:xfrm>
           <a:prstGeom prst="roundRect">
             <a:avLst>
-              <a:gd name="adj" fmla="val 3068"/>
+              <a:gd name="adj" fmla="val 3205"/>
             </a:avLst>
           </a:prstGeom>
           <a:solidFill>
@@ -19500,7 +19500,7 @@
         </p:nvSpPr>
         <p:spPr>
           <a:xfrm>
-            <a:off x="4582058" y="2011680"/>
+            <a:off x="4749698" y="2057400"/>
             <a:ext cx="457200" cy="457200"/>
           </a:xfrm>
           <a:prstGeom prst="roundRect">
@@ -19535,7 +19535,7 @@
         </p:blipFill>
         <p:spPr>
           <a:xfrm>
-            <a:off x="4673498" y="2103120"/>
+            <a:off x="4841138" y="2148840"/>
             <a:ext cx="274320" cy="274320"/>
           </a:xfrm>
           <a:prstGeom prst="rect">
@@ -19551,8 +19551,8 @@
         </p:nvSpPr>
         <p:spPr>
           <a:xfrm>
-            <a:off x="4582058" y="2606040"/>
-            <a:ext cx="3027578" cy="1828800"/>
+            <a:off x="4749698" y="2697480"/>
+            <a:ext cx="2692298" cy="1371600"/>
           </a:xfrm>
           <a:prstGeom prst="rect">
             <a:avLst/>
@@ -19576,7 +19576,7 @@
                 <a:ea typeface="Bricolage Grotesque" pitchFamily="34" charset="-122"/>
                 <a:cs typeface="Bricolage Grotesque" pitchFamily="34" charset="-120"/>
               </a:rPr>
-              <a:t>“Non proident sunt in culpa qui officia deserunt mollit anim id est laborum curabitur pretium tincidunt lacus nulla gravida orci.”</a:t>
+              <a:t>“Non proident sunt in culpa qui officia deserunt mollit anim id est laborum curabitur pretium.”</a:t>
             </a:r>
             <a:endParaRPr lang="en-US" sz="1600" dirty="0"/>
           </a:p>
@@ -19590,8 +19590,8 @@
         </p:nvSpPr>
         <p:spPr>
           <a:xfrm>
-            <a:off x="4582058" y="4572000"/>
-            <a:ext cx="3027578" cy="0"/>
+            <a:off x="4749698" y="4206240"/>
+            <a:ext cx="2692298" cy="0"/>
           </a:xfrm>
           <a:prstGeom prst="line">
             <a:avLst/>
@@ -19613,8 +19613,8 @@
         </p:nvSpPr>
         <p:spPr>
           <a:xfrm>
-            <a:off x="4582058" y="4709160"/>
-            <a:ext cx="3027578" cy="292608"/>
+            <a:off x="4749698" y="4343400"/>
+            <a:ext cx="2692298" cy="292608"/>
           </a:xfrm>
           <a:prstGeom prst="rect">
             <a:avLst/>
@@ -19652,8 +19652,8 @@
         </p:nvSpPr>
         <p:spPr>
           <a:xfrm>
-            <a:off x="4582058" y="5029200"/>
-            <a:ext cx="3027578" cy="274320"/>
+            <a:off x="4749698" y="4654296"/>
+            <a:ext cx="2692298" cy="256032"/>
           </a:xfrm>
           <a:prstGeom prst="rect">
             <a:avLst/>
@@ -19691,8 +19691,8 @@
         </p:nvSpPr>
         <p:spPr>
           <a:xfrm>
-            <a:off x="4582058" y="5440680"/>
-            <a:ext cx="3027578" cy="411480"/>
+            <a:off x="4749698" y="4983480"/>
+            <a:ext cx="2692298" cy="411480"/>
           </a:xfrm>
           <a:prstGeom prst="roundRect">
             <a:avLst>
@@ -19718,8 +19718,8 @@
         </p:nvSpPr>
         <p:spPr>
           <a:xfrm>
-            <a:off x="4719218" y="5440680"/>
-            <a:ext cx="2753258" cy="411480"/>
+            <a:off x="4886858" y="4983480"/>
+            <a:ext cx="2417978" cy="411480"/>
           </a:xfrm>
           <a:prstGeom prst="rect">
             <a:avLst/>
@@ -19757,12 +19757,12 @@
         </p:nvSpPr>
         <p:spPr>
           <a:xfrm>
-            <a:off x="8158277" y="1783080"/>
-            <a:ext cx="3576218" cy="4343400"/>
+            <a:off x="8082077" y="1691640"/>
+            <a:ext cx="3423818" cy="4069080"/>
           </a:xfrm>
           <a:prstGeom prst="roundRect">
             <a:avLst>
-              <a:gd name="adj" fmla="val 3068"/>
+              <a:gd name="adj" fmla="val 3205"/>
             </a:avLst>
           </a:prstGeom>
           <a:solidFill>
@@ -19784,7 +19784,7 @@
         </p:nvSpPr>
         <p:spPr>
           <a:xfrm>
-            <a:off x="8432597" y="2011680"/>
+            <a:off x="8447837" y="2057400"/>
             <a:ext cx="457200" cy="457200"/>
           </a:xfrm>
           <a:prstGeom prst="roundRect">
@@ -19819,7 +19819,7 @@
         </p:blipFill>
         <p:spPr>
           <a:xfrm>
-            <a:off x="8524037" y="2103120"/>
+            <a:off x="8539277" y="2148840"/>
             <a:ext cx="274320" cy="274320"/>
           </a:xfrm>
           <a:prstGeom prst="rect">
@@ -19835,8 +19835,8 @@
         </p:nvSpPr>
         <p:spPr>
           <a:xfrm>
-            <a:off x="8432597" y="2606040"/>
-            <a:ext cx="3027578" cy="1828800"/>
+            <a:off x="8447837" y="2697480"/>
+            <a:ext cx="2692298" cy="1371600"/>
           </a:xfrm>
           <a:prstGeom prst="rect">
             <a:avLst/>
@@ -19860,7 +19860,7 @@
                 <a:ea typeface="Bricolage Grotesque" pitchFamily="34" charset="-122"/>
                 <a:cs typeface="Bricolage Grotesque" pitchFamily="34" charset="-120"/>
               </a:rPr>
-              <a:t>“Nibh euismod gravida lorem ipsum dolor sit amet consectetur adipiscing elit sed do eiusmod tempor incididunt ut labore et dolore.”</a:t>
+              <a:t>“Nibh euismod gravida lorem ipsum dolor sit amet consectetur adipiscing elit sed do eiusmod tempor.”</a:t>
             </a:r>
             <a:endParaRPr lang="en-US" sz="1600" dirty="0"/>
           </a:p>
@@ -19874,8 +19874,8 @@
         </p:nvSpPr>
         <p:spPr>
           <a:xfrm>
-            <a:off x="8432597" y="4572000"/>
-            <a:ext cx="3027578" cy="0"/>
+            <a:off x="8447837" y="4206240"/>
+            <a:ext cx="2692298" cy="0"/>
           </a:xfrm>
           <a:prstGeom prst="line">
             <a:avLst/>
@@ -19897,8 +19897,8 @@
         </p:nvSpPr>
         <p:spPr>
           <a:xfrm>
-            <a:off x="8432597" y="4709160"/>
-            <a:ext cx="3027578" cy="292608"/>
+            <a:off x="8447837" y="4343400"/>
+            <a:ext cx="2692298" cy="292608"/>
           </a:xfrm>
           <a:prstGeom prst="rect">
             <a:avLst/>
@@ -19936,8 +19936,8 @@
         </p:nvSpPr>
         <p:spPr>
           <a:xfrm>
-            <a:off x="8432597" y="5029200"/>
-            <a:ext cx="3027578" cy="274320"/>
+            <a:off x="8447837" y="4654296"/>
+            <a:ext cx="2692298" cy="256032"/>
           </a:xfrm>
           <a:prstGeom prst="rect">
             <a:avLst/>
@@ -19975,8 +19975,8 @@
         </p:nvSpPr>
         <p:spPr>
           <a:xfrm>
-            <a:off x="8432597" y="5440680"/>
-            <a:ext cx="3027578" cy="411480"/>
+            <a:off x="8447837" y="4983480"/>
+            <a:ext cx="2692298" cy="411480"/>
           </a:xfrm>
           <a:prstGeom prst="roundRect">
             <a:avLst>
@@ -20002,8 +20002,8 @@
         </p:nvSpPr>
         <p:spPr>
           <a:xfrm>
-            <a:off x="8569757" y="5440680"/>
-            <a:ext cx="2753258" cy="411480"/>
+            <a:off x="8584997" y="4983480"/>
+            <a:ext cx="2417978" cy="411480"/>
           </a:xfrm>
           <a:prstGeom prst="rect">
             <a:avLst/>
@@ -20073,8 +20073,8 @@
         </p:nvSpPr>
         <p:spPr>
           <a:xfrm>
-            <a:off x="457200" y="384048"/>
-            <a:ext cx="8961120" cy="274320"/>
+            <a:off x="685800" y="502920"/>
+            <a:ext cx="8595360" cy="274320"/>
           </a:xfrm>
           <a:prstGeom prst="rect">
             <a:avLst/>
@@ -20112,8 +20112,8 @@
         </p:nvSpPr>
         <p:spPr>
           <a:xfrm>
-            <a:off x="457200" y="676656"/>
-            <a:ext cx="11274552" cy="868680"/>
+            <a:off x="685800" y="804672"/>
+            <a:ext cx="10820095" cy="566928"/>
           </a:xfrm>
           <a:prstGeom prst="rect">
             <a:avLst/>
@@ -20132,7 +20132,7 @@
               <a:buNone/>
             </a:pPr>
             <a:r>
-              <a:rPr lang="en-US" sz="3000" b="1" dirty="0">
+              <a:rPr lang="en-US" sz="2800" b="1" dirty="0">
                 <a:solidFill>
                   <a:srgbClr val="222731"/>
                 </a:solidFill>
@@ -20140,9 +20140,9 @@
                 <a:ea typeface="Bricolage Grotesque" pitchFamily="34" charset="-122"/>
                 <a:cs typeface="Bricolage Grotesque" pitchFamily="34" charset="-120"/>
               </a:rPr>
-              <a:t>Ex ea commodo consequat duis aute irure dolor in</a:t>
-            </a:r>
-            <a:endParaRPr lang="en-US" sz="3000" dirty="0"/>
+              <a:t>Ex ea commodo consequat duis aute</a:t>
+            </a:r>
+            <a:endParaRPr lang="en-US" sz="2800" dirty="0"/>
           </a:p>
         </p:txBody>
       </p:sp>
@@ -20154,7 +20154,7 @@
         </p:nvSpPr>
         <p:spPr>
           <a:xfrm>
-            <a:off x="457200" y="6400800"/>
+            <a:off x="685800" y="6400800"/>
             <a:ext cx="4389120" cy="256032"/>
           </a:xfrm>
           <a:prstGeom prst="rect">
@@ -20194,7 +20194,7 @@
         <p:spPr>
           <a:xfrm>
             <a:off x="4937760" y="6400800"/>
-            <a:ext cx="5943600" cy="256032"/>
+            <a:ext cx="5790895" cy="256032"/>
           </a:xfrm>
           <a:prstGeom prst="rect">
             <a:avLst/>
@@ -20232,7 +20232,7 @@
         </p:nvSpPr>
         <p:spPr>
           <a:xfrm>
-            <a:off x="11091672" y="6400800"/>
+            <a:off x="10865815" y="6400800"/>
             <a:ext cx="640080" cy="256032"/>
           </a:xfrm>
           <a:prstGeom prst="rect">
@@ -20271,12 +20271,12 @@
         </p:nvSpPr>
         <p:spPr>
           <a:xfrm>
-            <a:off x="457200" y="1783080"/>
-            <a:ext cx="3576218" cy="4343400"/>
+            <a:off x="685800" y="1691640"/>
+            <a:ext cx="3423818" cy="4069080"/>
           </a:xfrm>
           <a:prstGeom prst="roundRect">
             <a:avLst>
-              <a:gd name="adj" fmla="val 3068"/>
+              <a:gd name="adj" fmla="val 3205"/>
             </a:avLst>
           </a:prstGeom>
           <a:solidFill>
@@ -20298,8 +20298,8 @@
         </p:nvSpPr>
         <p:spPr>
           <a:xfrm>
-            <a:off x="777240" y="2103120"/>
-            <a:ext cx="658368" cy="658368"/>
+            <a:off x="1051560" y="2057400"/>
+            <a:ext cx="585216" cy="585216"/>
           </a:xfrm>
           <a:prstGeom prst="roundRect">
             <a:avLst>
@@ -20333,8 +20333,8 @@
         </p:blipFill>
         <p:spPr>
           <a:xfrm>
-            <a:off x="908914" y="2234794"/>
-            <a:ext cx="395021" cy="395021"/>
+            <a:off x="1168603" y="2174443"/>
+            <a:ext cx="351130" cy="351130"/>
           </a:xfrm>
           <a:prstGeom prst="rect">
             <a:avLst/>
@@ -20349,8 +20349,8 @@
         </p:nvSpPr>
         <p:spPr>
           <a:xfrm>
-            <a:off x="777240" y="2953512"/>
-            <a:ext cx="2936138" cy="274320"/>
+            <a:off x="1051560" y="2880360"/>
+            <a:ext cx="2692298" cy="274320"/>
           </a:xfrm>
           <a:prstGeom prst="rect">
             <a:avLst/>
@@ -20388,8 +20388,8 @@
         </p:nvSpPr>
         <p:spPr>
           <a:xfrm>
-            <a:off x="777240" y="3246120"/>
-            <a:ext cx="2936138" cy="731520"/>
+            <a:off x="1051560" y="3200400"/>
+            <a:ext cx="2692298" cy="731520"/>
           </a:xfrm>
           <a:prstGeom prst="rect">
             <a:avLst/>
@@ -20405,7 +20405,7 @@
               <a:buNone/>
             </a:pPr>
             <a:r>
-              <a:rPr lang="en-US" sz="2000" b="1" dirty="0">
+              <a:rPr lang="en-US" sz="1900" b="1" dirty="0">
                 <a:solidFill>
                   <a:srgbClr val="222731"/>
                 </a:solidFill>
@@ -20415,7 +20415,7 @@
               </a:rPr>
               <a:t>Varius turpis et commodo</a:t>
             </a:r>
-            <a:endParaRPr lang="en-US" sz="2000" dirty="0"/>
+            <a:endParaRPr lang="en-US" sz="1900" dirty="0"/>
           </a:p>
         </p:txBody>
       </p:sp>
@@ -20427,8 +20427,8 @@
         </p:nvSpPr>
         <p:spPr>
           <a:xfrm>
-            <a:off x="777240" y="4069080"/>
-            <a:ext cx="2936138" cy="1828800"/>
+            <a:off x="1051560" y="4023360"/>
+            <a:ext cx="2692298" cy="1371600"/>
           </a:xfrm>
           <a:prstGeom prst="rect">
             <a:avLst/>
@@ -20452,7 +20452,7 @@
                 <a:ea typeface="Hanken Grotesk" pitchFamily="34" charset="-122"/>
                 <a:cs typeface="Hanken Grotesk" pitchFamily="34" charset="-120"/>
               </a:rPr>
-              <a:t>Pharetra est eros bibendum elit nec luctus magna felis sollicitudin mauris integer in mauris eu nibh euismod gravida lorem ipsum dolor sit amet consectetur adipiscing elit sed do eiusmod tempor.</a:t>
+              <a:t>Pharetra est eros bibendum elit nec luctus magna felis sollicitudin mauris integer in mauris eu nibh euismod gravida lorem ipsum.</a:t>
             </a:r>
             <a:endParaRPr lang="en-US" sz="1350" dirty="0"/>
           </a:p>
@@ -20466,12 +20466,12 @@
         </p:nvSpPr>
         <p:spPr>
           <a:xfrm>
-            <a:off x="4307738" y="1783080"/>
-            <a:ext cx="3576218" cy="4343400"/>
+            <a:off x="4383938" y="1691640"/>
+            <a:ext cx="3423818" cy="4069080"/>
           </a:xfrm>
           <a:prstGeom prst="roundRect">
             <a:avLst>
-              <a:gd name="adj" fmla="val 3068"/>
+              <a:gd name="adj" fmla="val 3205"/>
             </a:avLst>
           </a:prstGeom>
           <a:solidFill>
@@ -20493,8 +20493,8 @@
         </p:nvSpPr>
         <p:spPr>
           <a:xfrm>
-            <a:off x="4627778" y="2103120"/>
-            <a:ext cx="658368" cy="658368"/>
+            <a:off x="4749698" y="2057400"/>
+            <a:ext cx="585216" cy="585216"/>
           </a:xfrm>
           <a:prstGeom prst="roundRect">
             <a:avLst>
@@ -20528,8 +20528,8 @@
         </p:blipFill>
         <p:spPr>
           <a:xfrm>
-            <a:off x="4759452" y="2234794"/>
-            <a:ext cx="395021" cy="395021"/>
+            <a:off x="4866742" y="2174443"/>
+            <a:ext cx="351130" cy="351130"/>
           </a:xfrm>
           <a:prstGeom prst="rect">
             <a:avLst/>
@@ -20544,8 +20544,8 @@
         </p:nvSpPr>
         <p:spPr>
           <a:xfrm>
-            <a:off x="4627778" y="2953512"/>
-            <a:ext cx="2936138" cy="274320"/>
+            <a:off x="4749698" y="2880360"/>
+            <a:ext cx="2692298" cy="274320"/>
           </a:xfrm>
           <a:prstGeom prst="rect">
             <a:avLst/>
@@ -20583,8 +20583,8 @@
         </p:nvSpPr>
         <p:spPr>
           <a:xfrm>
-            <a:off x="4627778" y="3246120"/>
-            <a:ext cx="2936138" cy="731520"/>
+            <a:off x="4749698" y="3200400"/>
+            <a:ext cx="2692298" cy="731520"/>
           </a:xfrm>
           <a:prstGeom prst="rect">
             <a:avLst/>
@@ -20600,7 +20600,7 @@
               <a:buNone/>
             </a:pPr>
             <a:r>
-              <a:rPr lang="en-US" sz="2000" b="1" dirty="0">
+              <a:rPr lang="en-US" sz="1900" b="1" dirty="0">
                 <a:solidFill>
                   <a:srgbClr val="222731"/>
                 </a:solidFill>
@@ -20610,7 +20610,7 @@
               </a:rPr>
               <a:t>Ut labore et dolore</a:t>
             </a:r>
-            <a:endParaRPr lang="en-US" sz="2000" dirty="0"/>
+            <a:endParaRPr lang="en-US" sz="1900" dirty="0"/>
           </a:p>
         </p:txBody>
       </p:sp>
@@ -20622,8 +20622,8 @@
         </p:nvSpPr>
         <p:spPr>
           <a:xfrm>
-            <a:off x="4627778" y="4069080"/>
-            <a:ext cx="2936138" cy="1828800"/>
+            <a:off x="4749698" y="4023360"/>
+            <a:ext cx="2692298" cy="1371600"/>
           </a:xfrm>
           <a:prstGeom prst="rect">
             <a:avLst/>
@@ -20647,7 +20647,7 @@
                 <a:ea typeface="Hanken Grotesk" pitchFamily="34" charset="-122"/>
                 <a:cs typeface="Hanken Grotesk" pitchFamily="34" charset="-120"/>
               </a:rPr>
-              <a:t>Eiusmod tempor incididunt ut labore et dolore magna aliqua ut enim ad minim veniam quis nostrud exercitation ullamco laboris nisi ut aliquip ex ea commodo consequat duis aute irure dolor.</a:t>
+              <a:t>Eiusmod tempor incididunt ut labore et dolore magna aliqua ut enim ad minim veniam quis nostrud exercitation ullamco laboris nisi.</a:t>
             </a:r>
             <a:endParaRPr lang="en-US" sz="1350" dirty="0"/>
           </a:p>
@@ -20661,12 +20661,12 @@
         </p:nvSpPr>
         <p:spPr>
           <a:xfrm>
-            <a:off x="8158277" y="1783080"/>
-            <a:ext cx="3576218" cy="4343400"/>
+            <a:off x="8082077" y="1691640"/>
+            <a:ext cx="3423818" cy="4069080"/>
           </a:xfrm>
           <a:prstGeom prst="roundRect">
             <a:avLst>
-              <a:gd name="adj" fmla="val 3068"/>
+              <a:gd name="adj" fmla="val 3205"/>
             </a:avLst>
           </a:prstGeom>
           <a:solidFill>
@@ -20688,8 +20688,8 @@
         </p:nvSpPr>
         <p:spPr>
           <a:xfrm>
-            <a:off x="8478317" y="2103120"/>
-            <a:ext cx="658368" cy="658368"/>
+            <a:off x="8447837" y="2057400"/>
+            <a:ext cx="585216" cy="585216"/>
           </a:xfrm>
           <a:prstGeom prst="roundRect">
             <a:avLst>
@@ -20723,8 +20723,8 @@
         </p:blipFill>
         <p:spPr>
           <a:xfrm>
-            <a:off x="8609990" y="2234794"/>
-            <a:ext cx="395021" cy="395021"/>
+            <a:off x="8564880" y="2174443"/>
+            <a:ext cx="351130" cy="351130"/>
           </a:xfrm>
           <a:prstGeom prst="rect">
             <a:avLst/>
@@ -20739,8 +20739,8 @@
         </p:nvSpPr>
         <p:spPr>
           <a:xfrm>
-            <a:off x="8478317" y="2953512"/>
-            <a:ext cx="2936138" cy="274320"/>
+            <a:off x="8447837" y="2880360"/>
+            <a:ext cx="2692298" cy="274320"/>
           </a:xfrm>
           <a:prstGeom prst="rect">
             <a:avLst/>
@@ -20778,8 +20778,8 @@
         </p:nvSpPr>
         <p:spPr>
           <a:xfrm>
-            <a:off x="8478317" y="3246120"/>
-            <a:ext cx="2936138" cy="731520"/>
+            <a:off x="8447837" y="3200400"/>
+            <a:ext cx="2692298" cy="731520"/>
           </a:xfrm>
           <a:prstGeom prst="rect">
             <a:avLst/>
@@ -20795,7 +20795,7 @@
               <a:buNone/>
             </a:pPr>
             <a:r>
-              <a:rPr lang="en-US" sz="2000" b="1" dirty="0">
+              <a:rPr lang="en-US" sz="1900" b="1" dirty="0">
                 <a:solidFill>
                   <a:srgbClr val="222731"/>
                 </a:solidFill>
@@ -20805,7 +20805,7 @@
               </a:rPr>
               <a:t>Eu fugiat nulla pariatur</a:t>
             </a:r>
-            <a:endParaRPr lang="en-US" sz="2000" dirty="0"/>
+            <a:endParaRPr lang="en-US" sz="1900" dirty="0"/>
           </a:p>
         </p:txBody>
       </p:sp>
@@ -20817,8 +20817,8 @@
         </p:nvSpPr>
         <p:spPr>
           <a:xfrm>
-            <a:off x="8478317" y="4069080"/>
-            <a:ext cx="2936138" cy="1828800"/>
+            <a:off x="8447837" y="4023360"/>
+            <a:ext cx="2692298" cy="1371600"/>
           </a:xfrm>
           <a:prstGeom prst="rect">
             <a:avLst/>
@@ -20842,7 +20842,7 @@
                 <a:ea typeface="Hanken Grotesk" pitchFamily="34" charset="-122"/>
                 <a:cs typeface="Hanken Grotesk" pitchFamily="34" charset="-120"/>
               </a:rPr>
-              <a:t>Irure dolor in reprehenderit in voluptate velit esse cillum dolore eu fugiat nulla pariatur excepteur sint occaecat cupidatat non proident sunt in culpa qui officia deserunt mollit anim id est.</a:t>
+              <a:t>Irure dolor in reprehenderit in voluptate velit esse cillum dolore eu fugiat nulla pariatur excepteur sint occaecat cupidatat non proident.</a:t>
             </a:r>
             <a:endParaRPr lang="en-US" sz="1350" dirty="0"/>
           </a:p>
